--- a/deck/cpomdp_symposium_2026.pptx
+++ b/deck/cpomdp_symposium_2026.pptx
@@ -1700,7 +1700,7 @@
           <a:lstStyle/>
           <a:p>
             <a:r>
-              <a:t>Kev. Pointers only. Two moves ahead costs 162 plans a step against 9.</a:t>
+              <a:t>Kev. Pointers only. Two moves ahead scores 81 plans a step against 9.</a:t>
             </a:r>
           </a:p>
         </p:txBody>
@@ -9657,7 +9657,7 @@
                 </a:solidFill>
                 <a:latin typeface="Calibri"/>
               </a:rPr>
-              <a:t>Put the same rock in clear sky on their arc and both curious rockets hit it on step 5.</a:t>
+              <a:t>Seed 3: put the same rock in clear sky on their arc and both curious rockets hit it on step 5.</a:t>
             </a:r>
           </a:p>
         </p:txBody>
@@ -12047,7 +12047,7 @@
                 </a:solidFill>
                 <a:latin typeface="Calibri"/>
               </a:rPr>
-              <a:t>The world again, two moves ahead. Each step scores 162 plans in place of 9.</a:t>
+              <a:t>The world again, two moves ahead. Each step scores 81 plans in place of 9.</a:t>
             </a:r>
           </a:p>
         </p:txBody>
@@ -16714,10 +16714,10 @@
         <a:srgbClr val="F79646"/>
       </a:accent6>
       <a:hlink>
-        <a:srgbClr val="0000FF"/>
+        <a:srgbClr val="F3F0E6"/>
       </a:hlink>
       <a:folHlink>
-        <a:srgbClr val="800080"/>
+        <a:srgbClr val="F3F0E6"/>
       </a:folHlink>
     </a:clrScheme>
     <a:fontScheme name="Office">

--- a/deck/cpomdp_symposium_2026.pptx
+++ b/deck/cpomdp_symposium_2026.pptx
@@ -2677,7 +2677,7 @@
           <a:p/>
           <a:p>
             <a:r>
-              <a:t>Everything shown runs on cpomdp 0.5.0 from PyPI.</a:t>
+              <a:t>Everything shown runs on cpomdp 0.5.1 from PyPI.</a:t>
             </a:r>
           </a:p>
           <a:p/>
@@ -2929,7 +2929,7 @@
           <a:p/>
           <a:p>
             <a:r>
-              <a:t>Either way, cell 1 stops if cpomdp isn't 0.5.0 or Python is older than 3.11, and it prints what it found.</a:t>
+              <a:t>Either way, cell 1 stops if cpomdp isn't 0.5.1 or Python is older than 3.11, and it prints what it found.</a:t>
             </a:r>
           </a:p>
         </p:txBody>
@@ -6548,7 +6548,7 @@
                 </a:solidFill>
                 <a:latin typeface="Courier New"/>
               </a:rPr>
-              <a:t>cpomdp 0.5.0</a:t>
+              <a:t>cpomdp 0.5.1</a:t>
             </a:r>
           </a:p>
         </p:txBody>
@@ -17886,7 +17886,7 @@
                 </a:solidFill>
                 <a:latin typeface="Calibri"/>
               </a:rPr>
-              <a:t>today's notebook pins 0.5.0. Some of its src was written by Claude Code under the review described.</a:t>
+              <a:t>today's notebook pins 0.5.1. Some of its src was written by Claude Code under the review described.</a:t>
             </a:r>
           </a:p>
         </p:txBody>
@@ -18526,7 +18526,7 @@
                 </a:solidFill>
                 <a:latin typeface="Calibri"/>
               </a:rPr>
-              <a:t>[Zenodo DOI of cpomdp 0.5.0]</a:t>
+              <a:t>[Zenodo DOI of cpomdp 0.5.1]</a:t>
             </a:r>
           </a:p>
         </p:txBody>
@@ -18957,7 +18957,7 @@
                 </a:solidFill>
                 <a:latin typeface="Calibri"/>
               </a:rPr>
-              <a:t>Everything shown runs on cpomdp 0.5.0 from PyPI.</a:t>
+              <a:t>Everything shown runs on cpomdp 0.5.1 from PyPI.</a:t>
             </a:r>
           </a:p>
         </p:txBody>
@@ -21363,7 +21363,7 @@
                 </a:solidFill>
                 <a:latin typeface="Courier New"/>
               </a:rPr>
-              <a:t>pip install cpomdp-workshop==0.1.0</a:t>
+              <a:t>pip install cpomdp-workshop==0.2.0</a:t>
             </a:r>
           </a:p>
         </p:txBody>

--- a/deck/cpomdp_symposium_2026.pptx
+++ b/deck/cpomdp_symposium_2026.pptx
@@ -614,7 +614,7 @@
           <a:p/>
           <a:p>
             <a:r>
-              <a:t>Paste the nudges and hints from hints_chat.txt as the bar fills, a nudge before each hint. Whoever isn't at the keyboard watches the chat and the anonymous form. We don't debug anyone's code from the front. Point people at the hints, the reference cell and workshop.symptoms().</a:t>
+              <a:t>Nobody pastes hints. Each person opens the collapsed hint and reference cells when they like. Whoever isn't at the keyboard watches the chat and the anonymous form. We don't debug anyone's code from the front. Point people at the hints, the reference cell and workshop.symptoms().</a:t>
             </a:r>
           </a:p>
           <a:p/>
@@ -1069,7 +1069,7 @@
           <a:p/>
           <a:p>
             <a:r>
-              <a:t>Paste the nudges and hints from hints_chat.txt as the bar fills, a nudge before each hint. Whoever isn't at the keyboard watches the chat and the anonymous form. We don't debug anyone's code from the front. Point people at the hints, the reference cell and workshop.symptoms().</a:t>
+              <a:t>Nobody pastes hints. Each person opens the collapsed hint and reference cells when they like. Whoever isn't at the keyboard watches the chat and the anonymous form. We don't debug anyone's code from the front. Point people at the hints, the reference cell and workshop.symptoms().</a:t>
             </a:r>
           </a:p>
           <a:p/>
@@ -1536,13 +1536,7 @@
           <a:p/>
           <a:p>
             <a:r>
-              <a:t>Inferogenesis builds cpomdp, the library we'll use today, and warrantlib, which labels each of cpomdp's checks by how well it's warranted, apart from whether it held. We'll come back to both at the end.</a:t>
-            </a:r>
-          </a:p>
-          <a:p/>
-          <a:p>
-            <a:r>
-              <a:t>TODO owner: photos and bios on the cards.</a:t>
+              <a:t>cpomdp is the library we'll use today. It does active inference with continuous states, which makes it the continuous-state sibling of pymdp. If you've used pymdp, its agent runs the same loop of perceiving and then acting. We'll come back to what it adds at the end.</a:t>
             </a:r>
           </a:p>
         </p:txBody>
@@ -1618,7 +1612,7 @@
           <a:p/>
           <a:p>
             <a:r>
-              <a:t>Paste the nudges and hints from hints_chat.txt as the bar fills, a nudge before each hint. Whoever isn't at the keyboard watches the chat and the anonymous form. We don't debug anyone's code from the front. Point people at the hints, the reference cell and workshop.symptoms().</a:t>
+              <a:t>Nobody pastes hints. Each person opens the collapsed hint and reference cells when they like. Whoever isn't at the keyboard watches the chat and the anonymous form. We don't debug anyone's code from the front. Point people at the hints, the reference cell and workshop.symptoms().</a:t>
             </a:r>
           </a:p>
           <a:p/>
@@ -2683,6 +2677,12 @@
           <a:p/>
           <a:p>
             <a:r>
+              <a:t>The QR codes open Kev's LinkedIn and inferogenesis.com.</a:t>
+            </a:r>
+          </a:p>
+          <a:p/>
+          <a:p>
+            <a:r>
               <a:t>TODO owner: the survey link and the email.</a:t>
             </a:r>
           </a:p>
@@ -2835,7 +2835,13 @@
           <a:lstStyle/>
           <a:p>
             <a:r>
-              <a:t>Keyboard. Each task has two lines to write. Everything else in the cell is written for you. If you're stuck, the hints come in the chat on a timer, a nudge first and then the line itself. The reference cell is collapsed under the hints, and using it isn't failing.</a:t>
+              <a:t>Keyboard. Each task has two lines to write, and we've written the rest of the code, so the Python stays out of the way. Some of the bonus exercises ask you to write your own.</a:t>
+            </a:r>
+          </a:p>
+          <a:p/>
+          <a:p>
+            <a:r>
+              <a:t>Each task has two hints and a reference solution, collapsed below the cell. A hint shows its nudge first, and the line itself is behind Show code. Open them whenever you like, and using them isn't failing.</a:t>
             </a:r>
           </a:p>
           <a:p/>
@@ -9457,7 +9463,7 @@
                 </a:solidFill>
                 <a:latin typeface="Calibri"/>
               </a:rPr>
-              <a:t>Hints come in chat on a timer</a:t>
+              <a:t>Hints are below the cell</a:t>
             </a:r>
           </a:p>
         </p:txBody>
@@ -12000,7 +12006,7 @@
                 </a:solidFill>
                 <a:latin typeface="Calibri"/>
               </a:rPr>
-              <a:t>Hints come in chat on a timer</a:t>
+              <a:t>Hints are below the cell</a:t>
             </a:r>
           </a:p>
         </p:txBody>
@@ -12201,26 +12207,27 @@
       </p:sp>
       <p:sp>
         <p:nvSpPr>
-          <p:cNvPr id="4" name="placeholder"/>
+          <p:cNvPr id="4" name="photo presenter_1.jpg"/>
           <p:cNvSpPr/>
           <p:nvPr/>
         </p:nvSpPr>
         <p:spPr>
           <a:xfrm>
             <a:off x="548640" y="1325880"/>
-            <a:ext cx="1737360" cy="1737360"/>
+            <a:ext cx="1463040" cy="1463040"/>
           </a:xfrm>
           <a:prstGeom prst="roundRect">
             <a:avLst>
-              <a:gd name="adj" fmla="val 6315"/>
+              <a:gd name="adj" fmla="val 7500"/>
             </a:avLst>
           </a:prstGeom>
-          <a:noFill/>
-          <a:ln w="15875">
+          <a:solidFill>
+            <a:srgbClr val="FFFFFF"/>
+          </a:solidFill>
+          <a:ln w="12700">
             <a:solidFill>
-              <a:srgbClr val="E69F00"/>
+              <a:srgbClr val="D3CEBF"/>
             </a:solidFill>
-            <a:prstDash val="dash"/>
           </a:ln>
           <a:effectLst/>
         </p:spPr>
@@ -12242,20 +12249,7 @@
           <a:bodyPr rtlCol="0" anchor="ctr" wrap="square" lIns="164592" rIns="164592" tIns="115214" bIns="115214"/>
           <a:lstStyle/>
           <a:p>
-            <a:pPr algn="ctr">
-              <a:lnSpc>
-                <a:spcPct val="100000"/>
-              </a:lnSpc>
-            </a:pPr>
-            <a:r>
-              <a:rPr sz="1600" b="0">
-                <a:solidFill>
-                  <a:srgbClr val="8A6000"/>
-                </a:solidFill>
-                <a:latin typeface="Calibri"/>
-              </a:rPr>
-              <a:t>[photo]</a:t>
-            </a:r>
+            <a:pPr algn="ctr"/>
           </a:p>
         </p:txBody>
       </p:sp>
@@ -12267,8 +12261,8 @@
         </p:nvSpPr>
         <p:spPr>
           <a:xfrm>
-            <a:off x="2560320" y="1325880"/>
-            <a:ext cx="3383280" cy="457200"/>
+            <a:off x="2240280" y="1325880"/>
+            <a:ext cx="3657600" cy="457200"/>
           </a:xfrm>
           <a:prstGeom prst="rect">
             <a:avLst/>
@@ -12300,134 +12294,14 @@
       </p:sp>
       <p:sp>
         <p:nvSpPr>
-          <p:cNvPr id="6" name="placeholder"/>
-          <p:cNvSpPr/>
+          <p:cNvPr id="6" name="text"/>
+          <p:cNvSpPr txBox="1"/>
           <p:nvPr/>
         </p:nvSpPr>
         <p:spPr>
           <a:xfrm>
-            <a:off x="2560320" y="1920240"/>
-            <a:ext cx="3383280" cy="1143000"/>
-          </a:xfrm>
-          <a:prstGeom prst="roundRect">
-            <a:avLst>
-              <a:gd name="adj" fmla="val 8000"/>
-            </a:avLst>
-          </a:prstGeom>
-          <a:noFill/>
-          <a:ln w="15875">
-            <a:solidFill>
-              <a:srgbClr val="E69F00"/>
-            </a:solidFill>
-            <a:prstDash val="dash"/>
-          </a:ln>
-          <a:effectLst/>
-        </p:spPr>
-        <p:style>
-          <a:lnRef idx="1">
-            <a:schemeClr val="accent1"/>
-          </a:lnRef>
-          <a:fillRef idx="3">
-            <a:schemeClr val="accent1"/>
-          </a:fillRef>
-          <a:effectRef idx="2">
-            <a:schemeClr val="accent1"/>
-          </a:effectRef>
-          <a:fontRef idx="minor">
-            <a:schemeClr val="lt1"/>
-          </a:fontRef>
-        </p:style>
-        <p:txBody>
-          <a:bodyPr rtlCol="0" anchor="ctr" wrap="square" lIns="164592" rIns="164592" tIns="115214" bIns="115214"/>
-          <a:lstStyle/>
-          <a:p>
-            <a:pPr algn="ctr">
-              <a:lnSpc>
-                <a:spcPct val="100000"/>
-              </a:lnSpc>
-            </a:pPr>
-            <a:r>
-              <a:rPr sz="1600" b="0">
-                <a:solidFill>
-                  <a:srgbClr val="8A6000"/>
-                </a:solidFill>
-                <a:latin typeface="Calibri"/>
-              </a:rPr>
-              <a:t>[bio]</a:t>
-            </a:r>
-          </a:p>
-        </p:txBody>
-      </p:sp>
-      <p:sp>
-        <p:nvSpPr>
-          <p:cNvPr id="7" name="placeholder"/>
-          <p:cNvSpPr/>
-          <p:nvPr/>
-        </p:nvSpPr>
-        <p:spPr>
-          <a:xfrm>
-            <a:off x="6217920" y="1325880"/>
-            <a:ext cx="1737360" cy="1737360"/>
-          </a:xfrm>
-          <a:prstGeom prst="roundRect">
-            <a:avLst>
-              <a:gd name="adj" fmla="val 6315"/>
-            </a:avLst>
-          </a:prstGeom>
-          <a:noFill/>
-          <a:ln w="15875">
-            <a:solidFill>
-              <a:srgbClr val="E69F00"/>
-            </a:solidFill>
-            <a:prstDash val="dash"/>
-          </a:ln>
-          <a:effectLst/>
-        </p:spPr>
-        <p:style>
-          <a:lnRef idx="1">
-            <a:schemeClr val="accent1"/>
-          </a:lnRef>
-          <a:fillRef idx="3">
-            <a:schemeClr val="accent1"/>
-          </a:fillRef>
-          <a:effectRef idx="2">
-            <a:schemeClr val="accent1"/>
-          </a:effectRef>
-          <a:fontRef idx="minor">
-            <a:schemeClr val="lt1"/>
-          </a:fontRef>
-        </p:style>
-        <p:txBody>
-          <a:bodyPr rtlCol="0" anchor="ctr" wrap="square" lIns="164592" rIns="164592" tIns="115214" bIns="115214"/>
-          <a:lstStyle/>
-          <a:p>
-            <a:pPr algn="ctr">
-              <a:lnSpc>
-                <a:spcPct val="100000"/>
-              </a:lnSpc>
-            </a:pPr>
-            <a:r>
-              <a:rPr sz="1600" b="0">
-                <a:solidFill>
-                  <a:srgbClr val="8A6000"/>
-                </a:solidFill>
-                <a:latin typeface="Calibri"/>
-              </a:rPr>
-              <a:t>[photo]</a:t>
-            </a:r>
-          </a:p>
-        </p:txBody>
-      </p:sp>
-      <p:sp>
-        <p:nvSpPr>
-          <p:cNvPr id="8" name="text"/>
-          <p:cNvSpPr txBox="1"/>
-          <p:nvPr/>
-        </p:nvSpPr>
-        <p:spPr>
-          <a:xfrm>
-            <a:off x="8229600" y="1325880"/>
-            <a:ext cx="3383280" cy="457200"/>
+            <a:off x="2240280" y="1874519"/>
+            <a:ext cx="3657600" cy="2194560"/>
           </a:xfrm>
           <a:prstGeom prst="rect">
             <a:avLst/>
@@ -12446,39 +12320,40 @@
               </a:lnSpc>
             </a:pPr>
             <a:r>
-              <a:rPr sz="2200" b="1">
+              <a:rPr sz="1400" b="0">
                 <a:solidFill>
                   <a:srgbClr val="16241F"/>
                 </a:solidFill>
                 <a:latin typeface="Calibri"/>
               </a:rPr>
-              <a:t>Kev (concepts)</a:t>
-            </a:r>
-          </a:p>
-        </p:txBody>
-      </p:sp>
-      <p:sp>
-        <p:nvSpPr>
-          <p:cNvPr id="9" name="placeholder"/>
+              <a:t>Independent research software engineer, UK. Builds cpomdp, a JAX-native continuous-state active inference toolbox and the continuous sibling to pymdp, under Inferogenesis. Background in numerical general relativity and event-driven orchestration of RL models at scale. Author of State-Dependent Observation Noise Reintroduces Epistemic Value in Linear-Gaussian Active Inference (arXiv:2607.20306). Co-leads the Certifiable Active Inference programme.</a:t>
+            </a:r>
+          </a:p>
+        </p:txBody>
+      </p:sp>
+      <p:sp>
+        <p:nvSpPr>
+          <p:cNvPr id="7" name="photo presenter_2.jpg"/>
           <p:cNvSpPr/>
           <p:nvPr/>
         </p:nvSpPr>
         <p:spPr>
           <a:xfrm>
-            <a:off x="8229600" y="1920240"/>
-            <a:ext cx="3383280" cy="1143000"/>
+            <a:off x="6217920" y="1325880"/>
+            <a:ext cx="1463040" cy="1463040"/>
           </a:xfrm>
           <a:prstGeom prst="roundRect">
             <a:avLst>
-              <a:gd name="adj" fmla="val 8000"/>
+              <a:gd name="adj" fmla="val 7500"/>
             </a:avLst>
           </a:prstGeom>
-          <a:noFill/>
-          <a:ln w="15875">
+          <a:solidFill>
+            <a:srgbClr val="FFFFFF"/>
+          </a:solidFill>
+          <a:ln w="12700">
             <a:solidFill>
-              <a:srgbClr val="E69F00"/>
+              <a:srgbClr val="D3CEBF"/>
             </a:solidFill>
-            <a:prstDash val="dash"/>
           </a:ln>
           <a:effectLst/>
         </p:spPr>
@@ -12500,182 +12375,20 @@
           <a:bodyPr rtlCol="0" anchor="ctr" wrap="square" lIns="164592" rIns="164592" tIns="115214" bIns="115214"/>
           <a:lstStyle/>
           <a:p>
-            <a:pPr algn="ctr">
-              <a:lnSpc>
-                <a:spcPct val="100000"/>
-              </a:lnSpc>
-            </a:pPr>
-            <a:r>
-              <a:rPr sz="1600" b="0">
-                <a:solidFill>
-                  <a:srgbClr val="8A6000"/>
-                </a:solidFill>
-                <a:latin typeface="Calibri"/>
-              </a:rPr>
-              <a:t>[bio]</a:t>
-            </a:r>
-          </a:p>
-        </p:txBody>
-      </p:sp>
-      <p:grpSp>
-        <p:nvGrpSpPr>
-          <p:cNvPr id="10" name="mark"/>
-          <p:cNvGrpSpPr/>
-          <p:nvPr/>
-        </p:nvGrpSpPr>
-        <p:grpSpPr>
-          <a:xfrm>
-            <a:off x="686371" y="3932491"/>
-            <a:ext cx="462915" cy="1188149"/>
-            <a:chOff x="686371" y="3932491"/>
-            <a:chExt cx="462915" cy="1188149"/>
-          </a:xfrm>
-        </p:grpSpPr>
-        <p:sp>
-          <p:nvSpPr>
-            <p:cNvPr id="11" name="Oval 10"/>
-            <p:cNvSpPr/>
-            <p:nvPr/>
-          </p:nvSpPr>
-          <p:spPr>
-            <a:xfrm>
-              <a:off x="686371" y="3932491"/>
-              <a:ext cx="462915" cy="462915"/>
-            </a:xfrm>
-            <a:prstGeom prst="ellipse">
-              <a:avLst/>
-            </a:prstGeom>
-            <a:noFill/>
-            <a:ln w="100298">
-              <a:solidFill>
-                <a:srgbClr val="E69F00"/>
-              </a:solidFill>
-            </a:ln>
-            <a:effectLst/>
-          </p:spPr>
-          <p:style>
-            <a:lnRef idx="1">
-              <a:schemeClr val="accent1"/>
-            </a:lnRef>
-            <a:fillRef idx="3">
-              <a:schemeClr val="accent1"/>
-            </a:fillRef>
-            <a:effectRef idx="2">
-              <a:schemeClr val="accent1"/>
-            </a:effectRef>
-            <a:fontRef idx="minor">
-              <a:schemeClr val="lt1"/>
-            </a:fontRef>
-          </p:style>
-          <p:txBody>
-            <a:bodyPr rtlCol="0" anchor="ctr"/>
-            <a:lstStyle/>
-            <a:p>
-              <a:pPr algn="ctr"/>
-            </a:p>
-          </p:txBody>
-        </p:sp>
-        <p:sp>
-          <p:nvSpPr>
-            <p:cNvPr id="12" name="Oval 11"/>
-            <p:cNvSpPr/>
-            <p:nvPr/>
-          </p:nvSpPr>
-          <p:spPr>
-            <a:xfrm>
-              <a:off x="848391" y="4094511"/>
-              <a:ext cx="138874" cy="138874"/>
-            </a:xfrm>
-            <a:prstGeom prst="ellipse">
-              <a:avLst/>
-            </a:prstGeom>
-            <a:solidFill>
-              <a:srgbClr val="16241F"/>
-            </a:solidFill>
-            <a:ln>
-              <a:noFill/>
-            </a:ln>
-            <a:effectLst/>
-          </p:spPr>
-          <p:style>
-            <a:lnRef idx="1">
-              <a:schemeClr val="accent1"/>
-            </a:lnRef>
-            <a:fillRef idx="3">
-              <a:schemeClr val="accent1"/>
-            </a:fillRef>
-            <a:effectRef idx="2">
-              <a:schemeClr val="accent1"/>
-            </a:effectRef>
-            <a:fontRef idx="minor">
-              <a:schemeClr val="lt1"/>
-            </a:fontRef>
-          </p:style>
-          <p:txBody>
-            <a:bodyPr rtlCol="0" anchor="ctr"/>
-            <a:lstStyle/>
-            <a:p>
-              <a:pPr algn="ctr"/>
-            </a:p>
-          </p:txBody>
-        </p:sp>
-        <p:sp>
-          <p:nvSpPr>
-            <p:cNvPr id="13" name="Rounded Rectangle 12"/>
-            <p:cNvSpPr/>
-            <p:nvPr/>
-          </p:nvSpPr>
-          <p:spPr>
-            <a:xfrm>
-              <a:off x="817530" y="4441698"/>
-              <a:ext cx="200596" cy="678942"/>
-            </a:xfrm>
-            <a:prstGeom prst="roundRect">
-              <a:avLst>
-                <a:gd name="adj" fmla="val 50000"/>
-              </a:avLst>
-            </a:prstGeom>
-            <a:solidFill>
-              <a:srgbClr val="16241F"/>
-            </a:solidFill>
-            <a:ln>
-              <a:noFill/>
-            </a:ln>
-            <a:effectLst/>
-          </p:spPr>
-          <p:style>
-            <a:lnRef idx="1">
-              <a:schemeClr val="accent1"/>
-            </a:lnRef>
-            <a:fillRef idx="3">
-              <a:schemeClr val="accent1"/>
-            </a:fillRef>
-            <a:effectRef idx="2">
-              <a:schemeClr val="accent1"/>
-            </a:effectRef>
-            <a:fontRef idx="minor">
-              <a:schemeClr val="lt1"/>
-            </a:fontRef>
-          </p:style>
-          <p:txBody>
-            <a:bodyPr rtlCol="0" anchor="ctr"/>
-            <a:lstStyle/>
-            <a:p>
-              <a:pPr algn="ctr"/>
-            </a:p>
-          </p:txBody>
-        </p:sp>
-      </p:grpSp>
-      <p:sp>
-        <p:nvSpPr>
-          <p:cNvPr id="14" name="text"/>
+            <a:pPr algn="ctr"/>
+          </a:p>
+        </p:txBody>
+      </p:sp>
+      <p:sp>
+        <p:nvSpPr>
+          <p:cNvPr id="8" name="text"/>
           <p:cNvSpPr txBox="1"/>
           <p:nvPr/>
         </p:nvSpPr>
         <p:spPr>
           <a:xfrm>
-            <a:off x="1463040" y="3794760"/>
-            <a:ext cx="10180015" cy="2377440"/>
+            <a:off x="7909560" y="1325880"/>
+            <a:ext cx="3657600" cy="457200"/>
           </a:xfrm>
           <a:prstGeom prst="rect">
             <a:avLst/>
@@ -12692,6 +12405,84 @@
               <a:lnSpc>
                 <a:spcPct val="100000"/>
               </a:lnSpc>
+            </a:pPr>
+            <a:r>
+              <a:rPr sz="2200" b="1">
+                <a:solidFill>
+                  <a:srgbClr val="16241F"/>
+                </a:solidFill>
+                <a:latin typeface="Calibri"/>
+              </a:rPr>
+              <a:t>Kevin (concepts)</a:t>
+            </a:r>
+          </a:p>
+        </p:txBody>
+      </p:sp>
+      <p:sp>
+        <p:nvSpPr>
+          <p:cNvPr id="9" name="text"/>
+          <p:cNvSpPr txBox="1"/>
+          <p:nvPr/>
+        </p:nvSpPr>
+        <p:spPr>
+          <a:xfrm>
+            <a:off x="7909560" y="1874519"/>
+            <a:ext cx="3657600" cy="2194560"/>
+          </a:xfrm>
+          <a:prstGeom prst="rect">
+            <a:avLst/>
+          </a:prstGeom>
+          <a:noFill/>
+        </p:spPr>
+        <p:txBody>
+          <a:bodyPr wrap="square" lIns="0" rIns="0" tIns="0" bIns="0" anchor="t">
+            <a:spAutoFit/>
+          </a:bodyPr>
+          <a:lstStyle/>
+          <a:p>
+            <a:pPr algn="l">
+              <a:lnSpc>
+                <a:spcPct val="100000"/>
+              </a:lnSpc>
+            </a:pPr>
+            <a:r>
+              <a:rPr sz="1400" b="0">
+                <a:solidFill>
+                  <a:srgbClr val="16241F"/>
+                </a:solidFill>
+                <a:latin typeface="Calibri"/>
+              </a:rPr>
+              <a:t>Kevin Backhouse is a PhD researcher in Cognitive Neuroscience at Durham University. His research examines how reward and expectation shape awareness, attention and memory. He also collaborates on CPOMDP, developing and evaluating artificial agents within the active inference framework.</a:t>
+            </a:r>
+          </a:p>
+        </p:txBody>
+      </p:sp>
+      <p:sp>
+        <p:nvSpPr>
+          <p:cNvPr id="10" name="text"/>
+          <p:cNvSpPr txBox="1"/>
+          <p:nvPr/>
+        </p:nvSpPr>
+        <p:spPr>
+          <a:xfrm>
+            <a:off x="548640" y="4297680"/>
+            <a:ext cx="11094415" cy="2011680"/>
+          </a:xfrm>
+          <a:prstGeom prst="rect">
+            <a:avLst/>
+          </a:prstGeom>
+          <a:noFill/>
+        </p:spPr>
+        <p:txBody>
+          <a:bodyPr wrap="square" lIns="0" rIns="0" tIns="0" bIns="0" anchor="t">
+            <a:spAutoFit/>
+          </a:bodyPr>
+          <a:lstStyle/>
+          <a:p>
+            <a:pPr algn="l">
+              <a:lnSpc>
+                <a:spcPct val="100000"/>
+              </a:lnSpc>
               <a:spcAft>
                 <a:spcPts val="800"/>
               </a:spcAft>
@@ -12701,9 +12492,9 @@
                 <a:solidFill>
                   <a:srgbClr val="16241F"/>
                 </a:solidFill>
-                <a:latin typeface="Calibri"/>
-              </a:rPr>
-              <a:t>Inferogenesis</a:t>
+                <a:latin typeface="Courier New"/>
+              </a:rPr>
+              <a:t>cpomdp</a:t>
             </a:r>
           </a:p>
           <a:p>
@@ -12722,7 +12513,7 @@
                 </a:solidFill>
                 <a:latin typeface="Calibri"/>
               </a:rPr>
-              <a:t>We build open-source software for continuous active inference, and the research that tests it.</a:t>
+              <a:t>The open-source library we'll use today, for active inference with continuous states.</a:t>
             </a:r>
           </a:p>
           <a:p>
@@ -12739,36 +12530,9 @@
                 <a:solidFill>
                   <a:srgbClr val="16241F"/>
                 </a:solidFill>
-                <a:latin typeface="Courier New"/>
-              </a:rPr>
-              <a:t>cpomdp</a:t>
-            </a:r>
-            <a:r>
-              <a:rPr sz="2000" b="0">
-                <a:solidFill>
-                  <a:srgbClr val="16241F"/>
-                </a:solidFill>
-                <a:latin typeface="Calibri"/>
-              </a:rPr>
-              <a:t> is the library. </a:t>
-            </a:r>
-            <a:r>
-              <a:rPr sz="2000" b="0">
-                <a:solidFill>
-                  <a:srgbClr val="16241F"/>
-                </a:solidFill>
-                <a:latin typeface="Courier New"/>
-              </a:rPr>
-              <a:t>warrantlib</a:t>
-            </a:r>
-            <a:r>
-              <a:rPr sz="2000" b="0">
-                <a:solidFill>
-                  <a:srgbClr val="16241F"/>
-                </a:solidFill>
-                <a:latin typeface="Calibri"/>
-              </a:rPr>
-              <a:t> is the vocabulary its checks report in.</a:t>
+                <a:latin typeface="Calibri"/>
+              </a:rPr>
+              <a:t>It's written in Python on JAX, and it's the continuous-state sibling of pymdp.</a:t>
             </a:r>
           </a:p>
           <a:p>
@@ -12785,7 +12549,7 @@
                 <a:latin typeface="Courier New"/>
                 <a:hlinkClick r:id="rId2"/>
               </a:rPr>
-              <a:t>inferogenesis.com/</a:t>
+              <a:t>cpomdp.inferogenesis.com/</a:t>
             </a:r>
           </a:p>
         </p:txBody>
@@ -18715,7 +18479,7 @@
         <p:spPr>
           <a:xfrm>
             <a:off x="548640" y="1463040"/>
-            <a:ext cx="10515600" cy="1097280"/>
+            <a:ext cx="6888175" cy="1097280"/>
           </a:xfrm>
           <a:prstGeom prst="rect">
             <a:avLst/>
@@ -18754,7 +18518,7 @@
         <p:spPr>
           <a:xfrm>
             <a:off x="548640" y="2697480"/>
-            <a:ext cx="10515600" cy="1097280"/>
+            <a:ext cx="6888175" cy="1097280"/>
           </a:xfrm>
           <a:prstGeom prst="rect">
             <a:avLst/>
@@ -18812,7 +18576,7 @@
         <p:spPr>
           <a:xfrm>
             <a:off x="548640" y="4069080"/>
-            <a:ext cx="5364327" cy="731520"/>
+            <a:ext cx="3261207" cy="731520"/>
           </a:xfrm>
           <a:prstGeom prst="roundRect">
             <a:avLst>
@@ -18871,8 +18635,8 @@
         </p:nvSpPr>
         <p:spPr>
           <a:xfrm>
-            <a:off x="6278727" y="4069080"/>
-            <a:ext cx="5364327" cy="731520"/>
+            <a:off x="4175607" y="4069080"/>
+            <a:ext cx="3261207" cy="731520"/>
           </a:xfrm>
           <a:prstGeom prst="roundRect">
             <a:avLst>
@@ -18932,7 +18696,7 @@
         <p:spPr>
           <a:xfrm>
             <a:off x="548640" y="5394960"/>
-            <a:ext cx="10515600" cy="548640"/>
+            <a:ext cx="6888175" cy="548640"/>
           </a:xfrm>
           <a:prstGeom prst="rect">
             <a:avLst/>
@@ -18958,6 +18722,5219 @@
                 <a:latin typeface="Calibri"/>
               </a:rPr>
               <a:t>Everything shown runs on cpomdp 0.5.1 from PyPI.</a:t>
+            </a:r>
+          </a:p>
+        </p:txBody>
+      </p:sp>
+      <p:sp>
+        <p:nvSpPr>
+          <p:cNvPr id="11" name="qr https://www.linkedin.com/in/kevin-backhouse-112554253"/>
+          <p:cNvSpPr/>
+          <p:nvPr/>
+        </p:nvSpPr>
+        <p:spPr>
+          <a:xfrm>
+            <a:off x="7802575" y="1600200"/>
+            <a:ext cx="1737360" cy="1737360"/>
+          </a:xfrm>
+          <a:custGeom>
+            <a:avLst/>
+            <a:gdLst/>
+            <a:ahLst/>
+            <a:cxnLst/>
+            <a:rect l="l" t="t" r="r" b="b"/>
+            <a:pathLst>
+              <a:path w="29" h="29">
+                <a:moveTo>
+                  <a:pt x="0" y="0"/>
+                </a:moveTo>
+                <a:lnTo>
+                  <a:pt x="7" y="0"/>
+                </a:lnTo>
+                <a:lnTo>
+                  <a:pt x="7" y="1"/>
+                </a:lnTo>
+                <a:lnTo>
+                  <a:pt x="0" y="1"/>
+                </a:lnTo>
+                <a:close/>
+                <a:moveTo>
+                  <a:pt x="8" y="0"/>
+                </a:moveTo>
+                <a:lnTo>
+                  <a:pt x="10" y="0"/>
+                </a:lnTo>
+                <a:lnTo>
+                  <a:pt x="10" y="1"/>
+                </a:lnTo>
+                <a:lnTo>
+                  <a:pt x="8" y="1"/>
+                </a:lnTo>
+                <a:close/>
+                <a:moveTo>
+                  <a:pt x="12" y="0"/>
+                </a:moveTo>
+                <a:lnTo>
+                  <a:pt x="15" y="0"/>
+                </a:lnTo>
+                <a:lnTo>
+                  <a:pt x="15" y="1"/>
+                </a:lnTo>
+                <a:lnTo>
+                  <a:pt x="12" y="1"/>
+                </a:lnTo>
+                <a:close/>
+                <a:moveTo>
+                  <a:pt x="18" y="0"/>
+                </a:moveTo>
+                <a:lnTo>
+                  <a:pt x="19" y="0"/>
+                </a:lnTo>
+                <a:lnTo>
+                  <a:pt x="19" y="1"/>
+                </a:lnTo>
+                <a:lnTo>
+                  <a:pt x="18" y="1"/>
+                </a:lnTo>
+                <a:close/>
+                <a:moveTo>
+                  <a:pt x="22" y="0"/>
+                </a:moveTo>
+                <a:lnTo>
+                  <a:pt x="29" y="0"/>
+                </a:lnTo>
+                <a:lnTo>
+                  <a:pt x="29" y="1"/>
+                </a:lnTo>
+                <a:lnTo>
+                  <a:pt x="22" y="1"/>
+                </a:lnTo>
+                <a:close/>
+                <a:moveTo>
+                  <a:pt x="0" y="1"/>
+                </a:moveTo>
+                <a:lnTo>
+                  <a:pt x="1" y="1"/>
+                </a:lnTo>
+                <a:lnTo>
+                  <a:pt x="1" y="2"/>
+                </a:lnTo>
+                <a:lnTo>
+                  <a:pt x="0" y="2"/>
+                </a:lnTo>
+                <a:close/>
+                <a:moveTo>
+                  <a:pt x="6" y="1"/>
+                </a:moveTo>
+                <a:lnTo>
+                  <a:pt x="7" y="1"/>
+                </a:lnTo>
+                <a:lnTo>
+                  <a:pt x="7" y="2"/>
+                </a:lnTo>
+                <a:lnTo>
+                  <a:pt x="6" y="2"/>
+                </a:lnTo>
+                <a:close/>
+                <a:moveTo>
+                  <a:pt x="9" y="1"/>
+                </a:moveTo>
+                <a:lnTo>
+                  <a:pt x="10" y="1"/>
+                </a:lnTo>
+                <a:lnTo>
+                  <a:pt x="10" y="2"/>
+                </a:lnTo>
+                <a:lnTo>
+                  <a:pt x="9" y="2"/>
+                </a:lnTo>
+                <a:close/>
+                <a:moveTo>
+                  <a:pt x="12" y="1"/>
+                </a:moveTo>
+                <a:lnTo>
+                  <a:pt x="13" y="1"/>
+                </a:lnTo>
+                <a:lnTo>
+                  <a:pt x="13" y="2"/>
+                </a:lnTo>
+                <a:lnTo>
+                  <a:pt x="12" y="2"/>
+                </a:lnTo>
+                <a:close/>
+                <a:moveTo>
+                  <a:pt x="14" y="1"/>
+                </a:moveTo>
+                <a:lnTo>
+                  <a:pt x="15" y="1"/>
+                </a:lnTo>
+                <a:lnTo>
+                  <a:pt x="15" y="2"/>
+                </a:lnTo>
+                <a:lnTo>
+                  <a:pt x="14" y="2"/>
+                </a:lnTo>
+                <a:close/>
+                <a:moveTo>
+                  <a:pt x="16" y="1"/>
+                </a:moveTo>
+                <a:lnTo>
+                  <a:pt x="18" y="1"/>
+                </a:lnTo>
+                <a:lnTo>
+                  <a:pt x="18" y="2"/>
+                </a:lnTo>
+                <a:lnTo>
+                  <a:pt x="16" y="2"/>
+                </a:lnTo>
+                <a:close/>
+                <a:moveTo>
+                  <a:pt x="19" y="1"/>
+                </a:moveTo>
+                <a:lnTo>
+                  <a:pt x="20" y="1"/>
+                </a:lnTo>
+                <a:lnTo>
+                  <a:pt x="20" y="2"/>
+                </a:lnTo>
+                <a:lnTo>
+                  <a:pt x="19" y="2"/>
+                </a:lnTo>
+                <a:close/>
+                <a:moveTo>
+                  <a:pt x="22" y="1"/>
+                </a:moveTo>
+                <a:lnTo>
+                  <a:pt x="23" y="1"/>
+                </a:lnTo>
+                <a:lnTo>
+                  <a:pt x="23" y="2"/>
+                </a:lnTo>
+                <a:lnTo>
+                  <a:pt x="22" y="2"/>
+                </a:lnTo>
+                <a:close/>
+                <a:moveTo>
+                  <a:pt x="28" y="1"/>
+                </a:moveTo>
+                <a:lnTo>
+                  <a:pt x="29" y="1"/>
+                </a:lnTo>
+                <a:lnTo>
+                  <a:pt x="29" y="2"/>
+                </a:lnTo>
+                <a:lnTo>
+                  <a:pt x="28" y="2"/>
+                </a:lnTo>
+                <a:close/>
+                <a:moveTo>
+                  <a:pt x="0" y="2"/>
+                </a:moveTo>
+                <a:lnTo>
+                  <a:pt x="1" y="2"/>
+                </a:lnTo>
+                <a:lnTo>
+                  <a:pt x="1" y="3"/>
+                </a:lnTo>
+                <a:lnTo>
+                  <a:pt x="0" y="3"/>
+                </a:lnTo>
+                <a:close/>
+                <a:moveTo>
+                  <a:pt x="2" y="2"/>
+                </a:moveTo>
+                <a:lnTo>
+                  <a:pt x="5" y="2"/>
+                </a:lnTo>
+                <a:lnTo>
+                  <a:pt x="5" y="3"/>
+                </a:lnTo>
+                <a:lnTo>
+                  <a:pt x="2" y="3"/>
+                </a:lnTo>
+                <a:close/>
+                <a:moveTo>
+                  <a:pt x="6" y="2"/>
+                </a:moveTo>
+                <a:lnTo>
+                  <a:pt x="7" y="2"/>
+                </a:lnTo>
+                <a:lnTo>
+                  <a:pt x="7" y="3"/>
+                </a:lnTo>
+                <a:lnTo>
+                  <a:pt x="6" y="3"/>
+                </a:lnTo>
+                <a:close/>
+                <a:moveTo>
+                  <a:pt x="9" y="2"/>
+                </a:moveTo>
+                <a:lnTo>
+                  <a:pt x="11" y="2"/>
+                </a:lnTo>
+                <a:lnTo>
+                  <a:pt x="11" y="3"/>
+                </a:lnTo>
+                <a:lnTo>
+                  <a:pt x="9" y="3"/>
+                </a:lnTo>
+                <a:close/>
+                <a:moveTo>
+                  <a:pt x="13" y="2"/>
+                </a:moveTo>
+                <a:lnTo>
+                  <a:pt x="17" y="2"/>
+                </a:lnTo>
+                <a:lnTo>
+                  <a:pt x="17" y="3"/>
+                </a:lnTo>
+                <a:lnTo>
+                  <a:pt x="13" y="3"/>
+                </a:lnTo>
+                <a:close/>
+                <a:moveTo>
+                  <a:pt x="22" y="2"/>
+                </a:moveTo>
+                <a:lnTo>
+                  <a:pt x="23" y="2"/>
+                </a:lnTo>
+                <a:lnTo>
+                  <a:pt x="23" y="3"/>
+                </a:lnTo>
+                <a:lnTo>
+                  <a:pt x="22" y="3"/>
+                </a:lnTo>
+                <a:close/>
+                <a:moveTo>
+                  <a:pt x="24" y="2"/>
+                </a:moveTo>
+                <a:lnTo>
+                  <a:pt x="27" y="2"/>
+                </a:lnTo>
+                <a:lnTo>
+                  <a:pt x="27" y="3"/>
+                </a:lnTo>
+                <a:lnTo>
+                  <a:pt x="24" y="3"/>
+                </a:lnTo>
+                <a:close/>
+                <a:moveTo>
+                  <a:pt x="28" y="2"/>
+                </a:moveTo>
+                <a:lnTo>
+                  <a:pt x="29" y="2"/>
+                </a:lnTo>
+                <a:lnTo>
+                  <a:pt x="29" y="3"/>
+                </a:lnTo>
+                <a:lnTo>
+                  <a:pt x="28" y="3"/>
+                </a:lnTo>
+                <a:close/>
+                <a:moveTo>
+                  <a:pt x="0" y="3"/>
+                </a:moveTo>
+                <a:lnTo>
+                  <a:pt x="1" y="3"/>
+                </a:lnTo>
+                <a:lnTo>
+                  <a:pt x="1" y="4"/>
+                </a:lnTo>
+                <a:lnTo>
+                  <a:pt x="0" y="4"/>
+                </a:lnTo>
+                <a:close/>
+                <a:moveTo>
+                  <a:pt x="2" y="3"/>
+                </a:moveTo>
+                <a:lnTo>
+                  <a:pt x="5" y="3"/>
+                </a:lnTo>
+                <a:lnTo>
+                  <a:pt x="5" y="4"/>
+                </a:lnTo>
+                <a:lnTo>
+                  <a:pt x="2" y="4"/>
+                </a:lnTo>
+                <a:close/>
+                <a:moveTo>
+                  <a:pt x="6" y="3"/>
+                </a:moveTo>
+                <a:lnTo>
+                  <a:pt x="7" y="3"/>
+                </a:lnTo>
+                <a:lnTo>
+                  <a:pt x="7" y="4"/>
+                </a:lnTo>
+                <a:lnTo>
+                  <a:pt x="6" y="4"/>
+                </a:lnTo>
+                <a:close/>
+                <a:moveTo>
+                  <a:pt x="9" y="3"/>
+                </a:moveTo>
+                <a:lnTo>
+                  <a:pt x="11" y="3"/>
+                </a:lnTo>
+                <a:lnTo>
+                  <a:pt x="11" y="4"/>
+                </a:lnTo>
+                <a:lnTo>
+                  <a:pt x="9" y="4"/>
+                </a:lnTo>
+                <a:close/>
+                <a:moveTo>
+                  <a:pt x="13" y="3"/>
+                </a:moveTo>
+                <a:lnTo>
+                  <a:pt x="14" y="3"/>
+                </a:lnTo>
+                <a:lnTo>
+                  <a:pt x="14" y="4"/>
+                </a:lnTo>
+                <a:lnTo>
+                  <a:pt x="13" y="4"/>
+                </a:lnTo>
+                <a:close/>
+                <a:moveTo>
+                  <a:pt x="16" y="3"/>
+                </a:moveTo>
+                <a:lnTo>
+                  <a:pt x="18" y="3"/>
+                </a:lnTo>
+                <a:lnTo>
+                  <a:pt x="18" y="4"/>
+                </a:lnTo>
+                <a:lnTo>
+                  <a:pt x="16" y="4"/>
+                </a:lnTo>
+                <a:close/>
+                <a:moveTo>
+                  <a:pt x="20" y="3"/>
+                </a:moveTo>
+                <a:lnTo>
+                  <a:pt x="21" y="3"/>
+                </a:lnTo>
+                <a:lnTo>
+                  <a:pt x="21" y="4"/>
+                </a:lnTo>
+                <a:lnTo>
+                  <a:pt x="20" y="4"/>
+                </a:lnTo>
+                <a:close/>
+                <a:moveTo>
+                  <a:pt x="22" y="3"/>
+                </a:moveTo>
+                <a:lnTo>
+                  <a:pt x="23" y="3"/>
+                </a:lnTo>
+                <a:lnTo>
+                  <a:pt x="23" y="4"/>
+                </a:lnTo>
+                <a:lnTo>
+                  <a:pt x="22" y="4"/>
+                </a:lnTo>
+                <a:close/>
+                <a:moveTo>
+                  <a:pt x="24" y="3"/>
+                </a:moveTo>
+                <a:lnTo>
+                  <a:pt x="27" y="3"/>
+                </a:lnTo>
+                <a:lnTo>
+                  <a:pt x="27" y="4"/>
+                </a:lnTo>
+                <a:lnTo>
+                  <a:pt x="24" y="4"/>
+                </a:lnTo>
+                <a:close/>
+                <a:moveTo>
+                  <a:pt x="28" y="3"/>
+                </a:moveTo>
+                <a:lnTo>
+                  <a:pt x="29" y="3"/>
+                </a:lnTo>
+                <a:lnTo>
+                  <a:pt x="29" y="4"/>
+                </a:lnTo>
+                <a:lnTo>
+                  <a:pt x="28" y="4"/>
+                </a:lnTo>
+                <a:close/>
+                <a:moveTo>
+                  <a:pt x="0" y="4"/>
+                </a:moveTo>
+                <a:lnTo>
+                  <a:pt x="1" y="4"/>
+                </a:lnTo>
+                <a:lnTo>
+                  <a:pt x="1" y="5"/>
+                </a:lnTo>
+                <a:lnTo>
+                  <a:pt x="0" y="5"/>
+                </a:lnTo>
+                <a:close/>
+                <a:moveTo>
+                  <a:pt x="2" y="4"/>
+                </a:moveTo>
+                <a:lnTo>
+                  <a:pt x="5" y="4"/>
+                </a:lnTo>
+                <a:lnTo>
+                  <a:pt x="5" y="5"/>
+                </a:lnTo>
+                <a:lnTo>
+                  <a:pt x="2" y="5"/>
+                </a:lnTo>
+                <a:close/>
+                <a:moveTo>
+                  <a:pt x="6" y="4"/>
+                </a:moveTo>
+                <a:lnTo>
+                  <a:pt x="7" y="4"/>
+                </a:lnTo>
+                <a:lnTo>
+                  <a:pt x="7" y="5"/>
+                </a:lnTo>
+                <a:lnTo>
+                  <a:pt x="6" y="5"/>
+                </a:lnTo>
+                <a:close/>
+                <a:moveTo>
+                  <a:pt x="9" y="4"/>
+                </a:moveTo>
+                <a:lnTo>
+                  <a:pt x="11" y="4"/>
+                </a:lnTo>
+                <a:lnTo>
+                  <a:pt x="11" y="5"/>
+                </a:lnTo>
+                <a:lnTo>
+                  <a:pt x="9" y="5"/>
+                </a:lnTo>
+                <a:close/>
+                <a:moveTo>
+                  <a:pt x="12" y="4"/>
+                </a:moveTo>
+                <a:lnTo>
+                  <a:pt x="15" y="4"/>
+                </a:lnTo>
+                <a:lnTo>
+                  <a:pt x="15" y="5"/>
+                </a:lnTo>
+                <a:lnTo>
+                  <a:pt x="12" y="5"/>
+                </a:lnTo>
+                <a:close/>
+                <a:moveTo>
+                  <a:pt x="16" y="4"/>
+                </a:moveTo>
+                <a:lnTo>
+                  <a:pt x="17" y="4"/>
+                </a:lnTo>
+                <a:lnTo>
+                  <a:pt x="17" y="5"/>
+                </a:lnTo>
+                <a:lnTo>
+                  <a:pt x="16" y="5"/>
+                </a:lnTo>
+                <a:close/>
+                <a:moveTo>
+                  <a:pt x="18" y="4"/>
+                </a:moveTo>
+                <a:lnTo>
+                  <a:pt x="20" y="4"/>
+                </a:lnTo>
+                <a:lnTo>
+                  <a:pt x="20" y="5"/>
+                </a:lnTo>
+                <a:lnTo>
+                  <a:pt x="18" y="5"/>
+                </a:lnTo>
+                <a:close/>
+                <a:moveTo>
+                  <a:pt x="22" y="4"/>
+                </a:moveTo>
+                <a:lnTo>
+                  <a:pt x="23" y="4"/>
+                </a:lnTo>
+                <a:lnTo>
+                  <a:pt x="23" y="5"/>
+                </a:lnTo>
+                <a:lnTo>
+                  <a:pt x="22" y="5"/>
+                </a:lnTo>
+                <a:close/>
+                <a:moveTo>
+                  <a:pt x="24" y="4"/>
+                </a:moveTo>
+                <a:lnTo>
+                  <a:pt x="27" y="4"/>
+                </a:lnTo>
+                <a:lnTo>
+                  <a:pt x="27" y="5"/>
+                </a:lnTo>
+                <a:lnTo>
+                  <a:pt x="24" y="5"/>
+                </a:lnTo>
+                <a:close/>
+                <a:moveTo>
+                  <a:pt x="28" y="4"/>
+                </a:moveTo>
+                <a:lnTo>
+                  <a:pt x="29" y="4"/>
+                </a:lnTo>
+                <a:lnTo>
+                  <a:pt x="29" y="5"/>
+                </a:lnTo>
+                <a:lnTo>
+                  <a:pt x="28" y="5"/>
+                </a:lnTo>
+                <a:close/>
+                <a:moveTo>
+                  <a:pt x="0" y="5"/>
+                </a:moveTo>
+                <a:lnTo>
+                  <a:pt x="1" y="5"/>
+                </a:lnTo>
+                <a:lnTo>
+                  <a:pt x="1" y="6"/>
+                </a:lnTo>
+                <a:lnTo>
+                  <a:pt x="0" y="6"/>
+                </a:lnTo>
+                <a:close/>
+                <a:moveTo>
+                  <a:pt x="6" y="5"/>
+                </a:moveTo>
+                <a:lnTo>
+                  <a:pt x="7" y="5"/>
+                </a:lnTo>
+                <a:lnTo>
+                  <a:pt x="7" y="6"/>
+                </a:lnTo>
+                <a:lnTo>
+                  <a:pt x="6" y="6"/>
+                </a:lnTo>
+                <a:close/>
+                <a:moveTo>
+                  <a:pt x="11" y="5"/>
+                </a:moveTo>
+                <a:lnTo>
+                  <a:pt x="12" y="5"/>
+                </a:lnTo>
+                <a:lnTo>
+                  <a:pt x="12" y="6"/>
+                </a:lnTo>
+                <a:lnTo>
+                  <a:pt x="11" y="6"/>
+                </a:lnTo>
+                <a:close/>
+                <a:moveTo>
+                  <a:pt x="13" y="5"/>
+                </a:moveTo>
+                <a:lnTo>
+                  <a:pt x="14" y="5"/>
+                </a:lnTo>
+                <a:lnTo>
+                  <a:pt x="14" y="6"/>
+                </a:lnTo>
+                <a:lnTo>
+                  <a:pt x="13" y="6"/>
+                </a:lnTo>
+                <a:close/>
+                <a:moveTo>
+                  <a:pt x="16" y="5"/>
+                </a:moveTo>
+                <a:lnTo>
+                  <a:pt x="18" y="5"/>
+                </a:lnTo>
+                <a:lnTo>
+                  <a:pt x="18" y="6"/>
+                </a:lnTo>
+                <a:lnTo>
+                  <a:pt x="16" y="6"/>
+                </a:lnTo>
+                <a:close/>
+                <a:moveTo>
+                  <a:pt x="22" y="5"/>
+                </a:moveTo>
+                <a:lnTo>
+                  <a:pt x="23" y="5"/>
+                </a:lnTo>
+                <a:lnTo>
+                  <a:pt x="23" y="6"/>
+                </a:lnTo>
+                <a:lnTo>
+                  <a:pt x="22" y="6"/>
+                </a:lnTo>
+                <a:close/>
+                <a:moveTo>
+                  <a:pt x="28" y="5"/>
+                </a:moveTo>
+                <a:lnTo>
+                  <a:pt x="29" y="5"/>
+                </a:lnTo>
+                <a:lnTo>
+                  <a:pt x="29" y="6"/>
+                </a:lnTo>
+                <a:lnTo>
+                  <a:pt x="28" y="6"/>
+                </a:lnTo>
+                <a:close/>
+                <a:moveTo>
+                  <a:pt x="0" y="6"/>
+                </a:moveTo>
+                <a:lnTo>
+                  <a:pt x="7" y="6"/>
+                </a:lnTo>
+                <a:lnTo>
+                  <a:pt x="7" y="7"/>
+                </a:lnTo>
+                <a:lnTo>
+                  <a:pt x="0" y="7"/>
+                </a:lnTo>
+                <a:close/>
+                <a:moveTo>
+                  <a:pt x="8" y="6"/>
+                </a:moveTo>
+                <a:lnTo>
+                  <a:pt x="9" y="6"/>
+                </a:lnTo>
+                <a:lnTo>
+                  <a:pt x="9" y="7"/>
+                </a:lnTo>
+                <a:lnTo>
+                  <a:pt x="8" y="7"/>
+                </a:lnTo>
+                <a:close/>
+                <a:moveTo>
+                  <a:pt x="10" y="6"/>
+                </a:moveTo>
+                <a:lnTo>
+                  <a:pt x="11" y="6"/>
+                </a:lnTo>
+                <a:lnTo>
+                  <a:pt x="11" y="7"/>
+                </a:lnTo>
+                <a:lnTo>
+                  <a:pt x="10" y="7"/>
+                </a:lnTo>
+                <a:close/>
+                <a:moveTo>
+                  <a:pt x="12" y="6"/>
+                </a:moveTo>
+                <a:lnTo>
+                  <a:pt x="13" y="6"/>
+                </a:lnTo>
+                <a:lnTo>
+                  <a:pt x="13" y="7"/>
+                </a:lnTo>
+                <a:lnTo>
+                  <a:pt x="12" y="7"/>
+                </a:lnTo>
+                <a:close/>
+                <a:moveTo>
+                  <a:pt x="14" y="6"/>
+                </a:moveTo>
+                <a:lnTo>
+                  <a:pt x="15" y="6"/>
+                </a:lnTo>
+                <a:lnTo>
+                  <a:pt x="15" y="7"/>
+                </a:lnTo>
+                <a:lnTo>
+                  <a:pt x="14" y="7"/>
+                </a:lnTo>
+                <a:close/>
+                <a:moveTo>
+                  <a:pt x="16" y="6"/>
+                </a:moveTo>
+                <a:lnTo>
+                  <a:pt x="17" y="6"/>
+                </a:lnTo>
+                <a:lnTo>
+                  <a:pt x="17" y="7"/>
+                </a:lnTo>
+                <a:lnTo>
+                  <a:pt x="16" y="7"/>
+                </a:lnTo>
+                <a:close/>
+                <a:moveTo>
+                  <a:pt x="18" y="6"/>
+                </a:moveTo>
+                <a:lnTo>
+                  <a:pt x="19" y="6"/>
+                </a:lnTo>
+                <a:lnTo>
+                  <a:pt x="19" y="7"/>
+                </a:lnTo>
+                <a:lnTo>
+                  <a:pt x="18" y="7"/>
+                </a:lnTo>
+                <a:close/>
+                <a:moveTo>
+                  <a:pt x="20" y="6"/>
+                </a:moveTo>
+                <a:lnTo>
+                  <a:pt x="21" y="6"/>
+                </a:lnTo>
+                <a:lnTo>
+                  <a:pt x="21" y="7"/>
+                </a:lnTo>
+                <a:lnTo>
+                  <a:pt x="20" y="7"/>
+                </a:lnTo>
+                <a:close/>
+                <a:moveTo>
+                  <a:pt x="22" y="6"/>
+                </a:moveTo>
+                <a:lnTo>
+                  <a:pt x="29" y="6"/>
+                </a:lnTo>
+                <a:lnTo>
+                  <a:pt x="29" y="7"/>
+                </a:lnTo>
+                <a:lnTo>
+                  <a:pt x="22" y="7"/>
+                </a:lnTo>
+                <a:close/>
+                <a:moveTo>
+                  <a:pt x="8" y="7"/>
+                </a:moveTo>
+                <a:lnTo>
+                  <a:pt x="9" y="7"/>
+                </a:lnTo>
+                <a:lnTo>
+                  <a:pt x="9" y="8"/>
+                </a:lnTo>
+                <a:lnTo>
+                  <a:pt x="8" y="8"/>
+                </a:lnTo>
+                <a:close/>
+                <a:moveTo>
+                  <a:pt x="10" y="7"/>
+                </a:moveTo>
+                <a:lnTo>
+                  <a:pt x="11" y="7"/>
+                </a:lnTo>
+                <a:lnTo>
+                  <a:pt x="11" y="8"/>
+                </a:lnTo>
+                <a:lnTo>
+                  <a:pt x="10" y="8"/>
+                </a:lnTo>
+                <a:close/>
+                <a:moveTo>
+                  <a:pt x="13" y="7"/>
+                </a:moveTo>
+                <a:lnTo>
+                  <a:pt x="14" y="7"/>
+                </a:lnTo>
+                <a:lnTo>
+                  <a:pt x="14" y="8"/>
+                </a:lnTo>
+                <a:lnTo>
+                  <a:pt x="13" y="8"/>
+                </a:lnTo>
+                <a:close/>
+                <a:moveTo>
+                  <a:pt x="15" y="7"/>
+                </a:moveTo>
+                <a:lnTo>
+                  <a:pt x="16" y="7"/>
+                </a:lnTo>
+                <a:lnTo>
+                  <a:pt x="16" y="8"/>
+                </a:lnTo>
+                <a:lnTo>
+                  <a:pt x="15" y="8"/>
+                </a:lnTo>
+                <a:close/>
+                <a:moveTo>
+                  <a:pt x="0" y="8"/>
+                </a:moveTo>
+                <a:lnTo>
+                  <a:pt x="2" y="8"/>
+                </a:lnTo>
+                <a:lnTo>
+                  <a:pt x="2" y="9"/>
+                </a:lnTo>
+                <a:lnTo>
+                  <a:pt x="0" y="9"/>
+                </a:lnTo>
+                <a:close/>
+                <a:moveTo>
+                  <a:pt x="3" y="8"/>
+                </a:moveTo>
+                <a:lnTo>
+                  <a:pt x="5" y="8"/>
+                </a:lnTo>
+                <a:lnTo>
+                  <a:pt x="5" y="9"/>
+                </a:lnTo>
+                <a:lnTo>
+                  <a:pt x="3" y="9"/>
+                </a:lnTo>
+                <a:close/>
+                <a:moveTo>
+                  <a:pt x="6" y="8"/>
+                </a:moveTo>
+                <a:lnTo>
+                  <a:pt x="7" y="8"/>
+                </a:lnTo>
+                <a:lnTo>
+                  <a:pt x="7" y="9"/>
+                </a:lnTo>
+                <a:lnTo>
+                  <a:pt x="6" y="9"/>
+                </a:lnTo>
+                <a:close/>
+                <a:moveTo>
+                  <a:pt x="10" y="8"/>
+                </a:moveTo>
+                <a:lnTo>
+                  <a:pt x="11" y="8"/>
+                </a:lnTo>
+                <a:lnTo>
+                  <a:pt x="11" y="9"/>
+                </a:lnTo>
+                <a:lnTo>
+                  <a:pt x="10" y="9"/>
+                </a:lnTo>
+                <a:close/>
+                <a:moveTo>
+                  <a:pt x="14" y="8"/>
+                </a:moveTo>
+                <a:lnTo>
+                  <a:pt x="19" y="8"/>
+                </a:lnTo>
+                <a:lnTo>
+                  <a:pt x="19" y="9"/>
+                </a:lnTo>
+                <a:lnTo>
+                  <a:pt x="14" y="9"/>
+                </a:lnTo>
+                <a:close/>
+                <a:moveTo>
+                  <a:pt x="22" y="8"/>
+                </a:moveTo>
+                <a:lnTo>
+                  <a:pt x="23" y="8"/>
+                </a:lnTo>
+                <a:lnTo>
+                  <a:pt x="23" y="9"/>
+                </a:lnTo>
+                <a:lnTo>
+                  <a:pt x="22" y="9"/>
+                </a:lnTo>
+                <a:close/>
+                <a:moveTo>
+                  <a:pt x="28" y="8"/>
+                </a:moveTo>
+                <a:lnTo>
+                  <a:pt x="29" y="8"/>
+                </a:lnTo>
+                <a:lnTo>
+                  <a:pt x="29" y="9"/>
+                </a:lnTo>
+                <a:lnTo>
+                  <a:pt x="28" y="9"/>
+                </a:lnTo>
+                <a:close/>
+                <a:moveTo>
+                  <a:pt x="0" y="9"/>
+                </a:moveTo>
+                <a:lnTo>
+                  <a:pt x="1" y="9"/>
+                </a:lnTo>
+                <a:lnTo>
+                  <a:pt x="1" y="10"/>
+                </a:lnTo>
+                <a:lnTo>
+                  <a:pt x="0" y="10"/>
+                </a:lnTo>
+                <a:close/>
+                <a:moveTo>
+                  <a:pt x="2" y="9"/>
+                </a:moveTo>
+                <a:lnTo>
+                  <a:pt x="4" y="9"/>
+                </a:lnTo>
+                <a:lnTo>
+                  <a:pt x="4" y="10"/>
+                </a:lnTo>
+                <a:lnTo>
+                  <a:pt x="2" y="10"/>
+                </a:lnTo>
+                <a:close/>
+                <a:moveTo>
+                  <a:pt x="5" y="9"/>
+                </a:moveTo>
+                <a:lnTo>
+                  <a:pt x="6" y="9"/>
+                </a:lnTo>
+                <a:lnTo>
+                  <a:pt x="6" y="10"/>
+                </a:lnTo>
+                <a:lnTo>
+                  <a:pt x="5" y="10"/>
+                </a:lnTo>
+                <a:close/>
+                <a:moveTo>
+                  <a:pt x="8" y="9"/>
+                </a:moveTo>
+                <a:lnTo>
+                  <a:pt x="9" y="9"/>
+                </a:lnTo>
+                <a:lnTo>
+                  <a:pt x="9" y="10"/>
+                </a:lnTo>
+                <a:lnTo>
+                  <a:pt x="8" y="10"/>
+                </a:lnTo>
+                <a:close/>
+                <a:moveTo>
+                  <a:pt x="11" y="9"/>
+                </a:moveTo>
+                <a:lnTo>
+                  <a:pt x="16" y="9"/>
+                </a:lnTo>
+                <a:lnTo>
+                  <a:pt x="16" y="10"/>
+                </a:lnTo>
+                <a:lnTo>
+                  <a:pt x="11" y="10"/>
+                </a:lnTo>
+                <a:close/>
+                <a:moveTo>
+                  <a:pt x="17" y="9"/>
+                </a:moveTo>
+                <a:lnTo>
+                  <a:pt x="21" y="9"/>
+                </a:lnTo>
+                <a:lnTo>
+                  <a:pt x="21" y="10"/>
+                </a:lnTo>
+                <a:lnTo>
+                  <a:pt x="17" y="10"/>
+                </a:lnTo>
+                <a:close/>
+                <a:moveTo>
+                  <a:pt x="23" y="9"/>
+                </a:moveTo>
+                <a:lnTo>
+                  <a:pt x="25" y="9"/>
+                </a:lnTo>
+                <a:lnTo>
+                  <a:pt x="25" y="10"/>
+                </a:lnTo>
+                <a:lnTo>
+                  <a:pt x="23" y="10"/>
+                </a:lnTo>
+                <a:close/>
+                <a:moveTo>
+                  <a:pt x="26" y="9"/>
+                </a:moveTo>
+                <a:lnTo>
+                  <a:pt x="28" y="9"/>
+                </a:lnTo>
+                <a:lnTo>
+                  <a:pt x="28" y="10"/>
+                </a:lnTo>
+                <a:lnTo>
+                  <a:pt x="26" y="10"/>
+                </a:lnTo>
+                <a:close/>
+                <a:moveTo>
+                  <a:pt x="0" y="10"/>
+                </a:moveTo>
+                <a:lnTo>
+                  <a:pt x="2" y="10"/>
+                </a:lnTo>
+                <a:lnTo>
+                  <a:pt x="2" y="11"/>
+                </a:lnTo>
+                <a:lnTo>
+                  <a:pt x="0" y="11"/>
+                </a:lnTo>
+                <a:close/>
+                <a:moveTo>
+                  <a:pt x="6" y="10"/>
+                </a:moveTo>
+                <a:lnTo>
+                  <a:pt x="7" y="10"/>
+                </a:lnTo>
+                <a:lnTo>
+                  <a:pt x="7" y="11"/>
+                </a:lnTo>
+                <a:lnTo>
+                  <a:pt x="6" y="11"/>
+                </a:lnTo>
+                <a:close/>
+                <a:moveTo>
+                  <a:pt x="8" y="10"/>
+                </a:moveTo>
+                <a:lnTo>
+                  <a:pt x="9" y="10"/>
+                </a:lnTo>
+                <a:lnTo>
+                  <a:pt x="9" y="11"/>
+                </a:lnTo>
+                <a:lnTo>
+                  <a:pt x="8" y="11"/>
+                </a:lnTo>
+                <a:close/>
+                <a:moveTo>
+                  <a:pt x="11" y="10"/>
+                </a:moveTo>
+                <a:lnTo>
+                  <a:pt x="12" y="10"/>
+                </a:lnTo>
+                <a:lnTo>
+                  <a:pt x="12" y="11"/>
+                </a:lnTo>
+                <a:lnTo>
+                  <a:pt x="11" y="11"/>
+                </a:lnTo>
+                <a:close/>
+                <a:moveTo>
+                  <a:pt x="14" y="10"/>
+                </a:moveTo>
+                <a:lnTo>
+                  <a:pt x="17" y="10"/>
+                </a:lnTo>
+                <a:lnTo>
+                  <a:pt x="17" y="11"/>
+                </a:lnTo>
+                <a:lnTo>
+                  <a:pt x="14" y="11"/>
+                </a:lnTo>
+                <a:close/>
+                <a:moveTo>
+                  <a:pt x="20" y="10"/>
+                </a:moveTo>
+                <a:lnTo>
+                  <a:pt x="21" y="10"/>
+                </a:lnTo>
+                <a:lnTo>
+                  <a:pt x="21" y="11"/>
+                </a:lnTo>
+                <a:lnTo>
+                  <a:pt x="20" y="11"/>
+                </a:lnTo>
+                <a:close/>
+                <a:moveTo>
+                  <a:pt x="22" y="10"/>
+                </a:moveTo>
+                <a:lnTo>
+                  <a:pt x="24" y="10"/>
+                </a:lnTo>
+                <a:lnTo>
+                  <a:pt x="24" y="11"/>
+                </a:lnTo>
+                <a:lnTo>
+                  <a:pt x="22" y="11"/>
+                </a:lnTo>
+                <a:close/>
+                <a:moveTo>
+                  <a:pt x="26" y="10"/>
+                </a:moveTo>
+                <a:lnTo>
+                  <a:pt x="27" y="10"/>
+                </a:lnTo>
+                <a:lnTo>
+                  <a:pt x="27" y="11"/>
+                </a:lnTo>
+                <a:lnTo>
+                  <a:pt x="26" y="11"/>
+                </a:lnTo>
+                <a:close/>
+                <a:moveTo>
+                  <a:pt x="2" y="11"/>
+                </a:moveTo>
+                <a:lnTo>
+                  <a:pt x="6" y="11"/>
+                </a:lnTo>
+                <a:lnTo>
+                  <a:pt x="6" y="12"/>
+                </a:lnTo>
+                <a:lnTo>
+                  <a:pt x="2" y="12"/>
+                </a:lnTo>
+                <a:close/>
+                <a:moveTo>
+                  <a:pt x="8" y="11"/>
+                </a:moveTo>
+                <a:lnTo>
+                  <a:pt x="9" y="11"/>
+                </a:lnTo>
+                <a:lnTo>
+                  <a:pt x="9" y="12"/>
+                </a:lnTo>
+                <a:lnTo>
+                  <a:pt x="8" y="12"/>
+                </a:lnTo>
+                <a:close/>
+                <a:moveTo>
+                  <a:pt x="11" y="11"/>
+                </a:moveTo>
+                <a:lnTo>
+                  <a:pt x="12" y="11"/>
+                </a:lnTo>
+                <a:lnTo>
+                  <a:pt x="12" y="12"/>
+                </a:lnTo>
+                <a:lnTo>
+                  <a:pt x="11" y="12"/>
+                </a:lnTo>
+                <a:close/>
+                <a:moveTo>
+                  <a:pt x="17" y="11"/>
+                </a:moveTo>
+                <a:lnTo>
+                  <a:pt x="18" y="11"/>
+                </a:lnTo>
+                <a:lnTo>
+                  <a:pt x="18" y="12"/>
+                </a:lnTo>
+                <a:lnTo>
+                  <a:pt x="17" y="12"/>
+                </a:lnTo>
+                <a:close/>
+                <a:moveTo>
+                  <a:pt x="19" y="11"/>
+                </a:moveTo>
+                <a:lnTo>
+                  <a:pt x="21" y="11"/>
+                </a:lnTo>
+                <a:lnTo>
+                  <a:pt x="21" y="12"/>
+                </a:lnTo>
+                <a:lnTo>
+                  <a:pt x="19" y="12"/>
+                </a:lnTo>
+                <a:close/>
+                <a:moveTo>
+                  <a:pt x="22" y="11"/>
+                </a:moveTo>
+                <a:lnTo>
+                  <a:pt x="23" y="11"/>
+                </a:lnTo>
+                <a:lnTo>
+                  <a:pt x="23" y="12"/>
+                </a:lnTo>
+                <a:lnTo>
+                  <a:pt x="22" y="12"/>
+                </a:lnTo>
+                <a:close/>
+                <a:moveTo>
+                  <a:pt x="25" y="11"/>
+                </a:moveTo>
+                <a:lnTo>
+                  <a:pt x="26" y="11"/>
+                </a:lnTo>
+                <a:lnTo>
+                  <a:pt x="26" y="12"/>
+                </a:lnTo>
+                <a:lnTo>
+                  <a:pt x="25" y="12"/>
+                </a:lnTo>
+                <a:close/>
+                <a:moveTo>
+                  <a:pt x="28" y="11"/>
+                </a:moveTo>
+                <a:lnTo>
+                  <a:pt x="29" y="11"/>
+                </a:lnTo>
+                <a:lnTo>
+                  <a:pt x="29" y="12"/>
+                </a:lnTo>
+                <a:lnTo>
+                  <a:pt x="28" y="12"/>
+                </a:lnTo>
+                <a:close/>
+                <a:moveTo>
+                  <a:pt x="0" y="12"/>
+                </a:moveTo>
+                <a:lnTo>
+                  <a:pt x="2" y="12"/>
+                </a:lnTo>
+                <a:lnTo>
+                  <a:pt x="2" y="13"/>
+                </a:lnTo>
+                <a:lnTo>
+                  <a:pt x="0" y="13"/>
+                </a:lnTo>
+                <a:close/>
+                <a:moveTo>
+                  <a:pt x="3" y="12"/>
+                </a:moveTo>
+                <a:lnTo>
+                  <a:pt x="7" y="12"/>
+                </a:lnTo>
+                <a:lnTo>
+                  <a:pt x="7" y="13"/>
+                </a:lnTo>
+                <a:lnTo>
+                  <a:pt x="3" y="13"/>
+                </a:lnTo>
+                <a:close/>
+                <a:moveTo>
+                  <a:pt x="9" y="12"/>
+                </a:moveTo>
+                <a:lnTo>
+                  <a:pt x="12" y="12"/>
+                </a:lnTo>
+                <a:lnTo>
+                  <a:pt x="12" y="13"/>
+                </a:lnTo>
+                <a:lnTo>
+                  <a:pt x="9" y="13"/>
+                </a:lnTo>
+                <a:close/>
+                <a:moveTo>
+                  <a:pt x="16" y="12"/>
+                </a:moveTo>
+                <a:lnTo>
+                  <a:pt x="17" y="12"/>
+                </a:lnTo>
+                <a:lnTo>
+                  <a:pt x="17" y="13"/>
+                </a:lnTo>
+                <a:lnTo>
+                  <a:pt x="16" y="13"/>
+                </a:lnTo>
+                <a:close/>
+                <a:moveTo>
+                  <a:pt x="20" y="12"/>
+                </a:moveTo>
+                <a:lnTo>
+                  <a:pt x="21" y="12"/>
+                </a:lnTo>
+                <a:lnTo>
+                  <a:pt x="21" y="13"/>
+                </a:lnTo>
+                <a:lnTo>
+                  <a:pt x="20" y="13"/>
+                </a:lnTo>
+                <a:close/>
+                <a:moveTo>
+                  <a:pt x="22" y="12"/>
+                </a:moveTo>
+                <a:lnTo>
+                  <a:pt x="24" y="12"/>
+                </a:lnTo>
+                <a:lnTo>
+                  <a:pt x="24" y="13"/>
+                </a:lnTo>
+                <a:lnTo>
+                  <a:pt x="22" y="13"/>
+                </a:lnTo>
+                <a:close/>
+                <a:moveTo>
+                  <a:pt x="28" y="12"/>
+                </a:moveTo>
+                <a:lnTo>
+                  <a:pt x="29" y="12"/>
+                </a:lnTo>
+                <a:lnTo>
+                  <a:pt x="29" y="13"/>
+                </a:lnTo>
+                <a:lnTo>
+                  <a:pt x="28" y="13"/>
+                </a:lnTo>
+                <a:close/>
+                <a:moveTo>
+                  <a:pt x="0" y="13"/>
+                </a:moveTo>
+                <a:lnTo>
+                  <a:pt x="1" y="13"/>
+                </a:lnTo>
+                <a:lnTo>
+                  <a:pt x="1" y="14"/>
+                </a:lnTo>
+                <a:lnTo>
+                  <a:pt x="0" y="14"/>
+                </a:lnTo>
+                <a:close/>
+                <a:moveTo>
+                  <a:pt x="3" y="13"/>
+                </a:moveTo>
+                <a:lnTo>
+                  <a:pt x="4" y="13"/>
+                </a:lnTo>
+                <a:lnTo>
+                  <a:pt x="4" y="14"/>
+                </a:lnTo>
+                <a:lnTo>
+                  <a:pt x="3" y="14"/>
+                </a:lnTo>
+                <a:close/>
+                <a:moveTo>
+                  <a:pt x="7" y="13"/>
+                </a:moveTo>
+                <a:lnTo>
+                  <a:pt x="10" y="13"/>
+                </a:lnTo>
+                <a:lnTo>
+                  <a:pt x="10" y="14"/>
+                </a:lnTo>
+                <a:lnTo>
+                  <a:pt x="7" y="14"/>
+                </a:lnTo>
+                <a:close/>
+                <a:moveTo>
+                  <a:pt x="11" y="13"/>
+                </a:moveTo>
+                <a:lnTo>
+                  <a:pt x="13" y="13"/>
+                </a:lnTo>
+                <a:lnTo>
+                  <a:pt x="13" y="14"/>
+                </a:lnTo>
+                <a:lnTo>
+                  <a:pt x="11" y="14"/>
+                </a:lnTo>
+                <a:close/>
+                <a:moveTo>
+                  <a:pt x="14" y="13"/>
+                </a:moveTo>
+                <a:lnTo>
+                  <a:pt x="16" y="13"/>
+                </a:lnTo>
+                <a:lnTo>
+                  <a:pt x="16" y="14"/>
+                </a:lnTo>
+                <a:lnTo>
+                  <a:pt x="14" y="14"/>
+                </a:lnTo>
+                <a:close/>
+                <a:moveTo>
+                  <a:pt x="17" y="13"/>
+                </a:moveTo>
+                <a:lnTo>
+                  <a:pt x="19" y="13"/>
+                </a:lnTo>
+                <a:lnTo>
+                  <a:pt x="19" y="14"/>
+                </a:lnTo>
+                <a:lnTo>
+                  <a:pt x="17" y="14"/>
+                </a:lnTo>
+                <a:close/>
+                <a:moveTo>
+                  <a:pt x="22" y="13"/>
+                </a:moveTo>
+                <a:lnTo>
+                  <a:pt x="23" y="13"/>
+                </a:lnTo>
+                <a:lnTo>
+                  <a:pt x="23" y="14"/>
+                </a:lnTo>
+                <a:lnTo>
+                  <a:pt x="22" y="14"/>
+                </a:lnTo>
+                <a:close/>
+                <a:moveTo>
+                  <a:pt x="24" y="13"/>
+                </a:moveTo>
+                <a:lnTo>
+                  <a:pt x="29" y="13"/>
+                </a:lnTo>
+                <a:lnTo>
+                  <a:pt x="29" y="14"/>
+                </a:lnTo>
+                <a:lnTo>
+                  <a:pt x="24" y="14"/>
+                </a:lnTo>
+                <a:close/>
+                <a:moveTo>
+                  <a:pt x="2" y="14"/>
+                </a:moveTo>
+                <a:lnTo>
+                  <a:pt x="3" y="14"/>
+                </a:lnTo>
+                <a:lnTo>
+                  <a:pt x="3" y="15"/>
+                </a:lnTo>
+                <a:lnTo>
+                  <a:pt x="2" y="15"/>
+                </a:lnTo>
+                <a:close/>
+                <a:moveTo>
+                  <a:pt x="4" y="14"/>
+                </a:moveTo>
+                <a:lnTo>
+                  <a:pt x="5" y="14"/>
+                </a:lnTo>
+                <a:lnTo>
+                  <a:pt x="5" y="15"/>
+                </a:lnTo>
+                <a:lnTo>
+                  <a:pt x="4" y="15"/>
+                </a:lnTo>
+                <a:close/>
+                <a:moveTo>
+                  <a:pt x="6" y="14"/>
+                </a:moveTo>
+                <a:lnTo>
+                  <a:pt x="11" y="14"/>
+                </a:lnTo>
+                <a:lnTo>
+                  <a:pt x="11" y="15"/>
+                </a:lnTo>
+                <a:lnTo>
+                  <a:pt x="6" y="15"/>
+                </a:lnTo>
+                <a:close/>
+                <a:moveTo>
+                  <a:pt x="12" y="14"/>
+                </a:moveTo>
+                <a:lnTo>
+                  <a:pt x="13" y="14"/>
+                </a:lnTo>
+                <a:lnTo>
+                  <a:pt x="13" y="15"/>
+                </a:lnTo>
+                <a:lnTo>
+                  <a:pt x="12" y="15"/>
+                </a:lnTo>
+                <a:close/>
+                <a:moveTo>
+                  <a:pt x="14" y="14"/>
+                </a:moveTo>
+                <a:lnTo>
+                  <a:pt x="17" y="14"/>
+                </a:lnTo>
+                <a:lnTo>
+                  <a:pt x="17" y="15"/>
+                </a:lnTo>
+                <a:lnTo>
+                  <a:pt x="14" y="15"/>
+                </a:lnTo>
+                <a:close/>
+                <a:moveTo>
+                  <a:pt x="18" y="14"/>
+                </a:moveTo>
+                <a:lnTo>
+                  <a:pt x="22" y="14"/>
+                </a:lnTo>
+                <a:lnTo>
+                  <a:pt x="22" y="15"/>
+                </a:lnTo>
+                <a:lnTo>
+                  <a:pt x="18" y="15"/>
+                </a:lnTo>
+                <a:close/>
+                <a:moveTo>
+                  <a:pt x="23" y="14"/>
+                </a:moveTo>
+                <a:lnTo>
+                  <a:pt x="24" y="14"/>
+                </a:lnTo>
+                <a:lnTo>
+                  <a:pt x="24" y="15"/>
+                </a:lnTo>
+                <a:lnTo>
+                  <a:pt x="23" y="15"/>
+                </a:lnTo>
+                <a:close/>
+                <a:moveTo>
+                  <a:pt x="26" y="14"/>
+                </a:moveTo>
+                <a:lnTo>
+                  <a:pt x="27" y="14"/>
+                </a:lnTo>
+                <a:lnTo>
+                  <a:pt x="27" y="15"/>
+                </a:lnTo>
+                <a:lnTo>
+                  <a:pt x="26" y="15"/>
+                </a:lnTo>
+                <a:close/>
+                <a:moveTo>
+                  <a:pt x="28" y="14"/>
+                </a:moveTo>
+                <a:lnTo>
+                  <a:pt x="29" y="14"/>
+                </a:lnTo>
+                <a:lnTo>
+                  <a:pt x="29" y="15"/>
+                </a:lnTo>
+                <a:lnTo>
+                  <a:pt x="28" y="15"/>
+                </a:lnTo>
+                <a:close/>
+                <a:moveTo>
+                  <a:pt x="0" y="15"/>
+                </a:moveTo>
+                <a:lnTo>
+                  <a:pt x="1" y="15"/>
+                </a:lnTo>
+                <a:lnTo>
+                  <a:pt x="1" y="16"/>
+                </a:lnTo>
+                <a:lnTo>
+                  <a:pt x="0" y="16"/>
+                </a:lnTo>
+                <a:close/>
+                <a:moveTo>
+                  <a:pt x="2" y="15"/>
+                </a:moveTo>
+                <a:lnTo>
+                  <a:pt x="3" y="15"/>
+                </a:lnTo>
+                <a:lnTo>
+                  <a:pt x="3" y="16"/>
+                </a:lnTo>
+                <a:lnTo>
+                  <a:pt x="2" y="16"/>
+                </a:lnTo>
+                <a:close/>
+                <a:moveTo>
+                  <a:pt x="8" y="15"/>
+                </a:moveTo>
+                <a:lnTo>
+                  <a:pt x="9" y="15"/>
+                </a:lnTo>
+                <a:lnTo>
+                  <a:pt x="9" y="16"/>
+                </a:lnTo>
+                <a:lnTo>
+                  <a:pt x="8" y="16"/>
+                </a:lnTo>
+                <a:close/>
+                <a:moveTo>
+                  <a:pt x="10" y="15"/>
+                </a:moveTo>
+                <a:lnTo>
+                  <a:pt x="13" y="15"/>
+                </a:lnTo>
+                <a:lnTo>
+                  <a:pt x="13" y="16"/>
+                </a:lnTo>
+                <a:lnTo>
+                  <a:pt x="10" y="16"/>
+                </a:lnTo>
+                <a:close/>
+                <a:moveTo>
+                  <a:pt x="15" y="15"/>
+                </a:moveTo>
+                <a:lnTo>
+                  <a:pt x="16" y="15"/>
+                </a:lnTo>
+                <a:lnTo>
+                  <a:pt x="16" y="16"/>
+                </a:lnTo>
+                <a:lnTo>
+                  <a:pt x="15" y="16"/>
+                </a:lnTo>
+                <a:close/>
+                <a:moveTo>
+                  <a:pt x="20" y="15"/>
+                </a:moveTo>
+                <a:lnTo>
+                  <a:pt x="25" y="15"/>
+                </a:lnTo>
+                <a:lnTo>
+                  <a:pt x="25" y="16"/>
+                </a:lnTo>
+                <a:lnTo>
+                  <a:pt x="20" y="16"/>
+                </a:lnTo>
+                <a:close/>
+                <a:moveTo>
+                  <a:pt x="26" y="15"/>
+                </a:moveTo>
+                <a:lnTo>
+                  <a:pt x="27" y="15"/>
+                </a:lnTo>
+                <a:lnTo>
+                  <a:pt x="27" y="16"/>
+                </a:lnTo>
+                <a:lnTo>
+                  <a:pt x="26" y="16"/>
+                </a:lnTo>
+                <a:close/>
+                <a:moveTo>
+                  <a:pt x="28" y="15"/>
+                </a:moveTo>
+                <a:lnTo>
+                  <a:pt x="29" y="15"/>
+                </a:lnTo>
+                <a:lnTo>
+                  <a:pt x="29" y="16"/>
+                </a:lnTo>
+                <a:lnTo>
+                  <a:pt x="28" y="16"/>
+                </a:lnTo>
+                <a:close/>
+                <a:moveTo>
+                  <a:pt x="2" y="16"/>
+                </a:moveTo>
+                <a:lnTo>
+                  <a:pt x="4" y="16"/>
+                </a:lnTo>
+                <a:lnTo>
+                  <a:pt x="4" y="17"/>
+                </a:lnTo>
+                <a:lnTo>
+                  <a:pt x="2" y="17"/>
+                </a:lnTo>
+                <a:close/>
+                <a:moveTo>
+                  <a:pt x="6" y="16"/>
+                </a:moveTo>
+                <a:lnTo>
+                  <a:pt x="12" y="16"/>
+                </a:lnTo>
+                <a:lnTo>
+                  <a:pt x="12" y="17"/>
+                </a:lnTo>
+                <a:lnTo>
+                  <a:pt x="6" y="17"/>
+                </a:lnTo>
+                <a:close/>
+                <a:moveTo>
+                  <a:pt x="13" y="16"/>
+                </a:moveTo>
+                <a:lnTo>
+                  <a:pt x="14" y="16"/>
+                </a:lnTo>
+                <a:lnTo>
+                  <a:pt x="14" y="17"/>
+                </a:lnTo>
+                <a:lnTo>
+                  <a:pt x="13" y="17"/>
+                </a:lnTo>
+                <a:close/>
+                <a:moveTo>
+                  <a:pt x="19" y="16"/>
+                </a:moveTo>
+                <a:lnTo>
+                  <a:pt x="21" y="16"/>
+                </a:lnTo>
+                <a:lnTo>
+                  <a:pt x="21" y="17"/>
+                </a:lnTo>
+                <a:lnTo>
+                  <a:pt x="19" y="17"/>
+                </a:lnTo>
+                <a:close/>
+                <a:moveTo>
+                  <a:pt x="25" y="16"/>
+                </a:moveTo>
+                <a:lnTo>
+                  <a:pt x="26" y="16"/>
+                </a:lnTo>
+                <a:lnTo>
+                  <a:pt x="26" y="17"/>
+                </a:lnTo>
+                <a:lnTo>
+                  <a:pt x="25" y="17"/>
+                </a:lnTo>
+                <a:close/>
+                <a:moveTo>
+                  <a:pt x="0" y="17"/>
+                </a:moveTo>
+                <a:lnTo>
+                  <a:pt x="2" y="17"/>
+                </a:lnTo>
+                <a:lnTo>
+                  <a:pt x="2" y="18"/>
+                </a:lnTo>
+                <a:lnTo>
+                  <a:pt x="0" y="18"/>
+                </a:lnTo>
+                <a:close/>
+                <a:moveTo>
+                  <a:pt x="4" y="17"/>
+                </a:moveTo>
+                <a:lnTo>
+                  <a:pt x="6" y="17"/>
+                </a:lnTo>
+                <a:lnTo>
+                  <a:pt x="6" y="18"/>
+                </a:lnTo>
+                <a:lnTo>
+                  <a:pt x="4" y="18"/>
+                </a:lnTo>
+                <a:close/>
+                <a:moveTo>
+                  <a:pt x="10" y="17"/>
+                </a:moveTo>
+                <a:lnTo>
+                  <a:pt x="11" y="17"/>
+                </a:lnTo>
+                <a:lnTo>
+                  <a:pt x="11" y="18"/>
+                </a:lnTo>
+                <a:lnTo>
+                  <a:pt x="10" y="18"/>
+                </a:lnTo>
+                <a:close/>
+                <a:moveTo>
+                  <a:pt x="12" y="17"/>
+                </a:moveTo>
+                <a:lnTo>
+                  <a:pt x="13" y="17"/>
+                </a:lnTo>
+                <a:lnTo>
+                  <a:pt x="13" y="18"/>
+                </a:lnTo>
+                <a:lnTo>
+                  <a:pt x="12" y="18"/>
+                </a:lnTo>
+                <a:close/>
+                <a:moveTo>
+                  <a:pt x="14" y="17"/>
+                </a:moveTo>
+                <a:lnTo>
+                  <a:pt x="16" y="17"/>
+                </a:lnTo>
+                <a:lnTo>
+                  <a:pt x="16" y="18"/>
+                </a:lnTo>
+                <a:lnTo>
+                  <a:pt x="14" y="18"/>
+                </a:lnTo>
+                <a:close/>
+                <a:moveTo>
+                  <a:pt x="18" y="17"/>
+                </a:moveTo>
+                <a:lnTo>
+                  <a:pt x="21" y="17"/>
+                </a:lnTo>
+                <a:lnTo>
+                  <a:pt x="21" y="18"/>
+                </a:lnTo>
+                <a:lnTo>
+                  <a:pt x="18" y="18"/>
+                </a:lnTo>
+                <a:close/>
+                <a:moveTo>
+                  <a:pt x="24" y="17"/>
+                </a:moveTo>
+                <a:lnTo>
+                  <a:pt x="25" y="17"/>
+                </a:lnTo>
+                <a:lnTo>
+                  <a:pt x="25" y="18"/>
+                </a:lnTo>
+                <a:lnTo>
+                  <a:pt x="24" y="18"/>
+                </a:lnTo>
+                <a:close/>
+                <a:moveTo>
+                  <a:pt x="26" y="17"/>
+                </a:moveTo>
+                <a:lnTo>
+                  <a:pt x="28" y="17"/>
+                </a:lnTo>
+                <a:lnTo>
+                  <a:pt x="28" y="18"/>
+                </a:lnTo>
+                <a:lnTo>
+                  <a:pt x="26" y="18"/>
+                </a:lnTo>
+                <a:close/>
+                <a:moveTo>
+                  <a:pt x="0" y="18"/>
+                </a:moveTo>
+                <a:lnTo>
+                  <a:pt x="3" y="18"/>
+                </a:lnTo>
+                <a:lnTo>
+                  <a:pt x="3" y="19"/>
+                </a:lnTo>
+                <a:lnTo>
+                  <a:pt x="0" y="19"/>
+                </a:lnTo>
+                <a:close/>
+                <a:moveTo>
+                  <a:pt x="6" y="18"/>
+                </a:moveTo>
+                <a:lnTo>
+                  <a:pt x="7" y="18"/>
+                </a:lnTo>
+                <a:lnTo>
+                  <a:pt x="7" y="19"/>
+                </a:lnTo>
+                <a:lnTo>
+                  <a:pt x="6" y="19"/>
+                </a:lnTo>
+                <a:close/>
+                <a:moveTo>
+                  <a:pt x="8" y="18"/>
+                </a:moveTo>
+                <a:lnTo>
+                  <a:pt x="12" y="18"/>
+                </a:lnTo>
+                <a:lnTo>
+                  <a:pt x="12" y="19"/>
+                </a:lnTo>
+                <a:lnTo>
+                  <a:pt x="8" y="19"/>
+                </a:lnTo>
+                <a:close/>
+                <a:moveTo>
+                  <a:pt x="13" y="18"/>
+                </a:moveTo>
+                <a:lnTo>
+                  <a:pt x="14" y="18"/>
+                </a:lnTo>
+                <a:lnTo>
+                  <a:pt x="14" y="19"/>
+                </a:lnTo>
+                <a:lnTo>
+                  <a:pt x="13" y="19"/>
+                </a:lnTo>
+                <a:close/>
+                <a:moveTo>
+                  <a:pt x="15" y="18"/>
+                </a:moveTo>
+                <a:lnTo>
+                  <a:pt x="16" y="18"/>
+                </a:lnTo>
+                <a:lnTo>
+                  <a:pt x="16" y="19"/>
+                </a:lnTo>
+                <a:lnTo>
+                  <a:pt x="15" y="19"/>
+                </a:lnTo>
+                <a:close/>
+                <a:moveTo>
+                  <a:pt x="19" y="18"/>
+                </a:moveTo>
+                <a:lnTo>
+                  <a:pt x="21" y="18"/>
+                </a:lnTo>
+                <a:lnTo>
+                  <a:pt x="21" y="19"/>
+                </a:lnTo>
+                <a:lnTo>
+                  <a:pt x="19" y="19"/>
+                </a:lnTo>
+                <a:close/>
+                <a:moveTo>
+                  <a:pt x="25" y="18"/>
+                </a:moveTo>
+                <a:lnTo>
+                  <a:pt x="26" y="18"/>
+                </a:lnTo>
+                <a:lnTo>
+                  <a:pt x="26" y="19"/>
+                </a:lnTo>
+                <a:lnTo>
+                  <a:pt x="25" y="19"/>
+                </a:lnTo>
+                <a:close/>
+                <a:moveTo>
+                  <a:pt x="28" y="18"/>
+                </a:moveTo>
+                <a:lnTo>
+                  <a:pt x="29" y="18"/>
+                </a:lnTo>
+                <a:lnTo>
+                  <a:pt x="29" y="19"/>
+                </a:lnTo>
+                <a:lnTo>
+                  <a:pt x="28" y="19"/>
+                </a:lnTo>
+                <a:close/>
+                <a:moveTo>
+                  <a:pt x="0" y="19"/>
+                </a:moveTo>
+                <a:lnTo>
+                  <a:pt x="2" y="19"/>
+                </a:lnTo>
+                <a:lnTo>
+                  <a:pt x="2" y="20"/>
+                </a:lnTo>
+                <a:lnTo>
+                  <a:pt x="0" y="20"/>
+                </a:lnTo>
+                <a:close/>
+                <a:moveTo>
+                  <a:pt x="5" y="19"/>
+                </a:moveTo>
+                <a:lnTo>
+                  <a:pt x="6" y="19"/>
+                </a:lnTo>
+                <a:lnTo>
+                  <a:pt x="6" y="20"/>
+                </a:lnTo>
+                <a:lnTo>
+                  <a:pt x="5" y="20"/>
+                </a:lnTo>
+                <a:close/>
+                <a:moveTo>
+                  <a:pt x="7" y="19"/>
+                </a:moveTo>
+                <a:lnTo>
+                  <a:pt x="11" y="19"/>
+                </a:lnTo>
+                <a:lnTo>
+                  <a:pt x="11" y="20"/>
+                </a:lnTo>
+                <a:lnTo>
+                  <a:pt x="7" y="20"/>
+                </a:lnTo>
+                <a:close/>
+                <a:moveTo>
+                  <a:pt x="12" y="19"/>
+                </a:moveTo>
+                <a:lnTo>
+                  <a:pt x="14" y="19"/>
+                </a:lnTo>
+                <a:lnTo>
+                  <a:pt x="14" y="20"/>
+                </a:lnTo>
+                <a:lnTo>
+                  <a:pt x="12" y="20"/>
+                </a:lnTo>
+                <a:close/>
+                <a:moveTo>
+                  <a:pt x="18" y="19"/>
+                </a:moveTo>
+                <a:lnTo>
+                  <a:pt x="20" y="19"/>
+                </a:lnTo>
+                <a:lnTo>
+                  <a:pt x="20" y="20"/>
+                </a:lnTo>
+                <a:lnTo>
+                  <a:pt x="18" y="20"/>
+                </a:lnTo>
+                <a:close/>
+                <a:moveTo>
+                  <a:pt x="22" y="19"/>
+                </a:moveTo>
+                <a:lnTo>
+                  <a:pt x="27" y="19"/>
+                </a:lnTo>
+                <a:lnTo>
+                  <a:pt x="27" y="20"/>
+                </a:lnTo>
+                <a:lnTo>
+                  <a:pt x="22" y="20"/>
+                </a:lnTo>
+                <a:close/>
+                <a:moveTo>
+                  <a:pt x="0" y="20"/>
+                </a:moveTo>
+                <a:lnTo>
+                  <a:pt x="2" y="20"/>
+                </a:lnTo>
+                <a:lnTo>
+                  <a:pt x="2" y="21"/>
+                </a:lnTo>
+                <a:lnTo>
+                  <a:pt x="0" y="21"/>
+                </a:lnTo>
+                <a:close/>
+                <a:moveTo>
+                  <a:pt x="4" y="20"/>
+                </a:moveTo>
+                <a:lnTo>
+                  <a:pt x="5" y="20"/>
+                </a:lnTo>
+                <a:lnTo>
+                  <a:pt x="5" y="21"/>
+                </a:lnTo>
+                <a:lnTo>
+                  <a:pt x="4" y="21"/>
+                </a:lnTo>
+                <a:close/>
+                <a:moveTo>
+                  <a:pt x="6" y="20"/>
+                </a:moveTo>
+                <a:lnTo>
+                  <a:pt x="8" y="20"/>
+                </a:lnTo>
+                <a:lnTo>
+                  <a:pt x="8" y="21"/>
+                </a:lnTo>
+                <a:lnTo>
+                  <a:pt x="6" y="21"/>
+                </a:lnTo>
+                <a:close/>
+                <a:moveTo>
+                  <a:pt x="10" y="20"/>
+                </a:moveTo>
+                <a:lnTo>
+                  <a:pt x="11" y="20"/>
+                </a:lnTo>
+                <a:lnTo>
+                  <a:pt x="11" y="21"/>
+                </a:lnTo>
+                <a:lnTo>
+                  <a:pt x="10" y="21"/>
+                </a:lnTo>
+                <a:close/>
+                <a:moveTo>
+                  <a:pt x="14" y="20"/>
+                </a:moveTo>
+                <a:lnTo>
+                  <a:pt x="15" y="20"/>
+                </a:lnTo>
+                <a:lnTo>
+                  <a:pt x="15" y="21"/>
+                </a:lnTo>
+                <a:lnTo>
+                  <a:pt x="14" y="21"/>
+                </a:lnTo>
+                <a:close/>
+                <a:moveTo>
+                  <a:pt x="16" y="20"/>
+                </a:moveTo>
+                <a:lnTo>
+                  <a:pt x="28" y="20"/>
+                </a:lnTo>
+                <a:lnTo>
+                  <a:pt x="28" y="21"/>
+                </a:lnTo>
+                <a:lnTo>
+                  <a:pt x="16" y="21"/>
+                </a:lnTo>
+                <a:close/>
+                <a:moveTo>
+                  <a:pt x="8" y="21"/>
+                </a:moveTo>
+                <a:lnTo>
+                  <a:pt x="9" y="21"/>
+                </a:lnTo>
+                <a:lnTo>
+                  <a:pt x="9" y="22"/>
+                </a:lnTo>
+                <a:lnTo>
+                  <a:pt x="8" y="22"/>
+                </a:lnTo>
+                <a:close/>
+                <a:moveTo>
+                  <a:pt x="10" y="21"/>
+                </a:moveTo>
+                <a:lnTo>
+                  <a:pt x="13" y="21"/>
+                </a:lnTo>
+                <a:lnTo>
+                  <a:pt x="13" y="22"/>
+                </a:lnTo>
+                <a:lnTo>
+                  <a:pt x="10" y="22"/>
+                </a:lnTo>
+                <a:close/>
+                <a:moveTo>
+                  <a:pt x="15" y="21"/>
+                </a:moveTo>
+                <a:lnTo>
+                  <a:pt x="16" y="21"/>
+                </a:lnTo>
+                <a:lnTo>
+                  <a:pt x="16" y="22"/>
+                </a:lnTo>
+                <a:lnTo>
+                  <a:pt x="15" y="22"/>
+                </a:lnTo>
+                <a:close/>
+                <a:moveTo>
+                  <a:pt x="17" y="21"/>
+                </a:moveTo>
+                <a:lnTo>
+                  <a:pt x="19" y="21"/>
+                </a:lnTo>
+                <a:lnTo>
+                  <a:pt x="19" y="22"/>
+                </a:lnTo>
+                <a:lnTo>
+                  <a:pt x="17" y="22"/>
+                </a:lnTo>
+                <a:close/>
+                <a:moveTo>
+                  <a:pt x="20" y="21"/>
+                </a:moveTo>
+                <a:lnTo>
+                  <a:pt x="21" y="21"/>
+                </a:lnTo>
+                <a:lnTo>
+                  <a:pt x="21" y="22"/>
+                </a:lnTo>
+                <a:lnTo>
+                  <a:pt x="20" y="22"/>
+                </a:lnTo>
+                <a:close/>
+                <a:moveTo>
+                  <a:pt x="24" y="21"/>
+                </a:moveTo>
+                <a:lnTo>
+                  <a:pt x="26" y="21"/>
+                </a:lnTo>
+                <a:lnTo>
+                  <a:pt x="26" y="22"/>
+                </a:lnTo>
+                <a:lnTo>
+                  <a:pt x="24" y="22"/>
+                </a:lnTo>
+                <a:close/>
+                <a:moveTo>
+                  <a:pt x="0" y="22"/>
+                </a:moveTo>
+                <a:lnTo>
+                  <a:pt x="7" y="22"/>
+                </a:lnTo>
+                <a:lnTo>
+                  <a:pt x="7" y="23"/>
+                </a:lnTo>
+                <a:lnTo>
+                  <a:pt x="0" y="23"/>
+                </a:lnTo>
+                <a:close/>
+                <a:moveTo>
+                  <a:pt x="10" y="22"/>
+                </a:moveTo>
+                <a:lnTo>
+                  <a:pt x="12" y="22"/>
+                </a:lnTo>
+                <a:lnTo>
+                  <a:pt x="12" y="23"/>
+                </a:lnTo>
+                <a:lnTo>
+                  <a:pt x="10" y="23"/>
+                </a:lnTo>
+                <a:close/>
+                <a:moveTo>
+                  <a:pt x="13" y="22"/>
+                </a:moveTo>
+                <a:lnTo>
+                  <a:pt x="16" y="22"/>
+                </a:lnTo>
+                <a:lnTo>
+                  <a:pt x="16" y="23"/>
+                </a:lnTo>
+                <a:lnTo>
+                  <a:pt x="13" y="23"/>
+                </a:lnTo>
+                <a:close/>
+                <a:moveTo>
+                  <a:pt x="19" y="22"/>
+                </a:moveTo>
+                <a:lnTo>
+                  <a:pt x="21" y="22"/>
+                </a:lnTo>
+                <a:lnTo>
+                  <a:pt x="21" y="23"/>
+                </a:lnTo>
+                <a:lnTo>
+                  <a:pt x="19" y="23"/>
+                </a:lnTo>
+                <a:close/>
+                <a:moveTo>
+                  <a:pt x="22" y="22"/>
+                </a:moveTo>
+                <a:lnTo>
+                  <a:pt x="23" y="22"/>
+                </a:lnTo>
+                <a:lnTo>
+                  <a:pt x="23" y="23"/>
+                </a:lnTo>
+                <a:lnTo>
+                  <a:pt x="22" y="23"/>
+                </a:lnTo>
+                <a:close/>
+                <a:moveTo>
+                  <a:pt x="24" y="22"/>
+                </a:moveTo>
+                <a:lnTo>
+                  <a:pt x="26" y="22"/>
+                </a:lnTo>
+                <a:lnTo>
+                  <a:pt x="26" y="23"/>
+                </a:lnTo>
+                <a:lnTo>
+                  <a:pt x="24" y="23"/>
+                </a:lnTo>
+                <a:close/>
+                <a:moveTo>
+                  <a:pt x="0" y="23"/>
+                </a:moveTo>
+                <a:lnTo>
+                  <a:pt x="1" y="23"/>
+                </a:lnTo>
+                <a:lnTo>
+                  <a:pt x="1" y="24"/>
+                </a:lnTo>
+                <a:lnTo>
+                  <a:pt x="0" y="24"/>
+                </a:lnTo>
+                <a:close/>
+                <a:moveTo>
+                  <a:pt x="6" y="23"/>
+                </a:moveTo>
+                <a:lnTo>
+                  <a:pt x="7" y="23"/>
+                </a:lnTo>
+                <a:lnTo>
+                  <a:pt x="7" y="24"/>
+                </a:lnTo>
+                <a:lnTo>
+                  <a:pt x="6" y="24"/>
+                </a:lnTo>
+                <a:close/>
+                <a:moveTo>
+                  <a:pt x="9" y="23"/>
+                </a:moveTo>
+                <a:lnTo>
+                  <a:pt x="13" y="23"/>
+                </a:lnTo>
+                <a:lnTo>
+                  <a:pt x="13" y="24"/>
+                </a:lnTo>
+                <a:lnTo>
+                  <a:pt x="9" y="24"/>
+                </a:lnTo>
+                <a:close/>
+                <a:moveTo>
+                  <a:pt x="14" y="23"/>
+                </a:moveTo>
+                <a:lnTo>
+                  <a:pt x="16" y="23"/>
+                </a:lnTo>
+                <a:lnTo>
+                  <a:pt x="16" y="24"/>
+                </a:lnTo>
+                <a:lnTo>
+                  <a:pt x="14" y="24"/>
+                </a:lnTo>
+                <a:close/>
+                <a:moveTo>
+                  <a:pt x="17" y="23"/>
+                </a:moveTo>
+                <a:lnTo>
+                  <a:pt x="18" y="23"/>
+                </a:lnTo>
+                <a:lnTo>
+                  <a:pt x="18" y="24"/>
+                </a:lnTo>
+                <a:lnTo>
+                  <a:pt x="17" y="24"/>
+                </a:lnTo>
+                <a:close/>
+                <a:moveTo>
+                  <a:pt x="19" y="23"/>
+                </a:moveTo>
+                <a:lnTo>
+                  <a:pt x="21" y="23"/>
+                </a:lnTo>
+                <a:lnTo>
+                  <a:pt x="21" y="24"/>
+                </a:lnTo>
+                <a:lnTo>
+                  <a:pt x="19" y="24"/>
+                </a:lnTo>
+                <a:close/>
+                <a:moveTo>
+                  <a:pt x="24" y="23"/>
+                </a:moveTo>
+                <a:lnTo>
+                  <a:pt x="25" y="23"/>
+                </a:lnTo>
+                <a:lnTo>
+                  <a:pt x="25" y="24"/>
+                </a:lnTo>
+                <a:lnTo>
+                  <a:pt x="24" y="24"/>
+                </a:lnTo>
+                <a:close/>
+                <a:moveTo>
+                  <a:pt x="27" y="23"/>
+                </a:moveTo>
+                <a:lnTo>
+                  <a:pt x="29" y="23"/>
+                </a:lnTo>
+                <a:lnTo>
+                  <a:pt x="29" y="24"/>
+                </a:lnTo>
+                <a:lnTo>
+                  <a:pt x="27" y="24"/>
+                </a:lnTo>
+                <a:close/>
+                <a:moveTo>
+                  <a:pt x="0" y="24"/>
+                </a:moveTo>
+                <a:lnTo>
+                  <a:pt x="1" y="24"/>
+                </a:lnTo>
+                <a:lnTo>
+                  <a:pt x="1" y="25"/>
+                </a:lnTo>
+                <a:lnTo>
+                  <a:pt x="0" y="25"/>
+                </a:lnTo>
+                <a:close/>
+                <a:moveTo>
+                  <a:pt x="2" y="24"/>
+                </a:moveTo>
+                <a:lnTo>
+                  <a:pt x="5" y="24"/>
+                </a:lnTo>
+                <a:lnTo>
+                  <a:pt x="5" y="25"/>
+                </a:lnTo>
+                <a:lnTo>
+                  <a:pt x="2" y="25"/>
+                </a:lnTo>
+                <a:close/>
+                <a:moveTo>
+                  <a:pt x="6" y="24"/>
+                </a:moveTo>
+                <a:lnTo>
+                  <a:pt x="7" y="24"/>
+                </a:lnTo>
+                <a:lnTo>
+                  <a:pt x="7" y="25"/>
+                </a:lnTo>
+                <a:lnTo>
+                  <a:pt x="6" y="25"/>
+                </a:lnTo>
+                <a:close/>
+                <a:moveTo>
+                  <a:pt x="8" y="24"/>
+                </a:moveTo>
+                <a:lnTo>
+                  <a:pt x="9" y="24"/>
+                </a:lnTo>
+                <a:lnTo>
+                  <a:pt x="9" y="25"/>
+                </a:lnTo>
+                <a:lnTo>
+                  <a:pt x="8" y="25"/>
+                </a:lnTo>
+                <a:close/>
+                <a:moveTo>
+                  <a:pt x="11" y="24"/>
+                </a:moveTo>
+                <a:lnTo>
+                  <a:pt x="12" y="24"/>
+                </a:lnTo>
+                <a:lnTo>
+                  <a:pt x="12" y="25"/>
+                </a:lnTo>
+                <a:lnTo>
+                  <a:pt x="11" y="25"/>
+                </a:lnTo>
+                <a:close/>
+                <a:moveTo>
+                  <a:pt x="15" y="24"/>
+                </a:moveTo>
+                <a:lnTo>
+                  <a:pt x="16" y="24"/>
+                </a:lnTo>
+                <a:lnTo>
+                  <a:pt x="16" y="25"/>
+                </a:lnTo>
+                <a:lnTo>
+                  <a:pt x="15" y="25"/>
+                </a:lnTo>
+                <a:close/>
+                <a:moveTo>
+                  <a:pt x="19" y="24"/>
+                </a:moveTo>
+                <a:lnTo>
+                  <a:pt x="26" y="24"/>
+                </a:lnTo>
+                <a:lnTo>
+                  <a:pt x="26" y="25"/>
+                </a:lnTo>
+                <a:lnTo>
+                  <a:pt x="19" y="25"/>
+                </a:lnTo>
+                <a:close/>
+                <a:moveTo>
+                  <a:pt x="28" y="24"/>
+                </a:moveTo>
+                <a:lnTo>
+                  <a:pt x="29" y="24"/>
+                </a:lnTo>
+                <a:lnTo>
+                  <a:pt x="29" y="25"/>
+                </a:lnTo>
+                <a:lnTo>
+                  <a:pt x="28" y="25"/>
+                </a:lnTo>
+                <a:close/>
+                <a:moveTo>
+                  <a:pt x="0" y="25"/>
+                </a:moveTo>
+                <a:lnTo>
+                  <a:pt x="1" y="25"/>
+                </a:lnTo>
+                <a:lnTo>
+                  <a:pt x="1" y="26"/>
+                </a:lnTo>
+                <a:lnTo>
+                  <a:pt x="0" y="26"/>
+                </a:lnTo>
+                <a:close/>
+                <a:moveTo>
+                  <a:pt x="2" y="25"/>
+                </a:moveTo>
+                <a:lnTo>
+                  <a:pt x="5" y="25"/>
+                </a:lnTo>
+                <a:lnTo>
+                  <a:pt x="5" y="26"/>
+                </a:lnTo>
+                <a:lnTo>
+                  <a:pt x="2" y="26"/>
+                </a:lnTo>
+                <a:close/>
+                <a:moveTo>
+                  <a:pt x="6" y="25"/>
+                </a:moveTo>
+                <a:lnTo>
+                  <a:pt x="7" y="25"/>
+                </a:lnTo>
+                <a:lnTo>
+                  <a:pt x="7" y="26"/>
+                </a:lnTo>
+                <a:lnTo>
+                  <a:pt x="6" y="26"/>
+                </a:lnTo>
+                <a:close/>
+                <a:moveTo>
+                  <a:pt x="8" y="25"/>
+                </a:moveTo>
+                <a:lnTo>
+                  <a:pt x="10" y="25"/>
+                </a:lnTo>
+                <a:lnTo>
+                  <a:pt x="10" y="26"/>
+                </a:lnTo>
+                <a:lnTo>
+                  <a:pt x="8" y="26"/>
+                </a:lnTo>
+                <a:close/>
+                <a:moveTo>
+                  <a:pt x="11" y="25"/>
+                </a:moveTo>
+                <a:lnTo>
+                  <a:pt x="19" y="25"/>
+                </a:lnTo>
+                <a:lnTo>
+                  <a:pt x="19" y="26"/>
+                </a:lnTo>
+                <a:lnTo>
+                  <a:pt x="11" y="26"/>
+                </a:lnTo>
+                <a:close/>
+                <a:moveTo>
+                  <a:pt x="20" y="25"/>
+                </a:moveTo>
+                <a:lnTo>
+                  <a:pt x="22" y="25"/>
+                </a:lnTo>
+                <a:lnTo>
+                  <a:pt x="22" y="26"/>
+                </a:lnTo>
+                <a:lnTo>
+                  <a:pt x="20" y="26"/>
+                </a:lnTo>
+                <a:close/>
+                <a:moveTo>
+                  <a:pt x="23" y="25"/>
+                </a:moveTo>
+                <a:lnTo>
+                  <a:pt x="24" y="25"/>
+                </a:lnTo>
+                <a:lnTo>
+                  <a:pt x="24" y="26"/>
+                </a:lnTo>
+                <a:lnTo>
+                  <a:pt x="23" y="26"/>
+                </a:lnTo>
+                <a:close/>
+                <a:moveTo>
+                  <a:pt x="27" y="25"/>
+                </a:moveTo>
+                <a:lnTo>
+                  <a:pt x="29" y="25"/>
+                </a:lnTo>
+                <a:lnTo>
+                  <a:pt x="29" y="26"/>
+                </a:lnTo>
+                <a:lnTo>
+                  <a:pt x="27" y="26"/>
+                </a:lnTo>
+                <a:close/>
+                <a:moveTo>
+                  <a:pt x="0" y="26"/>
+                </a:moveTo>
+                <a:lnTo>
+                  <a:pt x="1" y="26"/>
+                </a:lnTo>
+                <a:lnTo>
+                  <a:pt x="1" y="27"/>
+                </a:lnTo>
+                <a:lnTo>
+                  <a:pt x="0" y="27"/>
+                </a:lnTo>
+                <a:close/>
+                <a:moveTo>
+                  <a:pt x="2" y="26"/>
+                </a:moveTo>
+                <a:lnTo>
+                  <a:pt x="5" y="26"/>
+                </a:lnTo>
+                <a:lnTo>
+                  <a:pt x="5" y="27"/>
+                </a:lnTo>
+                <a:lnTo>
+                  <a:pt x="2" y="27"/>
+                </a:lnTo>
+                <a:close/>
+                <a:moveTo>
+                  <a:pt x="6" y="26"/>
+                </a:moveTo>
+                <a:lnTo>
+                  <a:pt x="7" y="26"/>
+                </a:lnTo>
+                <a:lnTo>
+                  <a:pt x="7" y="27"/>
+                </a:lnTo>
+                <a:lnTo>
+                  <a:pt x="6" y="27"/>
+                </a:lnTo>
+                <a:close/>
+                <a:moveTo>
+                  <a:pt x="10" y="26"/>
+                </a:moveTo>
+                <a:lnTo>
+                  <a:pt x="11" y="26"/>
+                </a:lnTo>
+                <a:lnTo>
+                  <a:pt x="11" y="27"/>
+                </a:lnTo>
+                <a:lnTo>
+                  <a:pt x="10" y="27"/>
+                </a:lnTo>
+                <a:close/>
+                <a:moveTo>
+                  <a:pt x="13" y="26"/>
+                </a:moveTo>
+                <a:lnTo>
+                  <a:pt x="16" y="26"/>
+                </a:lnTo>
+                <a:lnTo>
+                  <a:pt x="16" y="27"/>
+                </a:lnTo>
+                <a:lnTo>
+                  <a:pt x="13" y="27"/>
+                </a:lnTo>
+                <a:close/>
+                <a:moveTo>
+                  <a:pt x="17" y="26"/>
+                </a:moveTo>
+                <a:lnTo>
+                  <a:pt x="19" y="26"/>
+                </a:lnTo>
+                <a:lnTo>
+                  <a:pt x="19" y="27"/>
+                </a:lnTo>
+                <a:lnTo>
+                  <a:pt x="17" y="27"/>
+                </a:lnTo>
+                <a:close/>
+                <a:moveTo>
+                  <a:pt x="21" y="26"/>
+                </a:moveTo>
+                <a:lnTo>
+                  <a:pt x="22" y="26"/>
+                </a:lnTo>
+                <a:lnTo>
+                  <a:pt x="22" y="27"/>
+                </a:lnTo>
+                <a:lnTo>
+                  <a:pt x="21" y="27"/>
+                </a:lnTo>
+                <a:close/>
+                <a:moveTo>
+                  <a:pt x="23" y="26"/>
+                </a:moveTo>
+                <a:lnTo>
+                  <a:pt x="25" y="26"/>
+                </a:lnTo>
+                <a:lnTo>
+                  <a:pt x="25" y="27"/>
+                </a:lnTo>
+                <a:lnTo>
+                  <a:pt x="23" y="27"/>
+                </a:lnTo>
+                <a:close/>
+                <a:moveTo>
+                  <a:pt x="26" y="26"/>
+                </a:moveTo>
+                <a:lnTo>
+                  <a:pt x="29" y="26"/>
+                </a:lnTo>
+                <a:lnTo>
+                  <a:pt x="29" y="27"/>
+                </a:lnTo>
+                <a:lnTo>
+                  <a:pt x="26" y="27"/>
+                </a:lnTo>
+                <a:close/>
+                <a:moveTo>
+                  <a:pt x="0" y="27"/>
+                </a:moveTo>
+                <a:lnTo>
+                  <a:pt x="1" y="27"/>
+                </a:lnTo>
+                <a:lnTo>
+                  <a:pt x="1" y="28"/>
+                </a:lnTo>
+                <a:lnTo>
+                  <a:pt x="0" y="28"/>
+                </a:lnTo>
+                <a:close/>
+                <a:moveTo>
+                  <a:pt x="6" y="27"/>
+                </a:moveTo>
+                <a:lnTo>
+                  <a:pt x="7" y="27"/>
+                </a:lnTo>
+                <a:lnTo>
+                  <a:pt x="7" y="28"/>
+                </a:lnTo>
+                <a:lnTo>
+                  <a:pt x="6" y="28"/>
+                </a:lnTo>
+                <a:close/>
+                <a:moveTo>
+                  <a:pt x="8" y="27"/>
+                </a:moveTo>
+                <a:lnTo>
+                  <a:pt x="10" y="27"/>
+                </a:lnTo>
+                <a:lnTo>
+                  <a:pt x="10" y="28"/>
+                </a:lnTo>
+                <a:lnTo>
+                  <a:pt x="8" y="28"/>
+                </a:lnTo>
+                <a:close/>
+                <a:moveTo>
+                  <a:pt x="23" y="27"/>
+                </a:moveTo>
+                <a:lnTo>
+                  <a:pt x="24" y="27"/>
+                </a:lnTo>
+                <a:lnTo>
+                  <a:pt x="24" y="28"/>
+                </a:lnTo>
+                <a:lnTo>
+                  <a:pt x="23" y="28"/>
+                </a:lnTo>
+                <a:close/>
+                <a:moveTo>
+                  <a:pt x="25" y="27"/>
+                </a:moveTo>
+                <a:lnTo>
+                  <a:pt x="27" y="27"/>
+                </a:lnTo>
+                <a:lnTo>
+                  <a:pt x="27" y="28"/>
+                </a:lnTo>
+                <a:lnTo>
+                  <a:pt x="25" y="28"/>
+                </a:lnTo>
+                <a:close/>
+                <a:moveTo>
+                  <a:pt x="28" y="27"/>
+                </a:moveTo>
+                <a:lnTo>
+                  <a:pt x="29" y="27"/>
+                </a:lnTo>
+                <a:lnTo>
+                  <a:pt x="29" y="28"/>
+                </a:lnTo>
+                <a:lnTo>
+                  <a:pt x="28" y="28"/>
+                </a:lnTo>
+                <a:close/>
+                <a:moveTo>
+                  <a:pt x="0" y="28"/>
+                </a:moveTo>
+                <a:lnTo>
+                  <a:pt x="7" y="28"/>
+                </a:lnTo>
+                <a:lnTo>
+                  <a:pt x="7" y="29"/>
+                </a:lnTo>
+                <a:lnTo>
+                  <a:pt x="0" y="29"/>
+                </a:lnTo>
+                <a:close/>
+                <a:moveTo>
+                  <a:pt x="8" y="28"/>
+                </a:moveTo>
+                <a:lnTo>
+                  <a:pt x="10" y="28"/>
+                </a:lnTo>
+                <a:lnTo>
+                  <a:pt x="10" y="29"/>
+                </a:lnTo>
+                <a:lnTo>
+                  <a:pt x="8" y="29"/>
+                </a:lnTo>
+                <a:close/>
+                <a:moveTo>
+                  <a:pt x="12" y="28"/>
+                </a:moveTo>
+                <a:lnTo>
+                  <a:pt x="16" y="28"/>
+                </a:lnTo>
+                <a:lnTo>
+                  <a:pt x="16" y="29"/>
+                </a:lnTo>
+                <a:lnTo>
+                  <a:pt x="12" y="29"/>
+                </a:lnTo>
+                <a:close/>
+                <a:moveTo>
+                  <a:pt x="19" y="28"/>
+                </a:moveTo>
+                <a:lnTo>
+                  <a:pt x="21" y="28"/>
+                </a:lnTo>
+                <a:lnTo>
+                  <a:pt x="21" y="29"/>
+                </a:lnTo>
+                <a:lnTo>
+                  <a:pt x="19" y="29"/>
+                </a:lnTo>
+                <a:close/>
+                <a:moveTo>
+                  <a:pt x="22" y="28"/>
+                </a:moveTo>
+                <a:lnTo>
+                  <a:pt x="23" y="28"/>
+                </a:lnTo>
+                <a:lnTo>
+                  <a:pt x="23" y="29"/>
+                </a:lnTo>
+                <a:lnTo>
+                  <a:pt x="22" y="29"/>
+                </a:lnTo>
+                <a:close/>
+                <a:moveTo>
+                  <a:pt x="24" y="28"/>
+                </a:moveTo>
+                <a:lnTo>
+                  <a:pt x="26" y="28"/>
+                </a:lnTo>
+                <a:lnTo>
+                  <a:pt x="26" y="29"/>
+                </a:lnTo>
+                <a:lnTo>
+                  <a:pt x="24" y="29"/>
+                </a:lnTo>
+                <a:close/>
+              </a:path>
+            </a:pathLst>
+          </a:custGeom>
+          <a:solidFill>
+            <a:srgbClr val="16241F"/>
+          </a:solidFill>
+          <a:ln>
+            <a:noFill/>
+          </a:ln>
+          <a:effectLst/>
+        </p:spPr>
+        <p:style>
+          <a:lnRef idx="1">
+            <a:schemeClr val="accent1"/>
+          </a:lnRef>
+          <a:fillRef idx="3">
+            <a:schemeClr val="accent1"/>
+          </a:fillRef>
+          <a:effectRef idx="2">
+            <a:schemeClr val="accent1"/>
+          </a:effectRef>
+          <a:fontRef idx="minor">
+            <a:schemeClr val="lt1"/>
+          </a:fontRef>
+        </p:style>
+        <p:txBody>
+          <a:bodyPr rtlCol="0" anchor="ctr"/>
+          <a:lstStyle/>
+          <a:p>
+            <a:pPr algn="ctr"/>
+          </a:p>
+        </p:txBody>
+      </p:sp>
+      <p:sp>
+        <p:nvSpPr>
+          <p:cNvPr id="12" name="text"/>
+          <p:cNvSpPr txBox="1"/>
+          <p:nvPr/>
+        </p:nvSpPr>
+        <p:spPr>
+          <a:xfrm>
+            <a:off x="7802575" y="3474720"/>
+            <a:ext cx="1737360" cy="365760"/>
+          </a:xfrm>
+          <a:prstGeom prst="rect">
+            <a:avLst/>
+          </a:prstGeom>
+          <a:noFill/>
+        </p:spPr>
+        <p:txBody>
+          <a:bodyPr wrap="square" lIns="0" rIns="0" tIns="0" bIns="0" anchor="t">
+            <a:spAutoFit/>
+          </a:bodyPr>
+          <a:lstStyle/>
+          <a:p>
+            <a:pPr algn="ctr">
+              <a:lnSpc>
+                <a:spcPct val="100000"/>
+              </a:lnSpc>
+            </a:pPr>
+            <a:r>
+              <a:rPr sz="1500" b="0">
+                <a:solidFill>
+                  <a:srgbClr val="5B6F68"/>
+                </a:solidFill>
+                <a:latin typeface="Calibri"/>
+              </a:rPr>
+              <a:t>Kevin on LinkedIn</a:t>
+            </a:r>
+          </a:p>
+        </p:txBody>
+      </p:sp>
+      <p:sp>
+        <p:nvSpPr>
+          <p:cNvPr id="13" name="qr https://inferogenesis.com/"/>
+          <p:cNvSpPr/>
+          <p:nvPr/>
+        </p:nvSpPr>
+        <p:spPr>
+          <a:xfrm>
+            <a:off x="9905695" y="1600200"/>
+            <a:ext cx="1737360" cy="1737360"/>
+          </a:xfrm>
+          <a:custGeom>
+            <a:avLst/>
+            <a:gdLst/>
+            <a:ahLst/>
+            <a:cxnLst/>
+            <a:rect l="l" t="t" r="r" b="b"/>
+            <a:pathLst>
+              <a:path w="25" h="25">
+                <a:moveTo>
+                  <a:pt x="0" y="0"/>
+                </a:moveTo>
+                <a:lnTo>
+                  <a:pt x="7" y="0"/>
+                </a:lnTo>
+                <a:lnTo>
+                  <a:pt x="7" y="1"/>
+                </a:lnTo>
+                <a:lnTo>
+                  <a:pt x="0" y="1"/>
+                </a:lnTo>
+                <a:close/>
+                <a:moveTo>
+                  <a:pt x="8" y="0"/>
+                </a:moveTo>
+                <a:lnTo>
+                  <a:pt x="9" y="0"/>
+                </a:lnTo>
+                <a:lnTo>
+                  <a:pt x="9" y="1"/>
+                </a:lnTo>
+                <a:lnTo>
+                  <a:pt x="8" y="1"/>
+                </a:lnTo>
+                <a:close/>
+                <a:moveTo>
+                  <a:pt x="11" y="0"/>
+                </a:moveTo>
+                <a:lnTo>
+                  <a:pt x="12" y="0"/>
+                </a:lnTo>
+                <a:lnTo>
+                  <a:pt x="12" y="1"/>
+                </a:lnTo>
+                <a:lnTo>
+                  <a:pt x="11" y="1"/>
+                </a:lnTo>
+                <a:close/>
+                <a:moveTo>
+                  <a:pt x="13" y="0"/>
+                </a:moveTo>
+                <a:lnTo>
+                  <a:pt x="15" y="0"/>
+                </a:lnTo>
+                <a:lnTo>
+                  <a:pt x="15" y="1"/>
+                </a:lnTo>
+                <a:lnTo>
+                  <a:pt x="13" y="1"/>
+                </a:lnTo>
+                <a:close/>
+                <a:moveTo>
+                  <a:pt x="18" y="0"/>
+                </a:moveTo>
+                <a:lnTo>
+                  <a:pt x="25" y="0"/>
+                </a:lnTo>
+                <a:lnTo>
+                  <a:pt x="25" y="1"/>
+                </a:lnTo>
+                <a:lnTo>
+                  <a:pt x="18" y="1"/>
+                </a:lnTo>
+                <a:close/>
+                <a:moveTo>
+                  <a:pt x="0" y="1"/>
+                </a:moveTo>
+                <a:lnTo>
+                  <a:pt x="1" y="1"/>
+                </a:lnTo>
+                <a:lnTo>
+                  <a:pt x="1" y="2"/>
+                </a:lnTo>
+                <a:lnTo>
+                  <a:pt x="0" y="2"/>
+                </a:lnTo>
+                <a:close/>
+                <a:moveTo>
+                  <a:pt x="6" y="1"/>
+                </a:moveTo>
+                <a:lnTo>
+                  <a:pt x="7" y="1"/>
+                </a:lnTo>
+                <a:lnTo>
+                  <a:pt x="7" y="2"/>
+                </a:lnTo>
+                <a:lnTo>
+                  <a:pt x="6" y="2"/>
+                </a:lnTo>
+                <a:close/>
+                <a:moveTo>
+                  <a:pt x="9" y="1"/>
+                </a:moveTo>
+                <a:lnTo>
+                  <a:pt x="10" y="1"/>
+                </a:lnTo>
+                <a:lnTo>
+                  <a:pt x="10" y="2"/>
+                </a:lnTo>
+                <a:lnTo>
+                  <a:pt x="9" y="2"/>
+                </a:lnTo>
+                <a:close/>
+                <a:moveTo>
+                  <a:pt x="11" y="1"/>
+                </a:moveTo>
+                <a:lnTo>
+                  <a:pt x="12" y="1"/>
+                </a:lnTo>
+                <a:lnTo>
+                  <a:pt x="12" y="2"/>
+                </a:lnTo>
+                <a:lnTo>
+                  <a:pt x="11" y="2"/>
+                </a:lnTo>
+                <a:close/>
+                <a:moveTo>
+                  <a:pt x="14" y="1"/>
+                </a:moveTo>
+                <a:lnTo>
+                  <a:pt x="15" y="1"/>
+                </a:lnTo>
+                <a:lnTo>
+                  <a:pt x="15" y="2"/>
+                </a:lnTo>
+                <a:lnTo>
+                  <a:pt x="14" y="2"/>
+                </a:lnTo>
+                <a:close/>
+                <a:moveTo>
+                  <a:pt x="18" y="1"/>
+                </a:moveTo>
+                <a:lnTo>
+                  <a:pt x="19" y="1"/>
+                </a:lnTo>
+                <a:lnTo>
+                  <a:pt x="19" y="2"/>
+                </a:lnTo>
+                <a:lnTo>
+                  <a:pt x="18" y="2"/>
+                </a:lnTo>
+                <a:close/>
+                <a:moveTo>
+                  <a:pt x="24" y="1"/>
+                </a:moveTo>
+                <a:lnTo>
+                  <a:pt x="25" y="1"/>
+                </a:lnTo>
+                <a:lnTo>
+                  <a:pt x="25" y="2"/>
+                </a:lnTo>
+                <a:lnTo>
+                  <a:pt x="24" y="2"/>
+                </a:lnTo>
+                <a:close/>
+                <a:moveTo>
+                  <a:pt x="0" y="2"/>
+                </a:moveTo>
+                <a:lnTo>
+                  <a:pt x="1" y="2"/>
+                </a:lnTo>
+                <a:lnTo>
+                  <a:pt x="1" y="3"/>
+                </a:lnTo>
+                <a:lnTo>
+                  <a:pt x="0" y="3"/>
+                </a:lnTo>
+                <a:close/>
+                <a:moveTo>
+                  <a:pt x="2" y="2"/>
+                </a:moveTo>
+                <a:lnTo>
+                  <a:pt x="5" y="2"/>
+                </a:lnTo>
+                <a:lnTo>
+                  <a:pt x="5" y="3"/>
+                </a:lnTo>
+                <a:lnTo>
+                  <a:pt x="2" y="3"/>
+                </a:lnTo>
+                <a:close/>
+                <a:moveTo>
+                  <a:pt x="6" y="2"/>
+                </a:moveTo>
+                <a:lnTo>
+                  <a:pt x="7" y="2"/>
+                </a:lnTo>
+                <a:lnTo>
+                  <a:pt x="7" y="3"/>
+                </a:lnTo>
+                <a:lnTo>
+                  <a:pt x="6" y="3"/>
+                </a:lnTo>
+                <a:close/>
+                <a:moveTo>
+                  <a:pt x="8" y="2"/>
+                </a:moveTo>
+                <a:lnTo>
+                  <a:pt x="12" y="2"/>
+                </a:lnTo>
+                <a:lnTo>
+                  <a:pt x="12" y="3"/>
+                </a:lnTo>
+                <a:lnTo>
+                  <a:pt x="8" y="3"/>
+                </a:lnTo>
+                <a:close/>
+                <a:moveTo>
+                  <a:pt x="13" y="2"/>
+                </a:moveTo>
+                <a:lnTo>
+                  <a:pt x="14" y="2"/>
+                </a:lnTo>
+                <a:lnTo>
+                  <a:pt x="14" y="3"/>
+                </a:lnTo>
+                <a:lnTo>
+                  <a:pt x="13" y="3"/>
+                </a:lnTo>
+                <a:close/>
+                <a:moveTo>
+                  <a:pt x="18" y="2"/>
+                </a:moveTo>
+                <a:lnTo>
+                  <a:pt x="19" y="2"/>
+                </a:lnTo>
+                <a:lnTo>
+                  <a:pt x="19" y="3"/>
+                </a:lnTo>
+                <a:lnTo>
+                  <a:pt x="18" y="3"/>
+                </a:lnTo>
+                <a:close/>
+                <a:moveTo>
+                  <a:pt x="20" y="2"/>
+                </a:moveTo>
+                <a:lnTo>
+                  <a:pt x="23" y="2"/>
+                </a:lnTo>
+                <a:lnTo>
+                  <a:pt x="23" y="3"/>
+                </a:lnTo>
+                <a:lnTo>
+                  <a:pt x="20" y="3"/>
+                </a:lnTo>
+                <a:close/>
+                <a:moveTo>
+                  <a:pt x="24" y="2"/>
+                </a:moveTo>
+                <a:lnTo>
+                  <a:pt x="25" y="2"/>
+                </a:lnTo>
+                <a:lnTo>
+                  <a:pt x="25" y="3"/>
+                </a:lnTo>
+                <a:lnTo>
+                  <a:pt x="24" y="3"/>
+                </a:lnTo>
+                <a:close/>
+                <a:moveTo>
+                  <a:pt x="0" y="3"/>
+                </a:moveTo>
+                <a:lnTo>
+                  <a:pt x="1" y="3"/>
+                </a:lnTo>
+                <a:lnTo>
+                  <a:pt x="1" y="4"/>
+                </a:lnTo>
+                <a:lnTo>
+                  <a:pt x="0" y="4"/>
+                </a:lnTo>
+                <a:close/>
+                <a:moveTo>
+                  <a:pt x="2" y="3"/>
+                </a:moveTo>
+                <a:lnTo>
+                  <a:pt x="5" y="3"/>
+                </a:lnTo>
+                <a:lnTo>
+                  <a:pt x="5" y="4"/>
+                </a:lnTo>
+                <a:lnTo>
+                  <a:pt x="2" y="4"/>
+                </a:lnTo>
+                <a:close/>
+                <a:moveTo>
+                  <a:pt x="6" y="3"/>
+                </a:moveTo>
+                <a:lnTo>
+                  <a:pt x="7" y="3"/>
+                </a:lnTo>
+                <a:lnTo>
+                  <a:pt x="7" y="4"/>
+                </a:lnTo>
+                <a:lnTo>
+                  <a:pt x="6" y="4"/>
+                </a:lnTo>
+                <a:close/>
+                <a:moveTo>
+                  <a:pt x="10" y="3"/>
+                </a:moveTo>
+                <a:lnTo>
+                  <a:pt x="11" y="3"/>
+                </a:lnTo>
+                <a:lnTo>
+                  <a:pt x="11" y="4"/>
+                </a:lnTo>
+                <a:lnTo>
+                  <a:pt x="10" y="4"/>
+                </a:lnTo>
+                <a:close/>
+                <a:moveTo>
+                  <a:pt x="13" y="3"/>
+                </a:moveTo>
+                <a:lnTo>
+                  <a:pt x="16" y="3"/>
+                </a:lnTo>
+                <a:lnTo>
+                  <a:pt x="16" y="4"/>
+                </a:lnTo>
+                <a:lnTo>
+                  <a:pt x="13" y="4"/>
+                </a:lnTo>
+                <a:close/>
+                <a:moveTo>
+                  <a:pt x="18" y="3"/>
+                </a:moveTo>
+                <a:lnTo>
+                  <a:pt x="19" y="3"/>
+                </a:lnTo>
+                <a:lnTo>
+                  <a:pt x="19" y="4"/>
+                </a:lnTo>
+                <a:lnTo>
+                  <a:pt x="18" y="4"/>
+                </a:lnTo>
+                <a:close/>
+                <a:moveTo>
+                  <a:pt x="20" y="3"/>
+                </a:moveTo>
+                <a:lnTo>
+                  <a:pt x="23" y="3"/>
+                </a:lnTo>
+                <a:lnTo>
+                  <a:pt x="23" y="4"/>
+                </a:lnTo>
+                <a:lnTo>
+                  <a:pt x="20" y="4"/>
+                </a:lnTo>
+                <a:close/>
+                <a:moveTo>
+                  <a:pt x="24" y="3"/>
+                </a:moveTo>
+                <a:lnTo>
+                  <a:pt x="25" y="3"/>
+                </a:lnTo>
+                <a:lnTo>
+                  <a:pt x="25" y="4"/>
+                </a:lnTo>
+                <a:lnTo>
+                  <a:pt x="24" y="4"/>
+                </a:lnTo>
+                <a:close/>
+                <a:moveTo>
+                  <a:pt x="0" y="4"/>
+                </a:moveTo>
+                <a:lnTo>
+                  <a:pt x="1" y="4"/>
+                </a:lnTo>
+                <a:lnTo>
+                  <a:pt x="1" y="5"/>
+                </a:lnTo>
+                <a:lnTo>
+                  <a:pt x="0" y="5"/>
+                </a:lnTo>
+                <a:close/>
+                <a:moveTo>
+                  <a:pt x="2" y="4"/>
+                </a:moveTo>
+                <a:lnTo>
+                  <a:pt x="5" y="4"/>
+                </a:lnTo>
+                <a:lnTo>
+                  <a:pt x="5" y="5"/>
+                </a:lnTo>
+                <a:lnTo>
+                  <a:pt x="2" y="5"/>
+                </a:lnTo>
+                <a:close/>
+                <a:moveTo>
+                  <a:pt x="6" y="4"/>
+                </a:moveTo>
+                <a:lnTo>
+                  <a:pt x="7" y="4"/>
+                </a:lnTo>
+                <a:lnTo>
+                  <a:pt x="7" y="5"/>
+                </a:lnTo>
+                <a:lnTo>
+                  <a:pt x="6" y="5"/>
+                </a:lnTo>
+                <a:close/>
+                <a:moveTo>
+                  <a:pt x="12" y="4"/>
+                </a:moveTo>
+                <a:lnTo>
+                  <a:pt x="14" y="4"/>
+                </a:lnTo>
+                <a:lnTo>
+                  <a:pt x="14" y="5"/>
+                </a:lnTo>
+                <a:lnTo>
+                  <a:pt x="12" y="5"/>
+                </a:lnTo>
+                <a:close/>
+                <a:moveTo>
+                  <a:pt x="18" y="4"/>
+                </a:moveTo>
+                <a:lnTo>
+                  <a:pt x="19" y="4"/>
+                </a:lnTo>
+                <a:lnTo>
+                  <a:pt x="19" y="5"/>
+                </a:lnTo>
+                <a:lnTo>
+                  <a:pt x="18" y="5"/>
+                </a:lnTo>
+                <a:close/>
+                <a:moveTo>
+                  <a:pt x="20" y="4"/>
+                </a:moveTo>
+                <a:lnTo>
+                  <a:pt x="23" y="4"/>
+                </a:lnTo>
+                <a:lnTo>
+                  <a:pt x="23" y="5"/>
+                </a:lnTo>
+                <a:lnTo>
+                  <a:pt x="20" y="5"/>
+                </a:lnTo>
+                <a:close/>
+                <a:moveTo>
+                  <a:pt x="24" y="4"/>
+                </a:moveTo>
+                <a:lnTo>
+                  <a:pt x="25" y="4"/>
+                </a:lnTo>
+                <a:lnTo>
+                  <a:pt x="25" y="5"/>
+                </a:lnTo>
+                <a:lnTo>
+                  <a:pt x="24" y="5"/>
+                </a:lnTo>
+                <a:close/>
+                <a:moveTo>
+                  <a:pt x="0" y="5"/>
+                </a:moveTo>
+                <a:lnTo>
+                  <a:pt x="1" y="5"/>
+                </a:lnTo>
+                <a:lnTo>
+                  <a:pt x="1" y="6"/>
+                </a:lnTo>
+                <a:lnTo>
+                  <a:pt x="0" y="6"/>
+                </a:lnTo>
+                <a:close/>
+                <a:moveTo>
+                  <a:pt x="6" y="5"/>
+                </a:moveTo>
+                <a:lnTo>
+                  <a:pt x="7" y="5"/>
+                </a:lnTo>
+                <a:lnTo>
+                  <a:pt x="7" y="6"/>
+                </a:lnTo>
+                <a:lnTo>
+                  <a:pt x="6" y="6"/>
+                </a:lnTo>
+                <a:close/>
+                <a:moveTo>
+                  <a:pt x="8" y="5"/>
+                </a:moveTo>
+                <a:lnTo>
+                  <a:pt x="10" y="5"/>
+                </a:lnTo>
+                <a:lnTo>
+                  <a:pt x="10" y="6"/>
+                </a:lnTo>
+                <a:lnTo>
+                  <a:pt x="8" y="6"/>
+                </a:lnTo>
+                <a:close/>
+                <a:moveTo>
+                  <a:pt x="13" y="5"/>
+                </a:moveTo>
+                <a:lnTo>
+                  <a:pt x="14" y="5"/>
+                </a:lnTo>
+                <a:lnTo>
+                  <a:pt x="14" y="6"/>
+                </a:lnTo>
+                <a:lnTo>
+                  <a:pt x="13" y="6"/>
+                </a:lnTo>
+                <a:close/>
+                <a:moveTo>
+                  <a:pt x="16" y="5"/>
+                </a:moveTo>
+                <a:lnTo>
+                  <a:pt x="17" y="5"/>
+                </a:lnTo>
+                <a:lnTo>
+                  <a:pt x="17" y="6"/>
+                </a:lnTo>
+                <a:lnTo>
+                  <a:pt x="16" y="6"/>
+                </a:lnTo>
+                <a:close/>
+                <a:moveTo>
+                  <a:pt x="18" y="5"/>
+                </a:moveTo>
+                <a:lnTo>
+                  <a:pt x="19" y="5"/>
+                </a:lnTo>
+                <a:lnTo>
+                  <a:pt x="19" y="6"/>
+                </a:lnTo>
+                <a:lnTo>
+                  <a:pt x="18" y="6"/>
+                </a:lnTo>
+                <a:close/>
+                <a:moveTo>
+                  <a:pt x="24" y="5"/>
+                </a:moveTo>
+                <a:lnTo>
+                  <a:pt x="25" y="5"/>
+                </a:lnTo>
+                <a:lnTo>
+                  <a:pt x="25" y="6"/>
+                </a:lnTo>
+                <a:lnTo>
+                  <a:pt x="24" y="6"/>
+                </a:lnTo>
+                <a:close/>
+                <a:moveTo>
+                  <a:pt x="0" y="6"/>
+                </a:moveTo>
+                <a:lnTo>
+                  <a:pt x="7" y="6"/>
+                </a:lnTo>
+                <a:lnTo>
+                  <a:pt x="7" y="7"/>
+                </a:lnTo>
+                <a:lnTo>
+                  <a:pt x="0" y="7"/>
+                </a:lnTo>
+                <a:close/>
+                <a:moveTo>
+                  <a:pt x="8" y="6"/>
+                </a:moveTo>
+                <a:lnTo>
+                  <a:pt x="9" y="6"/>
+                </a:lnTo>
+                <a:lnTo>
+                  <a:pt x="9" y="7"/>
+                </a:lnTo>
+                <a:lnTo>
+                  <a:pt x="8" y="7"/>
+                </a:lnTo>
+                <a:close/>
+                <a:moveTo>
+                  <a:pt x="10" y="6"/>
+                </a:moveTo>
+                <a:lnTo>
+                  <a:pt x="11" y="6"/>
+                </a:lnTo>
+                <a:lnTo>
+                  <a:pt x="11" y="7"/>
+                </a:lnTo>
+                <a:lnTo>
+                  <a:pt x="10" y="7"/>
+                </a:lnTo>
+                <a:close/>
+                <a:moveTo>
+                  <a:pt x="12" y="6"/>
+                </a:moveTo>
+                <a:lnTo>
+                  <a:pt x="13" y="6"/>
+                </a:lnTo>
+                <a:lnTo>
+                  <a:pt x="13" y="7"/>
+                </a:lnTo>
+                <a:lnTo>
+                  <a:pt x="12" y="7"/>
+                </a:lnTo>
+                <a:close/>
+                <a:moveTo>
+                  <a:pt x="14" y="6"/>
+                </a:moveTo>
+                <a:lnTo>
+                  <a:pt x="15" y="6"/>
+                </a:lnTo>
+                <a:lnTo>
+                  <a:pt x="15" y="7"/>
+                </a:lnTo>
+                <a:lnTo>
+                  <a:pt x="14" y="7"/>
+                </a:lnTo>
+                <a:close/>
+                <a:moveTo>
+                  <a:pt x="16" y="6"/>
+                </a:moveTo>
+                <a:lnTo>
+                  <a:pt x="17" y="6"/>
+                </a:lnTo>
+                <a:lnTo>
+                  <a:pt x="17" y="7"/>
+                </a:lnTo>
+                <a:lnTo>
+                  <a:pt x="16" y="7"/>
+                </a:lnTo>
+                <a:close/>
+                <a:moveTo>
+                  <a:pt x="18" y="6"/>
+                </a:moveTo>
+                <a:lnTo>
+                  <a:pt x="25" y="6"/>
+                </a:lnTo>
+                <a:lnTo>
+                  <a:pt x="25" y="7"/>
+                </a:lnTo>
+                <a:lnTo>
+                  <a:pt x="18" y="7"/>
+                </a:lnTo>
+                <a:close/>
+                <a:moveTo>
+                  <a:pt x="9" y="7"/>
+                </a:moveTo>
+                <a:lnTo>
+                  <a:pt x="11" y="7"/>
+                </a:lnTo>
+                <a:lnTo>
+                  <a:pt x="11" y="8"/>
+                </a:lnTo>
+                <a:lnTo>
+                  <a:pt x="9" y="8"/>
+                </a:lnTo>
+                <a:close/>
+                <a:moveTo>
+                  <a:pt x="14" y="7"/>
+                </a:moveTo>
+                <a:lnTo>
+                  <a:pt x="15" y="7"/>
+                </a:lnTo>
+                <a:lnTo>
+                  <a:pt x="15" y="8"/>
+                </a:lnTo>
+                <a:lnTo>
+                  <a:pt x="14" y="8"/>
+                </a:lnTo>
+                <a:close/>
+                <a:moveTo>
+                  <a:pt x="16" y="7"/>
+                </a:moveTo>
+                <a:lnTo>
+                  <a:pt x="17" y="7"/>
+                </a:lnTo>
+                <a:lnTo>
+                  <a:pt x="17" y="8"/>
+                </a:lnTo>
+                <a:lnTo>
+                  <a:pt x="16" y="8"/>
+                </a:lnTo>
+                <a:close/>
+                <a:moveTo>
+                  <a:pt x="0" y="8"/>
+                </a:moveTo>
+                <a:lnTo>
+                  <a:pt x="1" y="8"/>
+                </a:lnTo>
+                <a:lnTo>
+                  <a:pt x="1" y="9"/>
+                </a:lnTo>
+                <a:lnTo>
+                  <a:pt x="0" y="9"/>
+                </a:lnTo>
+                <a:close/>
+                <a:moveTo>
+                  <a:pt x="2" y="8"/>
+                </a:moveTo>
+                <a:lnTo>
+                  <a:pt x="3" y="8"/>
+                </a:lnTo>
+                <a:lnTo>
+                  <a:pt x="3" y="9"/>
+                </a:lnTo>
+                <a:lnTo>
+                  <a:pt x="2" y="9"/>
+                </a:lnTo>
+                <a:close/>
+                <a:moveTo>
+                  <a:pt x="6" y="8"/>
+                </a:moveTo>
+                <a:lnTo>
+                  <a:pt x="8" y="8"/>
+                </a:lnTo>
+                <a:lnTo>
+                  <a:pt x="8" y="9"/>
+                </a:lnTo>
+                <a:lnTo>
+                  <a:pt x="6" y="9"/>
+                </a:lnTo>
+                <a:close/>
+                <a:moveTo>
+                  <a:pt x="11" y="8"/>
+                </a:moveTo>
+                <a:lnTo>
+                  <a:pt x="12" y="8"/>
+                </a:lnTo>
+                <a:lnTo>
+                  <a:pt x="12" y="9"/>
+                </a:lnTo>
+                <a:lnTo>
+                  <a:pt x="11" y="9"/>
+                </a:lnTo>
+                <a:close/>
+                <a:moveTo>
+                  <a:pt x="15" y="8"/>
+                </a:moveTo>
+                <a:lnTo>
+                  <a:pt x="17" y="8"/>
+                </a:lnTo>
+                <a:lnTo>
+                  <a:pt x="17" y="9"/>
+                </a:lnTo>
+                <a:lnTo>
+                  <a:pt x="15" y="9"/>
+                </a:lnTo>
+                <a:close/>
+                <a:moveTo>
+                  <a:pt x="19" y="8"/>
+                </a:moveTo>
+                <a:lnTo>
+                  <a:pt x="20" y="8"/>
+                </a:lnTo>
+                <a:lnTo>
+                  <a:pt x="20" y="9"/>
+                </a:lnTo>
+                <a:lnTo>
+                  <a:pt x="19" y="9"/>
+                </a:lnTo>
+                <a:close/>
+                <a:moveTo>
+                  <a:pt x="22" y="8"/>
+                </a:moveTo>
+                <a:lnTo>
+                  <a:pt x="23" y="8"/>
+                </a:lnTo>
+                <a:lnTo>
+                  <a:pt x="23" y="9"/>
+                </a:lnTo>
+                <a:lnTo>
+                  <a:pt x="22" y="9"/>
+                </a:lnTo>
+                <a:close/>
+                <a:moveTo>
+                  <a:pt x="24" y="8"/>
+                </a:moveTo>
+                <a:lnTo>
+                  <a:pt x="25" y="8"/>
+                </a:lnTo>
+                <a:lnTo>
+                  <a:pt x="25" y="9"/>
+                </a:lnTo>
+                <a:lnTo>
+                  <a:pt x="24" y="9"/>
+                </a:lnTo>
+                <a:close/>
+                <a:moveTo>
+                  <a:pt x="0" y="9"/>
+                </a:moveTo>
+                <a:lnTo>
+                  <a:pt x="2" y="9"/>
+                </a:lnTo>
+                <a:lnTo>
+                  <a:pt x="2" y="10"/>
+                </a:lnTo>
+                <a:lnTo>
+                  <a:pt x="0" y="10"/>
+                </a:lnTo>
+                <a:close/>
+                <a:moveTo>
+                  <a:pt x="4" y="9"/>
+                </a:moveTo>
+                <a:lnTo>
+                  <a:pt x="6" y="9"/>
+                </a:lnTo>
+                <a:lnTo>
+                  <a:pt x="6" y="10"/>
+                </a:lnTo>
+                <a:lnTo>
+                  <a:pt x="4" y="10"/>
+                </a:lnTo>
+                <a:close/>
+                <a:moveTo>
+                  <a:pt x="7" y="9"/>
+                </a:moveTo>
+                <a:lnTo>
+                  <a:pt x="8" y="9"/>
+                </a:lnTo>
+                <a:lnTo>
+                  <a:pt x="8" y="10"/>
+                </a:lnTo>
+                <a:lnTo>
+                  <a:pt x="7" y="10"/>
+                </a:lnTo>
+                <a:close/>
+                <a:moveTo>
+                  <a:pt x="9" y="9"/>
+                </a:moveTo>
+                <a:lnTo>
+                  <a:pt x="10" y="9"/>
+                </a:lnTo>
+                <a:lnTo>
+                  <a:pt x="10" y="10"/>
+                </a:lnTo>
+                <a:lnTo>
+                  <a:pt x="9" y="10"/>
+                </a:lnTo>
+                <a:close/>
+                <a:moveTo>
+                  <a:pt x="11" y="9"/>
+                </a:moveTo>
+                <a:lnTo>
+                  <a:pt x="12" y="9"/>
+                </a:lnTo>
+                <a:lnTo>
+                  <a:pt x="12" y="10"/>
+                </a:lnTo>
+                <a:lnTo>
+                  <a:pt x="11" y="10"/>
+                </a:lnTo>
+                <a:close/>
+                <a:moveTo>
+                  <a:pt x="13" y="9"/>
+                </a:moveTo>
+                <a:lnTo>
+                  <a:pt x="14" y="9"/>
+                </a:lnTo>
+                <a:lnTo>
+                  <a:pt x="14" y="10"/>
+                </a:lnTo>
+                <a:lnTo>
+                  <a:pt x="13" y="10"/>
+                </a:lnTo>
+                <a:close/>
+                <a:moveTo>
+                  <a:pt x="15" y="9"/>
+                </a:moveTo>
+                <a:lnTo>
+                  <a:pt x="17" y="9"/>
+                </a:lnTo>
+                <a:lnTo>
+                  <a:pt x="17" y="10"/>
+                </a:lnTo>
+                <a:lnTo>
+                  <a:pt x="15" y="10"/>
+                </a:lnTo>
+                <a:close/>
+                <a:moveTo>
+                  <a:pt x="18" y="9"/>
+                </a:moveTo>
+                <a:lnTo>
+                  <a:pt x="20" y="9"/>
+                </a:lnTo>
+                <a:lnTo>
+                  <a:pt x="20" y="10"/>
+                </a:lnTo>
+                <a:lnTo>
+                  <a:pt x="18" y="10"/>
+                </a:lnTo>
+                <a:close/>
+                <a:moveTo>
+                  <a:pt x="21" y="9"/>
+                </a:moveTo>
+                <a:lnTo>
+                  <a:pt x="22" y="9"/>
+                </a:lnTo>
+                <a:lnTo>
+                  <a:pt x="22" y="10"/>
+                </a:lnTo>
+                <a:lnTo>
+                  <a:pt x="21" y="10"/>
+                </a:lnTo>
+                <a:close/>
+                <a:moveTo>
+                  <a:pt x="23" y="9"/>
+                </a:moveTo>
+                <a:lnTo>
+                  <a:pt x="25" y="9"/>
+                </a:lnTo>
+                <a:lnTo>
+                  <a:pt x="25" y="10"/>
+                </a:lnTo>
+                <a:lnTo>
+                  <a:pt x="23" y="10"/>
+                </a:lnTo>
+                <a:close/>
+                <a:moveTo>
+                  <a:pt x="0" y="10"/>
+                </a:moveTo>
+                <a:lnTo>
+                  <a:pt x="1" y="10"/>
+                </a:lnTo>
+                <a:lnTo>
+                  <a:pt x="1" y="11"/>
+                </a:lnTo>
+                <a:lnTo>
+                  <a:pt x="0" y="11"/>
+                </a:lnTo>
+                <a:close/>
+                <a:moveTo>
+                  <a:pt x="5" y="10"/>
+                </a:moveTo>
+                <a:lnTo>
+                  <a:pt x="7" y="10"/>
+                </a:lnTo>
+                <a:lnTo>
+                  <a:pt x="7" y="11"/>
+                </a:lnTo>
+                <a:lnTo>
+                  <a:pt x="5" y="11"/>
+                </a:lnTo>
+                <a:close/>
+                <a:moveTo>
+                  <a:pt x="11" y="10"/>
+                </a:moveTo>
+                <a:lnTo>
+                  <a:pt x="16" y="10"/>
+                </a:lnTo>
+                <a:lnTo>
+                  <a:pt x="16" y="11"/>
+                </a:lnTo>
+                <a:lnTo>
+                  <a:pt x="11" y="11"/>
+                </a:lnTo>
+                <a:close/>
+                <a:moveTo>
+                  <a:pt x="20" y="10"/>
+                </a:moveTo>
+                <a:lnTo>
+                  <a:pt x="23" y="10"/>
+                </a:lnTo>
+                <a:lnTo>
+                  <a:pt x="23" y="11"/>
+                </a:lnTo>
+                <a:lnTo>
+                  <a:pt x="20" y="11"/>
+                </a:lnTo>
+                <a:close/>
+                <a:moveTo>
+                  <a:pt x="24" y="10"/>
+                </a:moveTo>
+                <a:lnTo>
+                  <a:pt x="25" y="10"/>
+                </a:lnTo>
+                <a:lnTo>
+                  <a:pt x="25" y="11"/>
+                </a:lnTo>
+                <a:lnTo>
+                  <a:pt x="24" y="11"/>
+                </a:lnTo>
+                <a:close/>
+                <a:moveTo>
+                  <a:pt x="1" y="11"/>
+                </a:moveTo>
+                <a:lnTo>
+                  <a:pt x="3" y="11"/>
+                </a:lnTo>
+                <a:lnTo>
+                  <a:pt x="3" y="12"/>
+                </a:lnTo>
+                <a:lnTo>
+                  <a:pt x="1" y="12"/>
+                </a:lnTo>
+                <a:close/>
+                <a:moveTo>
+                  <a:pt x="4" y="11"/>
+                </a:moveTo>
+                <a:lnTo>
+                  <a:pt x="5" y="11"/>
+                </a:lnTo>
+                <a:lnTo>
+                  <a:pt x="5" y="12"/>
+                </a:lnTo>
+                <a:lnTo>
+                  <a:pt x="4" y="12"/>
+                </a:lnTo>
+                <a:close/>
+                <a:moveTo>
+                  <a:pt x="7" y="11"/>
+                </a:moveTo>
+                <a:lnTo>
+                  <a:pt x="9" y="11"/>
+                </a:lnTo>
+                <a:lnTo>
+                  <a:pt x="9" y="12"/>
+                </a:lnTo>
+                <a:lnTo>
+                  <a:pt x="7" y="12"/>
+                </a:lnTo>
+                <a:close/>
+                <a:moveTo>
+                  <a:pt x="10" y="11"/>
+                </a:moveTo>
+                <a:lnTo>
+                  <a:pt x="12" y="11"/>
+                </a:lnTo>
+                <a:lnTo>
+                  <a:pt x="12" y="12"/>
+                </a:lnTo>
+                <a:lnTo>
+                  <a:pt x="10" y="12"/>
+                </a:lnTo>
+                <a:close/>
+                <a:moveTo>
+                  <a:pt x="14" y="11"/>
+                </a:moveTo>
+                <a:lnTo>
+                  <a:pt x="17" y="11"/>
+                </a:lnTo>
+                <a:lnTo>
+                  <a:pt x="17" y="12"/>
+                </a:lnTo>
+                <a:lnTo>
+                  <a:pt x="14" y="12"/>
+                </a:lnTo>
+                <a:close/>
+                <a:moveTo>
+                  <a:pt x="18" y="11"/>
+                </a:moveTo>
+                <a:lnTo>
+                  <a:pt x="19" y="11"/>
+                </a:lnTo>
+                <a:lnTo>
+                  <a:pt x="19" y="12"/>
+                </a:lnTo>
+                <a:lnTo>
+                  <a:pt x="18" y="12"/>
+                </a:lnTo>
+                <a:close/>
+                <a:moveTo>
+                  <a:pt x="20" y="11"/>
+                </a:moveTo>
+                <a:lnTo>
+                  <a:pt x="22" y="11"/>
+                </a:lnTo>
+                <a:lnTo>
+                  <a:pt x="22" y="12"/>
+                </a:lnTo>
+                <a:lnTo>
+                  <a:pt x="20" y="12"/>
+                </a:lnTo>
+                <a:close/>
+                <a:moveTo>
+                  <a:pt x="1" y="12"/>
+                </a:moveTo>
+                <a:lnTo>
+                  <a:pt x="2" y="12"/>
+                </a:lnTo>
+                <a:lnTo>
+                  <a:pt x="2" y="13"/>
+                </a:lnTo>
+                <a:lnTo>
+                  <a:pt x="1" y="13"/>
+                </a:lnTo>
+                <a:close/>
+                <a:moveTo>
+                  <a:pt x="3" y="12"/>
+                </a:moveTo>
+                <a:lnTo>
+                  <a:pt x="4" y="12"/>
+                </a:lnTo>
+                <a:lnTo>
+                  <a:pt x="4" y="13"/>
+                </a:lnTo>
+                <a:lnTo>
+                  <a:pt x="3" y="13"/>
+                </a:lnTo>
+                <a:close/>
+                <a:moveTo>
+                  <a:pt x="6" y="12"/>
+                </a:moveTo>
+                <a:lnTo>
+                  <a:pt x="13" y="12"/>
+                </a:lnTo>
+                <a:lnTo>
+                  <a:pt x="13" y="13"/>
+                </a:lnTo>
+                <a:lnTo>
+                  <a:pt x="6" y="13"/>
+                </a:lnTo>
+                <a:close/>
+                <a:moveTo>
+                  <a:pt x="15" y="12"/>
+                </a:moveTo>
+                <a:lnTo>
+                  <a:pt x="17" y="12"/>
+                </a:lnTo>
+                <a:lnTo>
+                  <a:pt x="17" y="13"/>
+                </a:lnTo>
+                <a:lnTo>
+                  <a:pt x="15" y="13"/>
+                </a:lnTo>
+                <a:close/>
+                <a:moveTo>
+                  <a:pt x="18" y="12"/>
+                </a:moveTo>
+                <a:lnTo>
+                  <a:pt x="20" y="12"/>
+                </a:lnTo>
+                <a:lnTo>
+                  <a:pt x="20" y="13"/>
+                </a:lnTo>
+                <a:lnTo>
+                  <a:pt x="18" y="13"/>
+                </a:lnTo>
+                <a:close/>
+                <a:moveTo>
+                  <a:pt x="24" y="12"/>
+                </a:moveTo>
+                <a:lnTo>
+                  <a:pt x="25" y="12"/>
+                </a:lnTo>
+                <a:lnTo>
+                  <a:pt x="25" y="13"/>
+                </a:lnTo>
+                <a:lnTo>
+                  <a:pt x="24" y="13"/>
+                </a:lnTo>
+                <a:close/>
+                <a:moveTo>
+                  <a:pt x="1" y="13"/>
+                </a:moveTo>
+                <a:lnTo>
+                  <a:pt x="2" y="13"/>
+                </a:lnTo>
+                <a:lnTo>
+                  <a:pt x="2" y="14"/>
+                </a:lnTo>
+                <a:lnTo>
+                  <a:pt x="1" y="14"/>
+                </a:lnTo>
+                <a:close/>
+                <a:moveTo>
+                  <a:pt x="3" y="13"/>
+                </a:moveTo>
+                <a:lnTo>
+                  <a:pt x="4" y="13"/>
+                </a:lnTo>
+                <a:lnTo>
+                  <a:pt x="4" y="14"/>
+                </a:lnTo>
+                <a:lnTo>
+                  <a:pt x="3" y="14"/>
+                </a:lnTo>
+                <a:close/>
+                <a:moveTo>
+                  <a:pt x="5" y="13"/>
+                </a:moveTo>
+                <a:lnTo>
+                  <a:pt x="6" y="13"/>
+                </a:lnTo>
+                <a:lnTo>
+                  <a:pt x="6" y="14"/>
+                </a:lnTo>
+                <a:lnTo>
+                  <a:pt x="5" y="14"/>
+                </a:lnTo>
+                <a:close/>
+                <a:moveTo>
+                  <a:pt x="7" y="13"/>
+                </a:moveTo>
+                <a:lnTo>
+                  <a:pt x="8" y="13"/>
+                </a:lnTo>
+                <a:lnTo>
+                  <a:pt x="8" y="14"/>
+                </a:lnTo>
+                <a:lnTo>
+                  <a:pt x="7" y="14"/>
+                </a:lnTo>
+                <a:close/>
+                <a:moveTo>
+                  <a:pt x="14" y="13"/>
+                </a:moveTo>
+                <a:lnTo>
+                  <a:pt x="17" y="13"/>
+                </a:lnTo>
+                <a:lnTo>
+                  <a:pt x="17" y="14"/>
+                </a:lnTo>
+                <a:lnTo>
+                  <a:pt x="14" y="14"/>
+                </a:lnTo>
+                <a:close/>
+                <a:moveTo>
+                  <a:pt x="18" y="13"/>
+                </a:moveTo>
+                <a:lnTo>
+                  <a:pt x="20" y="13"/>
+                </a:lnTo>
+                <a:lnTo>
+                  <a:pt x="20" y="14"/>
+                </a:lnTo>
+                <a:lnTo>
+                  <a:pt x="18" y="14"/>
+                </a:lnTo>
+                <a:close/>
+                <a:moveTo>
+                  <a:pt x="23" y="13"/>
+                </a:moveTo>
+                <a:lnTo>
+                  <a:pt x="25" y="13"/>
+                </a:lnTo>
+                <a:lnTo>
+                  <a:pt x="25" y="14"/>
+                </a:lnTo>
+                <a:lnTo>
+                  <a:pt x="23" y="14"/>
+                </a:lnTo>
+                <a:close/>
+                <a:moveTo>
+                  <a:pt x="0" y="14"/>
+                </a:moveTo>
+                <a:lnTo>
+                  <a:pt x="2" y="14"/>
+                </a:lnTo>
+                <a:lnTo>
+                  <a:pt x="2" y="15"/>
+                </a:lnTo>
+                <a:lnTo>
+                  <a:pt x="0" y="15"/>
+                </a:lnTo>
+                <a:close/>
+                <a:moveTo>
+                  <a:pt x="3" y="14"/>
+                </a:moveTo>
+                <a:lnTo>
+                  <a:pt x="5" y="14"/>
+                </a:lnTo>
+                <a:lnTo>
+                  <a:pt x="5" y="15"/>
+                </a:lnTo>
+                <a:lnTo>
+                  <a:pt x="3" y="15"/>
+                </a:lnTo>
+                <a:close/>
+                <a:moveTo>
+                  <a:pt x="6" y="14"/>
+                </a:moveTo>
+                <a:lnTo>
+                  <a:pt x="8" y="14"/>
+                </a:lnTo>
+                <a:lnTo>
+                  <a:pt x="8" y="15"/>
+                </a:lnTo>
+                <a:lnTo>
+                  <a:pt x="6" y="15"/>
+                </a:lnTo>
+                <a:close/>
+                <a:moveTo>
+                  <a:pt x="9" y="14"/>
+                </a:moveTo>
+                <a:lnTo>
+                  <a:pt x="10" y="14"/>
+                </a:lnTo>
+                <a:lnTo>
+                  <a:pt x="10" y="15"/>
+                </a:lnTo>
+                <a:lnTo>
+                  <a:pt x="9" y="15"/>
+                </a:lnTo>
+                <a:close/>
+                <a:moveTo>
+                  <a:pt x="11" y="14"/>
+                </a:moveTo>
+                <a:lnTo>
+                  <a:pt x="12" y="14"/>
+                </a:lnTo>
+                <a:lnTo>
+                  <a:pt x="12" y="15"/>
+                </a:lnTo>
+                <a:lnTo>
+                  <a:pt x="11" y="15"/>
+                </a:lnTo>
+                <a:close/>
+                <a:moveTo>
+                  <a:pt x="14" y="14"/>
+                </a:moveTo>
+                <a:lnTo>
+                  <a:pt x="16" y="14"/>
+                </a:lnTo>
+                <a:lnTo>
+                  <a:pt x="16" y="15"/>
+                </a:lnTo>
+                <a:lnTo>
+                  <a:pt x="14" y="15"/>
+                </a:lnTo>
+                <a:close/>
+                <a:moveTo>
+                  <a:pt x="18" y="14"/>
+                </a:moveTo>
+                <a:lnTo>
+                  <a:pt x="19" y="14"/>
+                </a:lnTo>
+                <a:lnTo>
+                  <a:pt x="19" y="15"/>
+                </a:lnTo>
+                <a:lnTo>
+                  <a:pt x="18" y="15"/>
+                </a:lnTo>
+                <a:close/>
+                <a:moveTo>
+                  <a:pt x="21" y="14"/>
+                </a:moveTo>
+                <a:lnTo>
+                  <a:pt x="23" y="14"/>
+                </a:lnTo>
+                <a:lnTo>
+                  <a:pt x="23" y="15"/>
+                </a:lnTo>
+                <a:lnTo>
+                  <a:pt x="21" y="15"/>
+                </a:lnTo>
+                <a:close/>
+                <a:moveTo>
+                  <a:pt x="24" y="14"/>
+                </a:moveTo>
+                <a:lnTo>
+                  <a:pt x="25" y="14"/>
+                </a:lnTo>
+                <a:lnTo>
+                  <a:pt x="25" y="15"/>
+                </a:lnTo>
+                <a:lnTo>
+                  <a:pt x="24" y="15"/>
+                </a:lnTo>
+                <a:close/>
+                <a:moveTo>
+                  <a:pt x="2" y="15"/>
+                </a:moveTo>
+                <a:lnTo>
+                  <a:pt x="4" y="15"/>
+                </a:lnTo>
+                <a:lnTo>
+                  <a:pt x="4" y="16"/>
+                </a:lnTo>
+                <a:lnTo>
+                  <a:pt x="2" y="16"/>
+                </a:lnTo>
+                <a:close/>
+                <a:moveTo>
+                  <a:pt x="8" y="15"/>
+                </a:moveTo>
+                <a:lnTo>
+                  <a:pt x="10" y="15"/>
+                </a:lnTo>
+                <a:lnTo>
+                  <a:pt x="10" y="16"/>
+                </a:lnTo>
+                <a:lnTo>
+                  <a:pt x="8" y="16"/>
+                </a:lnTo>
+                <a:close/>
+                <a:moveTo>
+                  <a:pt x="11" y="15"/>
+                </a:moveTo>
+                <a:lnTo>
+                  <a:pt x="13" y="15"/>
+                </a:lnTo>
+                <a:lnTo>
+                  <a:pt x="13" y="16"/>
+                </a:lnTo>
+                <a:lnTo>
+                  <a:pt x="11" y="16"/>
+                </a:lnTo>
+                <a:close/>
+                <a:moveTo>
+                  <a:pt x="14" y="15"/>
+                </a:moveTo>
+                <a:lnTo>
+                  <a:pt x="17" y="15"/>
+                </a:lnTo>
+                <a:lnTo>
+                  <a:pt x="17" y="16"/>
+                </a:lnTo>
+                <a:lnTo>
+                  <a:pt x="14" y="16"/>
+                </a:lnTo>
+                <a:close/>
+                <a:moveTo>
+                  <a:pt x="18" y="15"/>
+                </a:moveTo>
+                <a:lnTo>
+                  <a:pt x="22" y="15"/>
+                </a:lnTo>
+                <a:lnTo>
+                  <a:pt x="22" y="16"/>
+                </a:lnTo>
+                <a:lnTo>
+                  <a:pt x="18" y="16"/>
+                </a:lnTo>
+                <a:close/>
+                <a:moveTo>
+                  <a:pt x="0" y="16"/>
+                </a:moveTo>
+                <a:lnTo>
+                  <a:pt x="2" y="16"/>
+                </a:lnTo>
+                <a:lnTo>
+                  <a:pt x="2" y="17"/>
+                </a:lnTo>
+                <a:lnTo>
+                  <a:pt x="0" y="17"/>
+                </a:lnTo>
+                <a:close/>
+                <a:moveTo>
+                  <a:pt x="3" y="16"/>
+                </a:moveTo>
+                <a:lnTo>
+                  <a:pt x="4" y="16"/>
+                </a:lnTo>
+                <a:lnTo>
+                  <a:pt x="4" y="17"/>
+                </a:lnTo>
+                <a:lnTo>
+                  <a:pt x="3" y="17"/>
+                </a:lnTo>
+                <a:close/>
+                <a:moveTo>
+                  <a:pt x="6" y="16"/>
+                </a:moveTo>
+                <a:lnTo>
+                  <a:pt x="7" y="16"/>
+                </a:lnTo>
+                <a:lnTo>
+                  <a:pt x="7" y="17"/>
+                </a:lnTo>
+                <a:lnTo>
+                  <a:pt x="6" y="17"/>
+                </a:lnTo>
+                <a:close/>
+                <a:moveTo>
+                  <a:pt x="8" y="16"/>
+                </a:moveTo>
+                <a:lnTo>
+                  <a:pt x="9" y="16"/>
+                </a:lnTo>
+                <a:lnTo>
+                  <a:pt x="9" y="17"/>
+                </a:lnTo>
+                <a:lnTo>
+                  <a:pt x="8" y="17"/>
+                </a:lnTo>
+                <a:close/>
+                <a:moveTo>
+                  <a:pt x="10" y="16"/>
+                </a:moveTo>
+                <a:lnTo>
+                  <a:pt x="11" y="16"/>
+                </a:lnTo>
+                <a:lnTo>
+                  <a:pt x="11" y="17"/>
+                </a:lnTo>
+                <a:lnTo>
+                  <a:pt x="10" y="17"/>
+                </a:lnTo>
+                <a:close/>
+                <a:moveTo>
+                  <a:pt x="12" y="16"/>
+                </a:moveTo>
+                <a:lnTo>
+                  <a:pt x="13" y="16"/>
+                </a:lnTo>
+                <a:lnTo>
+                  <a:pt x="13" y="17"/>
+                </a:lnTo>
+                <a:lnTo>
+                  <a:pt x="12" y="17"/>
+                </a:lnTo>
+                <a:close/>
+                <a:moveTo>
+                  <a:pt x="14" y="16"/>
+                </a:moveTo>
+                <a:lnTo>
+                  <a:pt x="15" y="16"/>
+                </a:lnTo>
+                <a:lnTo>
+                  <a:pt x="15" y="17"/>
+                </a:lnTo>
+                <a:lnTo>
+                  <a:pt x="14" y="17"/>
+                </a:lnTo>
+                <a:close/>
+                <a:moveTo>
+                  <a:pt x="16" y="16"/>
+                </a:moveTo>
+                <a:lnTo>
+                  <a:pt x="21" y="16"/>
+                </a:lnTo>
+                <a:lnTo>
+                  <a:pt x="21" y="17"/>
+                </a:lnTo>
+                <a:lnTo>
+                  <a:pt x="16" y="17"/>
+                </a:lnTo>
+                <a:close/>
+                <a:moveTo>
+                  <a:pt x="23" y="16"/>
+                </a:moveTo>
+                <a:lnTo>
+                  <a:pt x="24" y="16"/>
+                </a:lnTo>
+                <a:lnTo>
+                  <a:pt x="24" y="17"/>
+                </a:lnTo>
+                <a:lnTo>
+                  <a:pt x="23" y="17"/>
+                </a:lnTo>
+                <a:close/>
+                <a:moveTo>
+                  <a:pt x="8" y="17"/>
+                </a:moveTo>
+                <a:lnTo>
+                  <a:pt x="10" y="17"/>
+                </a:lnTo>
+                <a:lnTo>
+                  <a:pt x="10" y="18"/>
+                </a:lnTo>
+                <a:lnTo>
+                  <a:pt x="8" y="18"/>
+                </a:lnTo>
+                <a:close/>
+                <a:moveTo>
+                  <a:pt x="11" y="17"/>
+                </a:moveTo>
+                <a:lnTo>
+                  <a:pt x="12" y="17"/>
+                </a:lnTo>
+                <a:lnTo>
+                  <a:pt x="12" y="18"/>
+                </a:lnTo>
+                <a:lnTo>
+                  <a:pt x="11" y="18"/>
+                </a:lnTo>
+                <a:close/>
+                <a:moveTo>
+                  <a:pt x="13" y="17"/>
+                </a:moveTo>
+                <a:lnTo>
+                  <a:pt x="14" y="17"/>
+                </a:lnTo>
+                <a:lnTo>
+                  <a:pt x="14" y="18"/>
+                </a:lnTo>
+                <a:lnTo>
+                  <a:pt x="13" y="18"/>
+                </a:lnTo>
+                <a:close/>
+                <a:moveTo>
+                  <a:pt x="16" y="17"/>
+                </a:moveTo>
+                <a:lnTo>
+                  <a:pt x="17" y="17"/>
+                </a:lnTo>
+                <a:lnTo>
+                  <a:pt x="17" y="18"/>
+                </a:lnTo>
+                <a:lnTo>
+                  <a:pt x="16" y="18"/>
+                </a:lnTo>
+                <a:close/>
+                <a:moveTo>
+                  <a:pt x="20" y="17"/>
+                </a:moveTo>
+                <a:lnTo>
+                  <a:pt x="21" y="17"/>
+                </a:lnTo>
+                <a:lnTo>
+                  <a:pt x="21" y="18"/>
+                </a:lnTo>
+                <a:lnTo>
+                  <a:pt x="20" y="18"/>
+                </a:lnTo>
+                <a:close/>
+                <a:moveTo>
+                  <a:pt x="24" y="17"/>
+                </a:moveTo>
+                <a:lnTo>
+                  <a:pt x="25" y="17"/>
+                </a:lnTo>
+                <a:lnTo>
+                  <a:pt x="25" y="18"/>
+                </a:lnTo>
+                <a:lnTo>
+                  <a:pt x="24" y="18"/>
+                </a:lnTo>
+                <a:close/>
+                <a:moveTo>
+                  <a:pt x="0" y="18"/>
+                </a:moveTo>
+                <a:lnTo>
+                  <a:pt x="7" y="18"/>
+                </a:lnTo>
+                <a:lnTo>
+                  <a:pt x="7" y="19"/>
+                </a:lnTo>
+                <a:lnTo>
+                  <a:pt x="0" y="19"/>
+                </a:lnTo>
+                <a:close/>
+                <a:moveTo>
+                  <a:pt x="8" y="18"/>
+                </a:moveTo>
+                <a:lnTo>
+                  <a:pt x="12" y="18"/>
+                </a:lnTo>
+                <a:lnTo>
+                  <a:pt x="12" y="19"/>
+                </a:lnTo>
+                <a:lnTo>
+                  <a:pt x="8" y="19"/>
+                </a:lnTo>
+                <a:close/>
+                <a:moveTo>
+                  <a:pt x="16" y="18"/>
+                </a:moveTo>
+                <a:lnTo>
+                  <a:pt x="17" y="18"/>
+                </a:lnTo>
+                <a:lnTo>
+                  <a:pt x="17" y="19"/>
+                </a:lnTo>
+                <a:lnTo>
+                  <a:pt x="16" y="19"/>
+                </a:lnTo>
+                <a:close/>
+                <a:moveTo>
+                  <a:pt x="18" y="18"/>
+                </a:moveTo>
+                <a:lnTo>
+                  <a:pt x="19" y="18"/>
+                </a:lnTo>
+                <a:lnTo>
+                  <a:pt x="19" y="19"/>
+                </a:lnTo>
+                <a:lnTo>
+                  <a:pt x="18" y="19"/>
+                </a:lnTo>
+                <a:close/>
+                <a:moveTo>
+                  <a:pt x="20" y="18"/>
+                </a:moveTo>
+                <a:lnTo>
+                  <a:pt x="21" y="18"/>
+                </a:lnTo>
+                <a:lnTo>
+                  <a:pt x="21" y="19"/>
+                </a:lnTo>
+                <a:lnTo>
+                  <a:pt x="20" y="19"/>
+                </a:lnTo>
+                <a:close/>
+                <a:moveTo>
+                  <a:pt x="24" y="18"/>
+                </a:moveTo>
+                <a:lnTo>
+                  <a:pt x="25" y="18"/>
+                </a:lnTo>
+                <a:lnTo>
+                  <a:pt x="25" y="19"/>
+                </a:lnTo>
+                <a:lnTo>
+                  <a:pt x="24" y="19"/>
+                </a:lnTo>
+                <a:close/>
+                <a:moveTo>
+                  <a:pt x="0" y="19"/>
+                </a:moveTo>
+                <a:lnTo>
+                  <a:pt x="1" y="19"/>
+                </a:lnTo>
+                <a:lnTo>
+                  <a:pt x="1" y="20"/>
+                </a:lnTo>
+                <a:lnTo>
+                  <a:pt x="0" y="20"/>
+                </a:lnTo>
+                <a:close/>
+                <a:moveTo>
+                  <a:pt x="6" y="19"/>
+                </a:moveTo>
+                <a:lnTo>
+                  <a:pt x="7" y="19"/>
+                </a:lnTo>
+                <a:lnTo>
+                  <a:pt x="7" y="20"/>
+                </a:lnTo>
+                <a:lnTo>
+                  <a:pt x="6" y="20"/>
+                </a:lnTo>
+                <a:close/>
+                <a:moveTo>
+                  <a:pt x="12" y="19"/>
+                </a:moveTo>
+                <a:lnTo>
+                  <a:pt x="13" y="19"/>
+                </a:lnTo>
+                <a:lnTo>
+                  <a:pt x="13" y="20"/>
+                </a:lnTo>
+                <a:lnTo>
+                  <a:pt x="12" y="20"/>
+                </a:lnTo>
+                <a:close/>
+                <a:moveTo>
+                  <a:pt x="15" y="19"/>
+                </a:moveTo>
+                <a:lnTo>
+                  <a:pt x="17" y="19"/>
+                </a:lnTo>
+                <a:lnTo>
+                  <a:pt x="17" y="20"/>
+                </a:lnTo>
+                <a:lnTo>
+                  <a:pt x="15" y="20"/>
+                </a:lnTo>
+                <a:close/>
+                <a:moveTo>
+                  <a:pt x="20" y="19"/>
+                </a:moveTo>
+                <a:lnTo>
+                  <a:pt x="21" y="19"/>
+                </a:lnTo>
+                <a:lnTo>
+                  <a:pt x="21" y="20"/>
+                </a:lnTo>
+                <a:lnTo>
+                  <a:pt x="20" y="20"/>
+                </a:lnTo>
+                <a:close/>
+                <a:moveTo>
+                  <a:pt x="24" y="19"/>
+                </a:moveTo>
+                <a:lnTo>
+                  <a:pt x="25" y="19"/>
+                </a:lnTo>
+                <a:lnTo>
+                  <a:pt x="25" y="20"/>
+                </a:lnTo>
+                <a:lnTo>
+                  <a:pt x="24" y="20"/>
+                </a:lnTo>
+                <a:close/>
+                <a:moveTo>
+                  <a:pt x="0" y="20"/>
+                </a:moveTo>
+                <a:lnTo>
+                  <a:pt x="1" y="20"/>
+                </a:lnTo>
+                <a:lnTo>
+                  <a:pt x="1" y="21"/>
+                </a:lnTo>
+                <a:lnTo>
+                  <a:pt x="0" y="21"/>
+                </a:lnTo>
+                <a:close/>
+                <a:moveTo>
+                  <a:pt x="2" y="20"/>
+                </a:moveTo>
+                <a:lnTo>
+                  <a:pt x="5" y="20"/>
+                </a:lnTo>
+                <a:lnTo>
+                  <a:pt x="5" y="21"/>
+                </a:lnTo>
+                <a:lnTo>
+                  <a:pt x="2" y="21"/>
+                </a:lnTo>
+                <a:close/>
+                <a:moveTo>
+                  <a:pt x="6" y="20"/>
+                </a:moveTo>
+                <a:lnTo>
+                  <a:pt x="7" y="20"/>
+                </a:lnTo>
+                <a:lnTo>
+                  <a:pt x="7" y="21"/>
+                </a:lnTo>
+                <a:lnTo>
+                  <a:pt x="6" y="21"/>
+                </a:lnTo>
+                <a:close/>
+                <a:moveTo>
+                  <a:pt x="9" y="20"/>
+                </a:moveTo>
+                <a:lnTo>
+                  <a:pt x="11" y="20"/>
+                </a:lnTo>
+                <a:lnTo>
+                  <a:pt x="11" y="21"/>
+                </a:lnTo>
+                <a:lnTo>
+                  <a:pt x="9" y="21"/>
+                </a:lnTo>
+                <a:close/>
+                <a:moveTo>
+                  <a:pt x="12" y="20"/>
+                </a:moveTo>
+                <a:lnTo>
+                  <a:pt x="13" y="20"/>
+                </a:lnTo>
+                <a:lnTo>
+                  <a:pt x="13" y="21"/>
+                </a:lnTo>
+                <a:lnTo>
+                  <a:pt x="12" y="21"/>
+                </a:lnTo>
+                <a:close/>
+                <a:moveTo>
+                  <a:pt x="15" y="20"/>
+                </a:moveTo>
+                <a:lnTo>
+                  <a:pt x="21" y="20"/>
+                </a:lnTo>
+                <a:lnTo>
+                  <a:pt x="21" y="21"/>
+                </a:lnTo>
+                <a:lnTo>
+                  <a:pt x="15" y="21"/>
+                </a:lnTo>
+                <a:close/>
+                <a:moveTo>
+                  <a:pt x="23" y="20"/>
+                </a:moveTo>
+                <a:lnTo>
+                  <a:pt x="24" y="20"/>
+                </a:lnTo>
+                <a:lnTo>
+                  <a:pt x="24" y="21"/>
+                </a:lnTo>
+                <a:lnTo>
+                  <a:pt x="23" y="21"/>
+                </a:lnTo>
+                <a:close/>
+                <a:moveTo>
+                  <a:pt x="0" y="21"/>
+                </a:moveTo>
+                <a:lnTo>
+                  <a:pt x="1" y="21"/>
+                </a:lnTo>
+                <a:lnTo>
+                  <a:pt x="1" y="22"/>
+                </a:lnTo>
+                <a:lnTo>
+                  <a:pt x="0" y="22"/>
+                </a:lnTo>
+                <a:close/>
+                <a:moveTo>
+                  <a:pt x="2" y="21"/>
+                </a:moveTo>
+                <a:lnTo>
+                  <a:pt x="5" y="21"/>
+                </a:lnTo>
+                <a:lnTo>
+                  <a:pt x="5" y="22"/>
+                </a:lnTo>
+                <a:lnTo>
+                  <a:pt x="2" y="22"/>
+                </a:lnTo>
+                <a:close/>
+                <a:moveTo>
+                  <a:pt x="6" y="21"/>
+                </a:moveTo>
+                <a:lnTo>
+                  <a:pt x="7" y="21"/>
+                </a:lnTo>
+                <a:lnTo>
+                  <a:pt x="7" y="22"/>
+                </a:lnTo>
+                <a:lnTo>
+                  <a:pt x="6" y="22"/>
+                </a:lnTo>
+                <a:close/>
+                <a:moveTo>
+                  <a:pt x="9" y="21"/>
+                </a:moveTo>
+                <a:lnTo>
+                  <a:pt x="10" y="21"/>
+                </a:lnTo>
+                <a:lnTo>
+                  <a:pt x="10" y="22"/>
+                </a:lnTo>
+                <a:lnTo>
+                  <a:pt x="9" y="22"/>
+                </a:lnTo>
+                <a:close/>
+                <a:moveTo>
+                  <a:pt x="11" y="21"/>
+                </a:moveTo>
+                <a:lnTo>
+                  <a:pt x="13" y="21"/>
+                </a:lnTo>
+                <a:lnTo>
+                  <a:pt x="13" y="22"/>
+                </a:lnTo>
+                <a:lnTo>
+                  <a:pt x="11" y="22"/>
+                </a:lnTo>
+                <a:close/>
+                <a:moveTo>
+                  <a:pt x="16" y="21"/>
+                </a:moveTo>
+                <a:lnTo>
+                  <a:pt x="18" y="21"/>
+                </a:lnTo>
+                <a:lnTo>
+                  <a:pt x="18" y="22"/>
+                </a:lnTo>
+                <a:lnTo>
+                  <a:pt x="16" y="22"/>
+                </a:lnTo>
+                <a:close/>
+                <a:moveTo>
+                  <a:pt x="20" y="21"/>
+                </a:moveTo>
+                <a:lnTo>
+                  <a:pt x="21" y="21"/>
+                </a:lnTo>
+                <a:lnTo>
+                  <a:pt x="21" y="22"/>
+                </a:lnTo>
+                <a:lnTo>
+                  <a:pt x="20" y="22"/>
+                </a:lnTo>
+                <a:close/>
+                <a:moveTo>
+                  <a:pt x="22" y="21"/>
+                </a:moveTo>
+                <a:lnTo>
+                  <a:pt x="24" y="21"/>
+                </a:lnTo>
+                <a:lnTo>
+                  <a:pt x="24" y="22"/>
+                </a:lnTo>
+                <a:lnTo>
+                  <a:pt x="22" y="22"/>
+                </a:lnTo>
+                <a:close/>
+                <a:moveTo>
+                  <a:pt x="0" y="22"/>
+                </a:moveTo>
+                <a:lnTo>
+                  <a:pt x="1" y="22"/>
+                </a:lnTo>
+                <a:lnTo>
+                  <a:pt x="1" y="23"/>
+                </a:lnTo>
+                <a:lnTo>
+                  <a:pt x="0" y="23"/>
+                </a:lnTo>
+                <a:close/>
+                <a:moveTo>
+                  <a:pt x="2" y="22"/>
+                </a:moveTo>
+                <a:lnTo>
+                  <a:pt x="5" y="22"/>
+                </a:lnTo>
+                <a:lnTo>
+                  <a:pt x="5" y="23"/>
+                </a:lnTo>
+                <a:lnTo>
+                  <a:pt x="2" y="23"/>
+                </a:lnTo>
+                <a:close/>
+                <a:moveTo>
+                  <a:pt x="6" y="22"/>
+                </a:moveTo>
+                <a:lnTo>
+                  <a:pt x="7" y="22"/>
+                </a:lnTo>
+                <a:lnTo>
+                  <a:pt x="7" y="23"/>
+                </a:lnTo>
+                <a:lnTo>
+                  <a:pt x="6" y="23"/>
+                </a:lnTo>
+                <a:close/>
+                <a:moveTo>
+                  <a:pt x="8" y="22"/>
+                </a:moveTo>
+                <a:lnTo>
+                  <a:pt x="9" y="22"/>
+                </a:lnTo>
+                <a:lnTo>
+                  <a:pt x="9" y="23"/>
+                </a:lnTo>
+                <a:lnTo>
+                  <a:pt x="8" y="23"/>
+                </a:lnTo>
+                <a:close/>
+                <a:moveTo>
+                  <a:pt x="11" y="22"/>
+                </a:moveTo>
+                <a:lnTo>
+                  <a:pt x="12" y="22"/>
+                </a:lnTo>
+                <a:lnTo>
+                  <a:pt x="12" y="23"/>
+                </a:lnTo>
+                <a:lnTo>
+                  <a:pt x="11" y="23"/>
+                </a:lnTo>
+                <a:close/>
+                <a:moveTo>
+                  <a:pt x="14" y="22"/>
+                </a:moveTo>
+                <a:lnTo>
+                  <a:pt x="18" y="22"/>
+                </a:lnTo>
+                <a:lnTo>
+                  <a:pt x="18" y="23"/>
+                </a:lnTo>
+                <a:lnTo>
+                  <a:pt x="14" y="23"/>
+                </a:lnTo>
+                <a:close/>
+                <a:moveTo>
+                  <a:pt x="19" y="22"/>
+                </a:moveTo>
+                <a:lnTo>
+                  <a:pt x="22" y="22"/>
+                </a:lnTo>
+                <a:lnTo>
+                  <a:pt x="22" y="23"/>
+                </a:lnTo>
+                <a:lnTo>
+                  <a:pt x="19" y="23"/>
+                </a:lnTo>
+                <a:close/>
+                <a:moveTo>
+                  <a:pt x="23" y="22"/>
+                </a:moveTo>
+                <a:lnTo>
+                  <a:pt x="25" y="22"/>
+                </a:lnTo>
+                <a:lnTo>
+                  <a:pt x="25" y="23"/>
+                </a:lnTo>
+                <a:lnTo>
+                  <a:pt x="23" y="23"/>
+                </a:lnTo>
+                <a:close/>
+                <a:moveTo>
+                  <a:pt x="0" y="23"/>
+                </a:moveTo>
+                <a:lnTo>
+                  <a:pt x="1" y="23"/>
+                </a:lnTo>
+                <a:lnTo>
+                  <a:pt x="1" y="24"/>
+                </a:lnTo>
+                <a:lnTo>
+                  <a:pt x="0" y="24"/>
+                </a:lnTo>
+                <a:close/>
+                <a:moveTo>
+                  <a:pt x="6" y="23"/>
+                </a:moveTo>
+                <a:lnTo>
+                  <a:pt x="7" y="23"/>
+                </a:lnTo>
+                <a:lnTo>
+                  <a:pt x="7" y="24"/>
+                </a:lnTo>
+                <a:lnTo>
+                  <a:pt x="6" y="24"/>
+                </a:lnTo>
+                <a:close/>
+                <a:moveTo>
+                  <a:pt x="9" y="23"/>
+                </a:moveTo>
+                <a:lnTo>
+                  <a:pt x="10" y="23"/>
+                </a:lnTo>
+                <a:lnTo>
+                  <a:pt x="10" y="24"/>
+                </a:lnTo>
+                <a:lnTo>
+                  <a:pt x="9" y="24"/>
+                </a:lnTo>
+                <a:close/>
+                <a:moveTo>
+                  <a:pt x="11" y="23"/>
+                </a:moveTo>
+                <a:lnTo>
+                  <a:pt x="13" y="23"/>
+                </a:lnTo>
+                <a:lnTo>
+                  <a:pt x="13" y="24"/>
+                </a:lnTo>
+                <a:lnTo>
+                  <a:pt x="11" y="24"/>
+                </a:lnTo>
+                <a:close/>
+                <a:moveTo>
+                  <a:pt x="14" y="23"/>
+                </a:moveTo>
+                <a:lnTo>
+                  <a:pt x="18" y="23"/>
+                </a:lnTo>
+                <a:lnTo>
+                  <a:pt x="18" y="24"/>
+                </a:lnTo>
+                <a:lnTo>
+                  <a:pt x="14" y="24"/>
+                </a:lnTo>
+                <a:close/>
+                <a:moveTo>
+                  <a:pt x="19" y="23"/>
+                </a:moveTo>
+                <a:lnTo>
+                  <a:pt x="21" y="23"/>
+                </a:lnTo>
+                <a:lnTo>
+                  <a:pt x="21" y="24"/>
+                </a:lnTo>
+                <a:lnTo>
+                  <a:pt x="19" y="24"/>
+                </a:lnTo>
+                <a:close/>
+                <a:moveTo>
+                  <a:pt x="0" y="24"/>
+                </a:moveTo>
+                <a:lnTo>
+                  <a:pt x="7" y="24"/>
+                </a:lnTo>
+                <a:lnTo>
+                  <a:pt x="7" y="25"/>
+                </a:lnTo>
+                <a:lnTo>
+                  <a:pt x="0" y="25"/>
+                </a:lnTo>
+                <a:close/>
+                <a:moveTo>
+                  <a:pt x="8" y="24"/>
+                </a:moveTo>
+                <a:lnTo>
+                  <a:pt x="9" y="24"/>
+                </a:lnTo>
+                <a:lnTo>
+                  <a:pt x="9" y="25"/>
+                </a:lnTo>
+                <a:lnTo>
+                  <a:pt x="8" y="25"/>
+                </a:lnTo>
+                <a:close/>
+                <a:moveTo>
+                  <a:pt x="12" y="24"/>
+                </a:moveTo>
+                <a:lnTo>
+                  <a:pt x="13" y="24"/>
+                </a:lnTo>
+                <a:lnTo>
+                  <a:pt x="13" y="25"/>
+                </a:lnTo>
+                <a:lnTo>
+                  <a:pt x="12" y="25"/>
+                </a:lnTo>
+                <a:close/>
+                <a:moveTo>
+                  <a:pt x="16" y="24"/>
+                </a:moveTo>
+                <a:lnTo>
+                  <a:pt x="17" y="24"/>
+                </a:lnTo>
+                <a:lnTo>
+                  <a:pt x="17" y="25"/>
+                </a:lnTo>
+                <a:lnTo>
+                  <a:pt x="16" y="25"/>
+                </a:lnTo>
+                <a:close/>
+                <a:moveTo>
+                  <a:pt x="18" y="24"/>
+                </a:moveTo>
+                <a:lnTo>
+                  <a:pt x="19" y="24"/>
+                </a:lnTo>
+                <a:lnTo>
+                  <a:pt x="19" y="25"/>
+                </a:lnTo>
+                <a:lnTo>
+                  <a:pt x="18" y="25"/>
+                </a:lnTo>
+                <a:close/>
+                <a:moveTo>
+                  <a:pt x="21" y="24"/>
+                </a:moveTo>
+                <a:lnTo>
+                  <a:pt x="22" y="24"/>
+                </a:lnTo>
+                <a:lnTo>
+                  <a:pt x="22" y="25"/>
+                </a:lnTo>
+                <a:lnTo>
+                  <a:pt x="21" y="25"/>
+                </a:lnTo>
+                <a:close/>
+                <a:moveTo>
+                  <a:pt x="24" y="24"/>
+                </a:moveTo>
+                <a:lnTo>
+                  <a:pt x="25" y="24"/>
+                </a:lnTo>
+                <a:lnTo>
+                  <a:pt x="25" y="25"/>
+                </a:lnTo>
+                <a:lnTo>
+                  <a:pt x="24" y="25"/>
+                </a:lnTo>
+                <a:close/>
+              </a:path>
+            </a:pathLst>
+          </a:custGeom>
+          <a:solidFill>
+            <a:srgbClr val="16241F"/>
+          </a:solidFill>
+          <a:ln>
+            <a:noFill/>
+          </a:ln>
+          <a:effectLst/>
+        </p:spPr>
+        <p:style>
+          <a:lnRef idx="1">
+            <a:schemeClr val="accent1"/>
+          </a:lnRef>
+          <a:fillRef idx="3">
+            <a:schemeClr val="accent1"/>
+          </a:fillRef>
+          <a:effectRef idx="2">
+            <a:schemeClr val="accent1"/>
+          </a:effectRef>
+          <a:fontRef idx="minor">
+            <a:schemeClr val="lt1"/>
+          </a:fontRef>
+        </p:style>
+        <p:txBody>
+          <a:bodyPr rtlCol="0" anchor="ctr"/>
+          <a:lstStyle/>
+          <a:p>
+            <a:pPr algn="ctr"/>
+          </a:p>
+        </p:txBody>
+      </p:sp>
+      <p:sp>
+        <p:nvSpPr>
+          <p:cNvPr id="14" name="text"/>
+          <p:cNvSpPr txBox="1"/>
+          <p:nvPr/>
+        </p:nvSpPr>
+        <p:spPr>
+          <a:xfrm>
+            <a:off x="9905695" y="3474720"/>
+            <a:ext cx="1737360" cy="365760"/>
+          </a:xfrm>
+          <a:prstGeom prst="rect">
+            <a:avLst/>
+          </a:prstGeom>
+          <a:noFill/>
+        </p:spPr>
+        <p:txBody>
+          <a:bodyPr wrap="square" lIns="0" rIns="0" tIns="0" bIns="0" anchor="t">
+            <a:spAutoFit/>
+          </a:bodyPr>
+          <a:lstStyle/>
+          <a:p>
+            <a:pPr algn="ctr">
+              <a:lnSpc>
+                <a:spcPct val="100000"/>
+              </a:lnSpc>
+            </a:pPr>
+            <a:r>
+              <a:rPr sz="1500" b="0">
+                <a:solidFill>
+                  <a:srgbClr val="5B6F68"/>
+                </a:solidFill>
+                <a:latin typeface="Calibri"/>
+              </a:rPr>
+              <a:t>inferogenesis.com</a:t>
             </a:r>
           </a:p>
         </p:txBody>
@@ -19094,8 +24071,8 @@
         </p:nvSpPr>
         <p:spPr>
           <a:xfrm>
-            <a:off x="585216" y="1554480"/>
-            <a:ext cx="1036289" cy="594360"/>
+            <a:off x="548640" y="1463039"/>
+            <a:ext cx="2926079" cy="548640"/>
           </a:xfrm>
           <a:prstGeom prst="rect">
             <a:avLst/>
@@ -19103,18 +24080,18 @@
           <a:noFill/>
         </p:spPr>
         <p:txBody>
-          <a:bodyPr wrap="square" lIns="0" rIns="0" tIns="0" bIns="0" anchor="b">
+          <a:bodyPr wrap="square" lIns="0" rIns="0" tIns="0" bIns="0" anchor="ctr">
             <a:spAutoFit/>
           </a:bodyPr>
           <a:lstStyle/>
           <a:p>
-            <a:pPr algn="ctr">
-              <a:lnSpc>
-                <a:spcPct val="100000"/>
-              </a:lnSpc>
-            </a:pPr>
-            <a:r>
-              <a:rPr sz="1500" b="1">
+            <a:pPr algn="l">
+              <a:lnSpc>
+                <a:spcPct val="100000"/>
+              </a:lnSpc>
+            </a:pPr>
+            <a:r>
+              <a:rPr sz="2000" b="1">
                 <a:solidFill>
                   <a:srgbClr val="16241F"/>
                 </a:solidFill>
@@ -19133,8 +24110,8 @@
         </p:nvSpPr>
         <p:spPr>
           <a:xfrm>
-            <a:off x="566928" y="2240280"/>
-            <a:ext cx="1072865" cy="777240"/>
+            <a:off x="3675887" y="1463039"/>
+            <a:ext cx="3512515" cy="548640"/>
           </a:xfrm>
           <a:prstGeom prst="roundRect">
             <a:avLst>
@@ -19169,7 +24146,20 @@
           <a:bodyPr rtlCol="0" anchor="ctr" wrap="square" lIns="18288" rIns="18288" tIns="115214" bIns="115214"/>
           <a:lstStyle/>
           <a:p>
-            <a:pPr algn="ctr"/>
+            <a:pPr algn="ctr">
+              <a:lnSpc>
+                <a:spcPct val="100000"/>
+              </a:lnSpc>
+            </a:pPr>
+            <a:r>
+              <a:rPr sz="1600" b="0">
+                <a:solidFill>
+                  <a:srgbClr val="16241F"/>
+                </a:solidFill>
+                <a:latin typeface="Calibri"/>
+              </a:rPr>
+              <a:t>introductions and setup</a:t>
+            </a:r>
           </a:p>
         </p:txBody>
       </p:sp>
@@ -19181,8 +24171,8 @@
         </p:nvSpPr>
         <p:spPr>
           <a:xfrm>
-            <a:off x="548640" y="3108960"/>
-            <a:ext cx="640080" cy="365760"/>
+            <a:off x="548640" y="2176272"/>
+            <a:ext cx="2926079" cy="548640"/>
           </a:xfrm>
           <a:prstGeom prst="rect">
             <a:avLst/>
@@ -19190,7 +24180,7 @@
           <a:noFill/>
         </p:spPr>
         <p:txBody>
-          <a:bodyPr wrap="square" lIns="0" rIns="0" tIns="0" bIns="0" anchor="t">
+          <a:bodyPr wrap="square" lIns="0" rIns="0" tIns="0" bIns="0" anchor="ctr">
             <a:spAutoFit/>
           </a:bodyPr>
           <a:lstStyle/>
@@ -19201,66 +24191,36 @@
               </a:lnSpc>
             </a:pPr>
             <a:r>
-              <a:rPr sz="1400" b="0">
+              <a:rPr sz="2000" b="1">
+                <a:solidFill>
+                  <a:srgbClr val="16241F"/>
+                </a:solidFill>
+                <a:latin typeface="Calibri"/>
+              </a:rPr>
+              <a:t>Task 1</a:t>
+            </a:r>
+            <a:r>
+              <a:rPr sz="1600" b="0">
                 <a:solidFill>
                   <a:srgbClr val="5B6F68"/>
                 </a:solidFill>
                 <a:latin typeface="Calibri"/>
               </a:rPr>
-              <a:t>0:00</a:t>
-            </a:r>
-          </a:p>
-        </p:txBody>
-      </p:sp>
-      <p:sp>
-        <p:nvSpPr>
-          <p:cNvPr id="7" name="text"/>
-          <p:cNvSpPr txBox="1"/>
+              <a:t>  the 1960 rocket</a:t>
+            </a:r>
+          </a:p>
+        </p:txBody>
+      </p:sp>
+      <p:sp>
+        <p:nvSpPr>
+          <p:cNvPr id="7" name="block"/>
+          <p:cNvSpPr/>
           <p:nvPr/>
         </p:nvSpPr>
         <p:spPr>
           <a:xfrm>
-            <a:off x="1694657" y="1554480"/>
-            <a:ext cx="2423091" cy="594360"/>
-          </a:xfrm>
-          <a:prstGeom prst="rect">
-            <a:avLst/>
-          </a:prstGeom>
-          <a:noFill/>
-        </p:spPr>
-        <p:txBody>
-          <a:bodyPr wrap="square" lIns="0" rIns="0" tIns="0" bIns="0" anchor="b">
-            <a:spAutoFit/>
-          </a:bodyPr>
-          <a:lstStyle/>
-          <a:p>
-            <a:pPr algn="ctr">
-              <a:lnSpc>
-                <a:spcPct val="100000"/>
-              </a:lnSpc>
-            </a:pPr>
-            <a:r>
-              <a:rPr sz="1500" b="1">
-                <a:solidFill>
-                  <a:srgbClr val="16241F"/>
-                </a:solidFill>
-                <a:latin typeface="Calibri"/>
-              </a:rPr>
-              <a:t>Task 1</a:t>
-            </a:r>
-          </a:p>
-        </p:txBody>
-      </p:sp>
-      <p:sp>
-        <p:nvSpPr>
-          <p:cNvPr id="8" name="block"/>
-          <p:cNvSpPr/>
-          <p:nvPr/>
-        </p:nvSpPr>
-        <p:spPr>
-          <a:xfrm>
-            <a:off x="1676369" y="2240280"/>
-            <a:ext cx="333237" cy="777240"/>
+            <a:off x="3675887" y="2176272"/>
+            <a:ext cx="1146454" cy="548640"/>
           </a:xfrm>
           <a:prstGeom prst="roundRect">
             <a:avLst>
@@ -19295,20 +24255,33 @@
           <a:bodyPr rtlCol="0" anchor="ctr" wrap="square" lIns="18288" rIns="18288" tIns="115214" bIns="115214"/>
           <a:lstStyle/>
           <a:p>
-            <a:pPr algn="ctr"/>
-          </a:p>
-        </p:txBody>
-      </p:sp>
-      <p:sp>
-        <p:nvSpPr>
-          <p:cNvPr id="9" name="block"/>
+            <a:pPr algn="ctr">
+              <a:lnSpc>
+                <a:spcPct val="100000"/>
+              </a:lnSpc>
+            </a:pPr>
+            <a:r>
+              <a:rPr sz="1600" b="0">
+                <a:solidFill>
+                  <a:srgbClr val="16241F"/>
+                </a:solidFill>
+                <a:latin typeface="Calibri"/>
+              </a:rPr>
+              <a:t>brief</a:t>
+            </a:r>
+          </a:p>
+        </p:txBody>
+      </p:sp>
+      <p:sp>
+        <p:nvSpPr>
+          <p:cNvPr id="8" name="block"/>
           <p:cNvSpPr/>
           <p:nvPr/>
         </p:nvSpPr>
         <p:spPr>
           <a:xfrm>
-            <a:off x="2046183" y="2240280"/>
-            <a:ext cx="1350225" cy="777240"/>
+            <a:off x="4858918" y="2176272"/>
+            <a:ext cx="4399788" cy="548640"/>
           </a:xfrm>
           <a:prstGeom prst="roundRect">
             <a:avLst>
@@ -19347,27 +24320,27 @@
               </a:lnSpc>
             </a:pPr>
             <a:r>
-              <a:rPr sz="1400" b="0">
+              <a:rPr sz="1600" b="0">
                 <a:solidFill>
                   <a:srgbClr val="16241F"/>
                 </a:solidFill>
                 <a:latin typeface="Calibri"/>
               </a:rPr>
-              <a:t>code</a:t>
-            </a:r>
-          </a:p>
-        </p:txBody>
-      </p:sp>
-      <p:sp>
-        <p:nvSpPr>
-          <p:cNvPr id="10" name="block"/>
+              <a:t>you code</a:t>
+            </a:r>
+          </a:p>
+        </p:txBody>
+      </p:sp>
+      <p:sp>
+        <p:nvSpPr>
+          <p:cNvPr id="9" name="block"/>
           <p:cNvSpPr/>
           <p:nvPr/>
         </p:nvSpPr>
         <p:spPr>
           <a:xfrm>
-            <a:off x="3432985" y="2240280"/>
-            <a:ext cx="703051" cy="777240"/>
+            <a:off x="9295282" y="2176272"/>
+            <a:ext cx="2329484" cy="548640"/>
           </a:xfrm>
           <a:prstGeom prst="roundRect">
             <a:avLst>
@@ -19402,20 +24375,33 @@
           <a:bodyPr rtlCol="0" anchor="ctr" wrap="square" lIns="18288" rIns="18288" tIns="115214" bIns="115214"/>
           <a:lstStyle/>
           <a:p>
-            <a:pPr algn="ctr"/>
-          </a:p>
-        </p:txBody>
-      </p:sp>
-      <p:sp>
-        <p:nvSpPr>
-          <p:cNvPr id="11" name="text"/>
+            <a:pPr algn="ctr">
+              <a:lnSpc>
+                <a:spcPct val="100000"/>
+              </a:lnSpc>
+            </a:pPr>
+            <a:r>
+              <a:rPr sz="1600" b="0">
+                <a:solidFill>
+                  <a:srgbClr val="16241F"/>
+                </a:solidFill>
+                <a:latin typeface="Calibri"/>
+              </a:rPr>
+              <a:t>discussion</a:t>
+            </a:r>
+          </a:p>
+        </p:txBody>
+      </p:sp>
+      <p:sp>
+        <p:nvSpPr>
+          <p:cNvPr id="10" name="text"/>
           <p:cNvSpPr txBox="1"/>
           <p:nvPr/>
         </p:nvSpPr>
         <p:spPr>
           <a:xfrm>
-            <a:off x="1338041" y="3108960"/>
-            <a:ext cx="640080" cy="365760"/>
+            <a:off x="548640" y="2889504"/>
+            <a:ext cx="2926079" cy="548640"/>
           </a:xfrm>
           <a:prstGeom prst="rect">
             <a:avLst/>
@@ -19423,77 +24409,47 @@
           <a:noFill/>
         </p:spPr>
         <p:txBody>
-          <a:bodyPr wrap="square" lIns="0" rIns="0" tIns="0" bIns="0" anchor="t">
+          <a:bodyPr wrap="square" lIns="0" rIns="0" tIns="0" bIns="0" anchor="ctr">
             <a:spAutoFit/>
           </a:bodyPr>
           <a:lstStyle/>
           <a:p>
-            <a:pPr algn="ctr">
-              <a:lnSpc>
-                <a:spcPct val="100000"/>
-              </a:lnSpc>
-            </a:pPr>
-            <a:r>
-              <a:rPr sz="1400" b="0">
+            <a:pPr algn="l">
+              <a:lnSpc>
+                <a:spcPct val="100000"/>
+              </a:lnSpc>
+            </a:pPr>
+            <a:r>
+              <a:rPr sz="2000" b="1">
+                <a:solidFill>
+                  <a:srgbClr val="16241F"/>
+                </a:solidFill>
+                <a:latin typeface="Calibri"/>
+              </a:rPr>
+              <a:t>Task 2</a:t>
+            </a:r>
+            <a:r>
+              <a:rPr sz="1600" b="0">
                 <a:solidFill>
                   <a:srgbClr val="5B6F68"/>
                 </a:solidFill>
                 <a:latin typeface="Calibri"/>
               </a:rPr>
-              <a:t>0:12</a:t>
-            </a:r>
-          </a:p>
-        </p:txBody>
-      </p:sp>
-      <p:sp>
-        <p:nvSpPr>
-          <p:cNvPr id="12" name="text"/>
-          <p:cNvSpPr txBox="1"/>
+              <a:t>  the beacon</a:t>
+            </a:r>
+          </a:p>
+        </p:txBody>
+      </p:sp>
+      <p:sp>
+        <p:nvSpPr>
+          <p:cNvPr id="11" name="block"/>
+          <p:cNvSpPr/>
           <p:nvPr/>
         </p:nvSpPr>
         <p:spPr>
           <a:xfrm>
-            <a:off x="4190900" y="1554480"/>
-            <a:ext cx="2423091" cy="594360"/>
-          </a:xfrm>
-          <a:prstGeom prst="rect">
-            <a:avLst/>
-          </a:prstGeom>
-          <a:noFill/>
-        </p:spPr>
-        <p:txBody>
-          <a:bodyPr wrap="square" lIns="0" rIns="0" tIns="0" bIns="0" anchor="b">
-            <a:spAutoFit/>
-          </a:bodyPr>
-          <a:lstStyle/>
-          <a:p>
-            <a:pPr algn="ctr">
-              <a:lnSpc>
-                <a:spcPct val="100000"/>
-              </a:lnSpc>
-            </a:pPr>
-            <a:r>
-              <a:rPr sz="1500" b="1">
-                <a:solidFill>
-                  <a:srgbClr val="16241F"/>
-                </a:solidFill>
-                <a:latin typeface="Calibri"/>
-              </a:rPr>
-              <a:t>Task 2</a:t>
-            </a:r>
-          </a:p>
-        </p:txBody>
-      </p:sp>
-      <p:sp>
-        <p:nvSpPr>
-          <p:cNvPr id="13" name="block"/>
-          <p:cNvSpPr/>
-          <p:nvPr/>
-        </p:nvSpPr>
-        <p:spPr>
-          <a:xfrm>
-            <a:off x="4172612" y="2240280"/>
-            <a:ext cx="333237" cy="777240"/>
+            <a:off x="3675887" y="2889504"/>
+            <a:ext cx="1146454" cy="548640"/>
           </a:xfrm>
           <a:prstGeom prst="roundRect">
             <a:avLst>
@@ -19528,20 +24484,33 @@
           <a:bodyPr rtlCol="0" anchor="ctr" wrap="square" lIns="18288" rIns="18288" tIns="115214" bIns="115214"/>
           <a:lstStyle/>
           <a:p>
-            <a:pPr algn="ctr"/>
-          </a:p>
-        </p:txBody>
-      </p:sp>
-      <p:sp>
-        <p:nvSpPr>
-          <p:cNvPr id="14" name="block"/>
+            <a:pPr algn="ctr">
+              <a:lnSpc>
+                <a:spcPct val="100000"/>
+              </a:lnSpc>
+            </a:pPr>
+            <a:r>
+              <a:rPr sz="1600" b="0">
+                <a:solidFill>
+                  <a:srgbClr val="16241F"/>
+                </a:solidFill>
+                <a:latin typeface="Calibri"/>
+              </a:rPr>
+              <a:t>brief</a:t>
+            </a:r>
+          </a:p>
+        </p:txBody>
+      </p:sp>
+      <p:sp>
+        <p:nvSpPr>
+          <p:cNvPr id="12" name="block"/>
           <p:cNvSpPr/>
           <p:nvPr/>
         </p:nvSpPr>
         <p:spPr>
           <a:xfrm>
-            <a:off x="4542426" y="2240280"/>
-            <a:ext cx="1350225" cy="777240"/>
+            <a:off x="4858918" y="2889504"/>
+            <a:ext cx="4399788" cy="548640"/>
           </a:xfrm>
           <a:prstGeom prst="roundRect">
             <a:avLst>
@@ -19580,27 +24549,27 @@
               </a:lnSpc>
             </a:pPr>
             <a:r>
-              <a:rPr sz="1400" b="0">
+              <a:rPr sz="1600" b="0">
                 <a:solidFill>
                   <a:srgbClr val="16241F"/>
                 </a:solidFill>
                 <a:latin typeface="Calibri"/>
               </a:rPr>
-              <a:t>code</a:t>
-            </a:r>
-          </a:p>
-        </p:txBody>
-      </p:sp>
-      <p:sp>
-        <p:nvSpPr>
-          <p:cNvPr id="15" name="block"/>
+              <a:t>you code</a:t>
+            </a:r>
+          </a:p>
+        </p:txBody>
+      </p:sp>
+      <p:sp>
+        <p:nvSpPr>
+          <p:cNvPr id="13" name="block"/>
           <p:cNvSpPr/>
           <p:nvPr/>
         </p:nvSpPr>
         <p:spPr>
           <a:xfrm>
-            <a:off x="5929228" y="2240280"/>
-            <a:ext cx="703051" cy="777240"/>
+            <a:off x="9295282" y="2889504"/>
+            <a:ext cx="2329484" cy="548640"/>
           </a:xfrm>
           <a:prstGeom prst="roundRect">
             <a:avLst>
@@ -19635,20 +24604,33 @@
           <a:bodyPr rtlCol="0" anchor="ctr" wrap="square" lIns="18288" rIns="18288" tIns="115214" bIns="115214"/>
           <a:lstStyle/>
           <a:p>
-            <a:pPr algn="ctr"/>
-          </a:p>
-        </p:txBody>
-      </p:sp>
-      <p:sp>
-        <p:nvSpPr>
-          <p:cNvPr id="16" name="text"/>
+            <a:pPr algn="ctr">
+              <a:lnSpc>
+                <a:spcPct val="100000"/>
+              </a:lnSpc>
+            </a:pPr>
+            <a:r>
+              <a:rPr sz="1600" b="0">
+                <a:solidFill>
+                  <a:srgbClr val="16241F"/>
+                </a:solidFill>
+                <a:latin typeface="Calibri"/>
+              </a:rPr>
+              <a:t>discussion</a:t>
+            </a:r>
+          </a:p>
+        </p:txBody>
+      </p:sp>
+      <p:sp>
+        <p:nvSpPr>
+          <p:cNvPr id="14" name="text"/>
           <p:cNvSpPr txBox="1"/>
           <p:nvPr/>
         </p:nvSpPr>
         <p:spPr>
           <a:xfrm>
-            <a:off x="3834284" y="3108960"/>
-            <a:ext cx="640080" cy="365760"/>
+            <a:off x="548640" y="3602735"/>
+            <a:ext cx="2926079" cy="548640"/>
           </a:xfrm>
           <a:prstGeom prst="rect">
             <a:avLst/>
@@ -19656,77 +24638,47 @@
           <a:noFill/>
         </p:spPr>
         <p:txBody>
-          <a:bodyPr wrap="square" lIns="0" rIns="0" tIns="0" bIns="0" anchor="t">
+          <a:bodyPr wrap="square" lIns="0" rIns="0" tIns="0" bIns="0" anchor="ctr">
             <a:spAutoFit/>
           </a:bodyPr>
           <a:lstStyle/>
           <a:p>
-            <a:pPr algn="ctr">
-              <a:lnSpc>
-                <a:spcPct val="100000"/>
-              </a:lnSpc>
-            </a:pPr>
-            <a:r>
-              <a:rPr sz="1400" b="0">
+            <a:pPr algn="l">
+              <a:lnSpc>
+                <a:spcPct val="100000"/>
+              </a:lnSpc>
+            </a:pPr>
+            <a:r>
+              <a:rPr sz="2000" b="1">
+                <a:solidFill>
+                  <a:srgbClr val="16241F"/>
+                </a:solidFill>
+                <a:latin typeface="Calibri"/>
+              </a:rPr>
+              <a:t>Task 3</a:t>
+            </a:r>
+            <a:r>
+              <a:rPr sz="1600" b="0">
                 <a:solidFill>
                   <a:srgbClr val="5B6F68"/>
                 </a:solidFill>
                 <a:latin typeface="Calibri"/>
               </a:rPr>
-              <a:t>0:39</a:t>
-            </a:r>
-          </a:p>
-        </p:txBody>
-      </p:sp>
-      <p:sp>
-        <p:nvSpPr>
-          <p:cNvPr id="17" name="text"/>
-          <p:cNvSpPr txBox="1"/>
+              <a:t>  the blackout</a:t>
+            </a:r>
+          </a:p>
+        </p:txBody>
+      </p:sp>
+      <p:sp>
+        <p:nvSpPr>
+          <p:cNvPr id="15" name="block"/>
+          <p:cNvSpPr/>
           <p:nvPr/>
         </p:nvSpPr>
         <p:spPr>
           <a:xfrm>
-            <a:off x="6687144" y="1554480"/>
-            <a:ext cx="2423091" cy="594360"/>
-          </a:xfrm>
-          <a:prstGeom prst="rect">
-            <a:avLst/>
-          </a:prstGeom>
-          <a:noFill/>
-        </p:spPr>
-        <p:txBody>
-          <a:bodyPr wrap="square" lIns="0" rIns="0" tIns="0" bIns="0" anchor="b">
-            <a:spAutoFit/>
-          </a:bodyPr>
-          <a:lstStyle/>
-          <a:p>
-            <a:pPr algn="ctr">
-              <a:lnSpc>
-                <a:spcPct val="100000"/>
-              </a:lnSpc>
-            </a:pPr>
-            <a:r>
-              <a:rPr sz="1500" b="1">
-                <a:solidFill>
-                  <a:srgbClr val="16241F"/>
-                </a:solidFill>
-                <a:latin typeface="Calibri"/>
-              </a:rPr>
-              <a:t>Task 3</a:t>
-            </a:r>
-          </a:p>
-        </p:txBody>
-      </p:sp>
-      <p:sp>
-        <p:nvSpPr>
-          <p:cNvPr id="18" name="block"/>
-          <p:cNvSpPr/>
-          <p:nvPr/>
-        </p:nvSpPr>
-        <p:spPr>
-          <a:xfrm>
-            <a:off x="6668856" y="2240280"/>
-            <a:ext cx="333237" cy="777240"/>
+            <a:off x="3675887" y="3602735"/>
+            <a:ext cx="1146454" cy="548640"/>
           </a:xfrm>
           <a:prstGeom prst="roundRect">
             <a:avLst>
@@ -19761,20 +24713,33 @@
           <a:bodyPr rtlCol="0" anchor="ctr" wrap="square" lIns="18288" rIns="18288" tIns="115214" bIns="115214"/>
           <a:lstStyle/>
           <a:p>
-            <a:pPr algn="ctr"/>
-          </a:p>
-        </p:txBody>
-      </p:sp>
-      <p:sp>
-        <p:nvSpPr>
-          <p:cNvPr id="19" name="block"/>
+            <a:pPr algn="ctr">
+              <a:lnSpc>
+                <a:spcPct val="100000"/>
+              </a:lnSpc>
+            </a:pPr>
+            <a:r>
+              <a:rPr sz="1600" b="0">
+                <a:solidFill>
+                  <a:srgbClr val="16241F"/>
+                </a:solidFill>
+                <a:latin typeface="Calibri"/>
+              </a:rPr>
+              <a:t>brief</a:t>
+            </a:r>
+          </a:p>
+        </p:txBody>
+      </p:sp>
+      <p:sp>
+        <p:nvSpPr>
+          <p:cNvPr id="16" name="block"/>
           <p:cNvSpPr/>
           <p:nvPr/>
         </p:nvSpPr>
         <p:spPr>
           <a:xfrm>
-            <a:off x="7038670" y="2240280"/>
-            <a:ext cx="1350225" cy="777240"/>
+            <a:off x="4858918" y="3602735"/>
+            <a:ext cx="4399788" cy="548640"/>
           </a:xfrm>
           <a:prstGeom prst="roundRect">
             <a:avLst>
@@ -19813,27 +24778,27 @@
               </a:lnSpc>
             </a:pPr>
             <a:r>
-              <a:rPr sz="1400" b="0">
+              <a:rPr sz="1600" b="0">
                 <a:solidFill>
                   <a:srgbClr val="16241F"/>
                 </a:solidFill>
                 <a:latin typeface="Calibri"/>
               </a:rPr>
-              <a:t>code</a:t>
-            </a:r>
-          </a:p>
-        </p:txBody>
-      </p:sp>
-      <p:sp>
-        <p:nvSpPr>
-          <p:cNvPr id="20" name="block"/>
+              <a:t>you code</a:t>
+            </a:r>
+          </a:p>
+        </p:txBody>
+      </p:sp>
+      <p:sp>
+        <p:nvSpPr>
+          <p:cNvPr id="17" name="block"/>
           <p:cNvSpPr/>
           <p:nvPr/>
         </p:nvSpPr>
         <p:spPr>
           <a:xfrm>
-            <a:off x="8425472" y="2240280"/>
-            <a:ext cx="703051" cy="777240"/>
+            <a:off x="9295282" y="3602735"/>
+            <a:ext cx="2329484" cy="548640"/>
           </a:xfrm>
           <a:prstGeom prst="roundRect">
             <a:avLst>
@@ -19868,20 +24833,33 @@
           <a:bodyPr rtlCol="0" anchor="ctr" wrap="square" lIns="18288" rIns="18288" tIns="115214" bIns="115214"/>
           <a:lstStyle/>
           <a:p>
-            <a:pPr algn="ctr"/>
-          </a:p>
-        </p:txBody>
-      </p:sp>
-      <p:sp>
-        <p:nvSpPr>
-          <p:cNvPr id="21" name="text"/>
+            <a:pPr algn="ctr">
+              <a:lnSpc>
+                <a:spcPct val="100000"/>
+              </a:lnSpc>
+            </a:pPr>
+            <a:r>
+              <a:rPr sz="1600" b="0">
+                <a:solidFill>
+                  <a:srgbClr val="16241F"/>
+                </a:solidFill>
+                <a:latin typeface="Calibri"/>
+              </a:rPr>
+              <a:t>discussion</a:t>
+            </a:r>
+          </a:p>
+        </p:txBody>
+      </p:sp>
+      <p:sp>
+        <p:nvSpPr>
+          <p:cNvPr id="18" name="text"/>
           <p:cNvSpPr txBox="1"/>
           <p:nvPr/>
         </p:nvSpPr>
         <p:spPr>
           <a:xfrm>
-            <a:off x="6330528" y="3108960"/>
-            <a:ext cx="640080" cy="365760"/>
+            <a:off x="548640" y="4315968"/>
+            <a:ext cx="2926079" cy="548640"/>
           </a:xfrm>
           <a:prstGeom prst="rect">
             <a:avLst/>
@@ -19889,77 +24867,38 @@
           <a:noFill/>
         </p:spPr>
         <p:txBody>
-          <a:bodyPr wrap="square" lIns="0" rIns="0" tIns="0" bIns="0" anchor="t">
+          <a:bodyPr wrap="square" lIns="0" rIns="0" tIns="0" bIns="0" anchor="ctr">
             <a:spAutoFit/>
           </a:bodyPr>
           <a:lstStyle/>
           <a:p>
-            <a:pPr algn="ctr">
-              <a:lnSpc>
-                <a:spcPct val="100000"/>
-              </a:lnSpc>
-            </a:pPr>
-            <a:r>
-              <a:rPr sz="1400" b="0">
-                <a:solidFill>
-                  <a:srgbClr val="5B6F68"/>
-                </a:solidFill>
-                <a:latin typeface="Calibri"/>
-              </a:rPr>
-              <a:t>1:06</a:t>
-            </a:r>
-          </a:p>
-        </p:txBody>
-      </p:sp>
-      <p:sp>
-        <p:nvSpPr>
-          <p:cNvPr id="22" name="text"/>
-          <p:cNvSpPr txBox="1"/>
+            <a:pPr algn="l">
+              <a:lnSpc>
+                <a:spcPct val="100000"/>
+              </a:lnSpc>
+            </a:pPr>
+            <a:r>
+              <a:rPr sz="2000" b="1">
+                <a:solidFill>
+                  <a:srgbClr val="16241F"/>
+                </a:solidFill>
+                <a:latin typeface="Calibri"/>
+              </a:rPr>
+              <a:t>Why it matters</a:t>
+            </a:r>
+          </a:p>
+        </p:txBody>
+      </p:sp>
+      <p:sp>
+        <p:nvSpPr>
+          <p:cNvPr id="19" name="block"/>
+          <p:cNvSpPr/>
           <p:nvPr/>
         </p:nvSpPr>
         <p:spPr>
           <a:xfrm>
-            <a:off x="9183387" y="1554480"/>
-            <a:ext cx="1036289" cy="594360"/>
-          </a:xfrm>
-          <a:prstGeom prst="rect">
-            <a:avLst/>
-          </a:prstGeom>
-          <a:noFill/>
-        </p:spPr>
-        <p:txBody>
-          <a:bodyPr wrap="square" lIns="0" rIns="0" tIns="0" bIns="0" anchor="b">
-            <a:spAutoFit/>
-          </a:bodyPr>
-          <a:lstStyle/>
-          <a:p>
-            <a:pPr algn="ctr">
-              <a:lnSpc>
-                <a:spcPct val="100000"/>
-              </a:lnSpc>
-            </a:pPr>
-            <a:r>
-              <a:rPr sz="1500" b="1">
-                <a:solidFill>
-                  <a:srgbClr val="16241F"/>
-                </a:solidFill>
-                <a:latin typeface="Calibri"/>
-              </a:rPr>
-              <a:t>Why it matters</a:t>
-            </a:r>
-          </a:p>
-        </p:txBody>
-      </p:sp>
-      <p:sp>
-        <p:nvSpPr>
-          <p:cNvPr id="23" name="block"/>
-          <p:cNvSpPr/>
-          <p:nvPr/>
-        </p:nvSpPr>
-        <p:spPr>
-          <a:xfrm>
-            <a:off x="9165099" y="2240280"/>
-            <a:ext cx="1072865" cy="777240"/>
+            <a:off x="3675887" y="4315968"/>
+            <a:ext cx="3512515" cy="548640"/>
           </a:xfrm>
           <a:prstGeom prst="roundRect">
             <a:avLst>
@@ -19994,20 +24933,33 @@
           <a:bodyPr rtlCol="0" anchor="ctr" wrap="square" lIns="18288" rIns="18288" tIns="115214" bIns="115214"/>
           <a:lstStyle/>
           <a:p>
-            <a:pPr algn="ctr"/>
-          </a:p>
-        </p:txBody>
-      </p:sp>
-      <p:sp>
-        <p:nvSpPr>
-          <p:cNvPr id="24" name="text"/>
+            <a:pPr algn="ctr">
+              <a:lnSpc>
+                <a:spcPct val="100000"/>
+              </a:lnSpc>
+            </a:pPr>
+            <a:r>
+              <a:rPr sz="1600" b="0">
+                <a:solidFill>
+                  <a:srgbClr val="16241F"/>
+                </a:solidFill>
+                <a:latin typeface="Calibri"/>
+              </a:rPr>
+              <a:t>what cpomdp adds, and what's next</a:t>
+            </a:r>
+          </a:p>
+        </p:txBody>
+      </p:sp>
+      <p:sp>
+        <p:nvSpPr>
+          <p:cNvPr id="20" name="text"/>
           <p:cNvSpPr txBox="1"/>
           <p:nvPr/>
         </p:nvSpPr>
         <p:spPr>
           <a:xfrm>
-            <a:off x="8826771" y="3108960"/>
-            <a:ext cx="640080" cy="365760"/>
+            <a:off x="548640" y="5029200"/>
+            <a:ext cx="2926079" cy="548640"/>
           </a:xfrm>
           <a:prstGeom prst="rect">
             <a:avLst/>
@@ -20015,77 +24967,38 @@
           <a:noFill/>
         </p:spPr>
         <p:txBody>
-          <a:bodyPr wrap="square" lIns="0" rIns="0" tIns="0" bIns="0" anchor="t">
+          <a:bodyPr wrap="square" lIns="0" rIns="0" tIns="0" bIns="0" anchor="ctr">
             <a:spAutoFit/>
           </a:bodyPr>
           <a:lstStyle/>
           <a:p>
-            <a:pPr algn="ctr">
-              <a:lnSpc>
-                <a:spcPct val="100000"/>
-              </a:lnSpc>
-            </a:pPr>
-            <a:r>
-              <a:rPr sz="1400" b="0">
-                <a:solidFill>
-                  <a:srgbClr val="5B6F68"/>
-                </a:solidFill>
-                <a:latin typeface="Calibri"/>
-              </a:rPr>
-              <a:t>1:33</a:t>
-            </a:r>
-          </a:p>
-        </p:txBody>
-      </p:sp>
-      <p:sp>
-        <p:nvSpPr>
-          <p:cNvPr id="25" name="text"/>
-          <p:cNvSpPr txBox="1"/>
+            <a:pPr algn="l">
+              <a:lnSpc>
+                <a:spcPct val="100000"/>
+              </a:lnSpc>
+            </a:pPr>
+            <a:r>
+              <a:rPr sz="2000" b="1">
+                <a:solidFill>
+                  <a:srgbClr val="16241F"/>
+                </a:solidFill>
+                <a:latin typeface="Calibri"/>
+              </a:rPr>
+              <a:t>Questions</a:t>
+            </a:r>
+          </a:p>
+        </p:txBody>
+      </p:sp>
+      <p:sp>
+        <p:nvSpPr>
+          <p:cNvPr id="21" name="block"/>
+          <p:cNvSpPr/>
           <p:nvPr/>
         </p:nvSpPr>
         <p:spPr>
           <a:xfrm>
-            <a:off x="10292829" y="1554480"/>
-            <a:ext cx="1313649" cy="594360"/>
-          </a:xfrm>
-          <a:prstGeom prst="rect">
-            <a:avLst/>
-          </a:prstGeom>
-          <a:noFill/>
-        </p:spPr>
-        <p:txBody>
-          <a:bodyPr wrap="square" lIns="0" rIns="0" tIns="0" bIns="0" anchor="b">
-            <a:spAutoFit/>
-          </a:bodyPr>
-          <a:lstStyle/>
-          <a:p>
-            <a:pPr algn="ctr">
-              <a:lnSpc>
-                <a:spcPct val="100000"/>
-              </a:lnSpc>
-            </a:pPr>
-            <a:r>
-              <a:rPr sz="1500" b="1">
-                <a:solidFill>
-                  <a:srgbClr val="16241F"/>
-                </a:solidFill>
-                <a:latin typeface="Calibri"/>
-              </a:rPr>
-              <a:t>Questions</a:t>
-            </a:r>
-          </a:p>
-        </p:txBody>
-      </p:sp>
-      <p:sp>
-        <p:nvSpPr>
-          <p:cNvPr id="26" name="block"/>
-          <p:cNvSpPr/>
-          <p:nvPr/>
-        </p:nvSpPr>
-        <p:spPr>
-          <a:xfrm>
-            <a:off x="10274541" y="2240280"/>
-            <a:ext cx="1350225" cy="777240"/>
+            <a:off x="3675887" y="5029200"/>
+            <a:ext cx="4399788" cy="548640"/>
           </a:xfrm>
           <a:prstGeom prst="roundRect">
             <a:avLst>
@@ -20119,20 +25032,33 @@
           <a:bodyPr rtlCol="0" anchor="ctr" wrap="square" lIns="18288" rIns="18288" tIns="115214" bIns="115214"/>
           <a:lstStyle/>
           <a:p>
-            <a:pPr algn="ctr"/>
-          </a:p>
-        </p:txBody>
-      </p:sp>
-      <p:sp>
-        <p:nvSpPr>
-          <p:cNvPr id="27" name="text"/>
+            <a:pPr algn="ctr">
+              <a:lnSpc>
+                <a:spcPct val="100000"/>
+              </a:lnSpc>
+            </a:pPr>
+            <a:r>
+              <a:rPr sz="1600" b="0">
+                <a:solidFill>
+                  <a:srgbClr val="16241F"/>
+                </a:solidFill>
+                <a:latin typeface="Calibri"/>
+              </a:rPr>
+              <a:t>questions, or leave early</a:t>
+            </a:r>
+          </a:p>
+        </p:txBody>
+      </p:sp>
+      <p:sp>
+        <p:nvSpPr>
+          <p:cNvPr id="22" name="text"/>
           <p:cNvSpPr txBox="1"/>
           <p:nvPr/>
         </p:nvSpPr>
         <p:spPr>
           <a:xfrm>
-            <a:off x="9936213" y="3108960"/>
-            <a:ext cx="640080" cy="365760"/>
+            <a:off x="548640" y="5879592"/>
+            <a:ext cx="11094415" cy="457200"/>
           </a:xfrm>
           <a:prstGeom prst="rect">
             <a:avLst/>
@@ -20145,374 +25071,19 @@
           </a:bodyPr>
           <a:lstStyle/>
           <a:p>
-            <a:pPr algn="ctr">
-              <a:lnSpc>
-                <a:spcPct val="100000"/>
-              </a:lnSpc>
-            </a:pPr>
-            <a:r>
-              <a:rPr sz="1400" b="0">
+            <a:pPr algn="l">
+              <a:lnSpc>
+                <a:spcPct val="100000"/>
+              </a:lnSpc>
+            </a:pPr>
+            <a:r>
+              <a:rPr sz="1900" b="0">
                 <a:solidFill>
                   <a:srgbClr val="5B6F68"/>
                 </a:solidFill>
                 <a:latin typeface="Calibri"/>
               </a:rPr>
-              <a:t>1:45</a:t>
-            </a:r>
-          </a:p>
-        </p:txBody>
-      </p:sp>
-      <p:sp>
-        <p:nvSpPr>
-          <p:cNvPr id="28" name="text"/>
-          <p:cNvSpPr txBox="1"/>
-          <p:nvPr/>
-        </p:nvSpPr>
-        <p:spPr>
-          <a:xfrm>
-            <a:off x="11002975" y="3108960"/>
-            <a:ext cx="640080" cy="365760"/>
-          </a:xfrm>
-          <a:prstGeom prst="rect">
-            <a:avLst/>
-          </a:prstGeom>
-          <a:noFill/>
-        </p:spPr>
-        <p:txBody>
-          <a:bodyPr wrap="square" lIns="0" rIns="0" tIns="0" bIns="0" anchor="t">
-            <a:spAutoFit/>
-          </a:bodyPr>
-          <a:lstStyle/>
-          <a:p>
-            <a:pPr algn="r">
-              <a:lnSpc>
-                <a:spcPct val="100000"/>
-              </a:lnSpc>
-            </a:pPr>
-            <a:r>
-              <a:rPr sz="1400" b="0">
-                <a:solidFill>
-                  <a:srgbClr val="5B6F68"/>
-                </a:solidFill>
-                <a:latin typeface="Calibri"/>
-              </a:rPr>
-              <a:t>2:00</a:t>
-            </a:r>
-          </a:p>
-        </p:txBody>
-      </p:sp>
-      <p:sp>
-        <p:nvSpPr>
-          <p:cNvPr id="29" name="block"/>
-          <p:cNvSpPr/>
-          <p:nvPr/>
-        </p:nvSpPr>
-        <p:spPr>
-          <a:xfrm>
-            <a:off x="548640" y="3794760"/>
-            <a:ext cx="457200" cy="320040"/>
-          </a:xfrm>
-          <a:prstGeom prst="roundRect">
-            <a:avLst>
-              <a:gd name="adj" fmla="val 8000"/>
-            </a:avLst>
-          </a:prstGeom>
-          <a:solidFill>
-            <a:srgbClr val="FFFFFF"/>
-          </a:solidFill>
-          <a:ln w="12700">
-            <a:solidFill>
-              <a:srgbClr val="D3CEBF"/>
-            </a:solidFill>
-          </a:ln>
-          <a:effectLst/>
-        </p:spPr>
-        <p:style>
-          <a:lnRef idx="1">
-            <a:schemeClr val="accent1"/>
-          </a:lnRef>
-          <a:fillRef idx="3">
-            <a:schemeClr val="accent1"/>
-          </a:fillRef>
-          <a:effectRef idx="2">
-            <a:schemeClr val="accent1"/>
-          </a:effectRef>
-          <a:fontRef idx="minor">
-            <a:schemeClr val="lt1"/>
-          </a:fontRef>
-        </p:style>
-        <p:txBody>
-          <a:bodyPr rtlCol="0" anchor="ctr" wrap="square" lIns="18288" rIns="18288" tIns="115214" bIns="115214"/>
-          <a:lstStyle/>
-          <a:p>
-            <a:pPr algn="ctr"/>
-          </a:p>
-        </p:txBody>
-      </p:sp>
-      <p:sp>
-        <p:nvSpPr>
-          <p:cNvPr id="30" name="text"/>
-          <p:cNvSpPr txBox="1"/>
-          <p:nvPr/>
-        </p:nvSpPr>
-        <p:spPr>
-          <a:xfrm>
-            <a:off x="1143000" y="3767328"/>
-            <a:ext cx="2011680" cy="365760"/>
-          </a:xfrm>
-          <a:prstGeom prst="rect">
-            <a:avLst/>
-          </a:prstGeom>
-          <a:noFill/>
-        </p:spPr>
-        <p:txBody>
-          <a:bodyPr wrap="square" lIns="0" rIns="0" tIns="0" bIns="0" anchor="t">
-            <a:spAutoFit/>
-          </a:bodyPr>
-          <a:lstStyle/>
-          <a:p>
-            <a:pPr algn="l">
-              <a:lnSpc>
-                <a:spcPct val="100000"/>
-              </a:lnSpc>
-            </a:pPr>
-            <a:r>
-              <a:rPr sz="1600" b="0">
-                <a:solidFill>
-                  <a:srgbClr val="16241F"/>
-                </a:solidFill>
-                <a:latin typeface="Calibri"/>
-              </a:rPr>
-              <a:t>we present</a:t>
-            </a:r>
-          </a:p>
-        </p:txBody>
-      </p:sp>
-      <p:sp>
-        <p:nvSpPr>
-          <p:cNvPr id="31" name="block"/>
-          <p:cNvSpPr/>
-          <p:nvPr/>
-        </p:nvSpPr>
-        <p:spPr>
-          <a:xfrm>
-            <a:off x="3291840" y="3794760"/>
-            <a:ext cx="457200" cy="320040"/>
-          </a:xfrm>
-          <a:prstGeom prst="roundRect">
-            <a:avLst>
-              <a:gd name="adj" fmla="val 8000"/>
-            </a:avLst>
-          </a:prstGeom>
-          <a:solidFill>
-            <a:srgbClr val="E69F00"/>
-          </a:solidFill>
-          <a:ln>
-            <a:noFill/>
-          </a:ln>
-          <a:effectLst/>
-        </p:spPr>
-        <p:style>
-          <a:lnRef idx="1">
-            <a:schemeClr val="accent1"/>
-          </a:lnRef>
-          <a:fillRef idx="3">
-            <a:schemeClr val="accent1"/>
-          </a:fillRef>
-          <a:effectRef idx="2">
-            <a:schemeClr val="accent1"/>
-          </a:effectRef>
-          <a:fontRef idx="minor">
-            <a:schemeClr val="lt1"/>
-          </a:fontRef>
-        </p:style>
-        <p:txBody>
-          <a:bodyPr rtlCol="0" anchor="ctr" wrap="square" lIns="18288" rIns="18288" tIns="115214" bIns="115214"/>
-          <a:lstStyle/>
-          <a:p>
-            <a:pPr algn="ctr"/>
-          </a:p>
-        </p:txBody>
-      </p:sp>
-      <p:sp>
-        <p:nvSpPr>
-          <p:cNvPr id="32" name="text"/>
-          <p:cNvSpPr txBox="1"/>
-          <p:nvPr/>
-        </p:nvSpPr>
-        <p:spPr>
-          <a:xfrm>
-            <a:off x="3886200" y="3767328"/>
-            <a:ext cx="2011680" cy="365760"/>
-          </a:xfrm>
-          <a:prstGeom prst="rect">
-            <a:avLst/>
-          </a:prstGeom>
-          <a:noFill/>
-        </p:spPr>
-        <p:txBody>
-          <a:bodyPr wrap="square" lIns="0" rIns="0" tIns="0" bIns="0" anchor="t">
-            <a:spAutoFit/>
-          </a:bodyPr>
-          <a:lstStyle/>
-          <a:p>
-            <a:pPr algn="l">
-              <a:lnSpc>
-                <a:spcPct val="100000"/>
-              </a:lnSpc>
-            </a:pPr>
-            <a:r>
-              <a:rPr sz="1600" b="0">
-                <a:solidFill>
-                  <a:srgbClr val="16241F"/>
-                </a:solidFill>
-                <a:latin typeface="Calibri"/>
-              </a:rPr>
-              <a:t>you code</a:t>
-            </a:r>
-          </a:p>
-        </p:txBody>
-      </p:sp>
-      <p:sp>
-        <p:nvSpPr>
-          <p:cNvPr id="33" name="block"/>
-          <p:cNvSpPr/>
-          <p:nvPr/>
-        </p:nvSpPr>
-        <p:spPr>
-          <a:xfrm>
-            <a:off x="6035040" y="3794760"/>
-            <a:ext cx="457200" cy="320040"/>
-          </a:xfrm>
-          <a:prstGeom prst="roundRect">
-            <a:avLst>
-              <a:gd name="adj" fmla="val 8000"/>
-            </a:avLst>
-          </a:prstGeom>
-          <a:noFill/>
-          <a:ln w="15875">
-            <a:solidFill>
-              <a:srgbClr val="5B6F68"/>
-            </a:solidFill>
-            <a:prstDash val="dash"/>
-          </a:ln>
-          <a:effectLst/>
-        </p:spPr>
-        <p:style>
-          <a:lnRef idx="1">
-            <a:schemeClr val="accent1"/>
-          </a:lnRef>
-          <a:fillRef idx="3">
-            <a:schemeClr val="accent1"/>
-          </a:fillRef>
-          <a:effectRef idx="2">
-            <a:schemeClr val="accent1"/>
-          </a:effectRef>
-          <a:fontRef idx="minor">
-            <a:schemeClr val="lt1"/>
-          </a:fontRef>
-        </p:style>
-        <p:txBody>
-          <a:bodyPr rtlCol="0" anchor="ctr" wrap="square" lIns="18288" rIns="18288" tIns="115214" bIns="115214"/>
-          <a:lstStyle/>
-          <a:p>
-            <a:pPr algn="ctr"/>
-          </a:p>
-        </p:txBody>
-      </p:sp>
-      <p:sp>
-        <p:nvSpPr>
-          <p:cNvPr id="34" name="text"/>
-          <p:cNvSpPr txBox="1"/>
-          <p:nvPr/>
-        </p:nvSpPr>
-        <p:spPr>
-          <a:xfrm>
-            <a:off x="6629400" y="3767328"/>
-            <a:ext cx="2011680" cy="365760"/>
-          </a:xfrm>
-          <a:prstGeom prst="rect">
-            <a:avLst/>
-          </a:prstGeom>
-          <a:noFill/>
-        </p:spPr>
-        <p:txBody>
-          <a:bodyPr wrap="square" lIns="0" rIns="0" tIns="0" bIns="0" anchor="t">
-            <a:spAutoFit/>
-          </a:bodyPr>
-          <a:lstStyle/>
-          <a:p>
-            <a:pPr algn="l">
-              <a:lnSpc>
-                <a:spcPct val="100000"/>
-              </a:lnSpc>
-            </a:pPr>
-            <a:r>
-              <a:rPr sz="1600" b="0">
-                <a:solidFill>
-                  <a:srgbClr val="16241F"/>
-                </a:solidFill>
-                <a:latin typeface="Calibri"/>
-              </a:rPr>
-              <a:t>yours</a:t>
-            </a:r>
-          </a:p>
-        </p:txBody>
-      </p:sp>
-      <p:sp>
-        <p:nvSpPr>
-          <p:cNvPr id="35" name="text"/>
-          <p:cNvSpPr txBox="1"/>
-          <p:nvPr/>
-        </p:nvSpPr>
-        <p:spPr>
-          <a:xfrm>
-            <a:off x="548640" y="4526280"/>
-            <a:ext cx="11094415" cy="1463040"/>
-          </a:xfrm>
-          <a:prstGeom prst="rect">
-            <a:avLst/>
-          </a:prstGeom>
-          <a:noFill/>
-        </p:spPr>
-        <p:txBody>
-          <a:bodyPr wrap="square" lIns="0" rIns="0" tIns="0" bIns="0" anchor="t">
-            <a:spAutoFit/>
-          </a:bodyPr>
-          <a:lstStyle/>
-          <a:p>
-            <a:pPr algn="l">
-              <a:lnSpc>
-                <a:spcPct val="100000"/>
-              </a:lnSpc>
-              <a:spcAft>
-                <a:spcPts val="1000"/>
-              </a:spcAft>
-            </a:pPr>
-            <a:r>
-              <a:rPr sz="1900" b="0">
-                <a:solidFill>
-                  <a:srgbClr val="16241F"/>
-                </a:solidFill>
-                <a:latin typeface="Calibri"/>
-              </a:rPr>
-              <a:t>Each task opens with a short brief. Then the room codes for 15 minutes while a timer runs, and we finish by discussing what we've just built.</a:t>
-            </a:r>
-          </a:p>
-          <a:p>
-            <a:pPr algn="l">
-              <a:lnSpc>
-                <a:spcPct val="100000"/>
-              </a:lnSpc>
-            </a:pPr>
-            <a:r>
-              <a:rPr sz="1900" b="0">
-                <a:solidFill>
-                  <a:srgbClr val="16241F"/>
-                </a:solidFill>
-                <a:latin typeface="Calibri"/>
-              </a:rPr>
-              <a:t>The last part is yours: questions, discussion, or leave early.</a:t>
+              <a:t>While you code, a 15-minute timer stays on the screen.</a:t>
             </a:r>
           </a:p>
         </p:txBody>
@@ -20650,11 +25221,11 @@
         <p:spPr>
           <a:xfrm>
             <a:off x="548640" y="1325880"/>
-            <a:ext cx="5410047" cy="1691640"/>
+            <a:ext cx="5410047" cy="1783080"/>
           </a:xfrm>
           <a:prstGeom prst="roundRect">
             <a:avLst>
-              <a:gd name="adj" fmla="val 6486"/>
+              <a:gd name="adj" fmla="val 6153"/>
             </a:avLst>
           </a:prstGeom>
           <a:solidFill>
@@ -20732,7 +25303,7 @@
                 </a:solidFill>
                 <a:latin typeface="Calibri"/>
               </a:rPr>
-              <a:t> for you to write. Everything else is already written.</a:t>
+              <a:t> for you to write. We've written the rest, so you can focus on the key concepts without worrying about the Python. Some bonus exercises ask you to write your own.</a:t>
             </a:r>
           </a:p>
         </p:txBody>
@@ -20746,11 +25317,11 @@
         <p:spPr>
           <a:xfrm>
             <a:off x="6233007" y="1325880"/>
-            <a:ext cx="5410047" cy="1691640"/>
+            <a:ext cx="5410047" cy="1783080"/>
           </a:xfrm>
           <a:prstGeom prst="roundRect">
             <a:avLst>
-              <a:gd name="adj" fmla="val 6486"/>
+              <a:gd name="adj" fmla="val 6153"/>
             </a:avLst>
           </a:prstGeom>
           <a:solidFill>
@@ -20794,7 +25365,7 @@
                 </a:solidFill>
                 <a:latin typeface="Calibri"/>
               </a:rPr>
-              <a:t>Hints on a timer</a:t>
+              <a:t>Hints when you need them</a:t>
             </a:r>
           </a:p>
           <a:p>
@@ -20810,7 +25381,7 @@
                 </a:solidFill>
                 <a:latin typeface="Calibri"/>
               </a:rPr>
-              <a:t>Hints arrive in the chat as the timer runs. The reference solution sits collapsed under them, and using it is absolutely fine.</a:t>
+              <a:t>Each task has two hints and a reference solution, collapsed below the code cell. Open them whenever you like, and using them is absolutely fine.</a:t>
             </a:r>
           </a:p>
         </p:txBody>
@@ -20823,12 +25394,12 @@
         </p:nvSpPr>
         <p:spPr>
           <a:xfrm>
-            <a:off x="548640" y="3291839"/>
-            <a:ext cx="5410047" cy="1691640"/>
+            <a:off x="548640" y="3383280"/>
+            <a:ext cx="5410047" cy="1783080"/>
           </a:xfrm>
           <a:prstGeom prst="roundRect">
             <a:avLst>
-              <a:gd name="adj" fmla="val 6486"/>
+              <a:gd name="adj" fmla="val 6153"/>
             </a:avLst>
           </a:prstGeom>
           <a:solidFill>
@@ -20901,12 +25472,12 @@
         </p:nvSpPr>
         <p:spPr>
           <a:xfrm>
-            <a:off x="6233007" y="3291839"/>
-            <a:ext cx="5410047" cy="1691640"/>
+            <a:off x="6233007" y="3383280"/>
+            <a:ext cx="5410047" cy="1783080"/>
           </a:xfrm>
           <a:prstGeom prst="roundRect">
             <a:avLst>
-              <a:gd name="adj" fmla="val 6486"/>
+              <a:gd name="adj" fmla="val 6153"/>
             </a:avLst>
           </a:prstGeom>
           <a:solidFill>
@@ -20979,7 +25550,7 @@
         </p:nvSpPr>
         <p:spPr>
           <a:xfrm>
-            <a:off x="548640" y="5349240"/>
+            <a:off x="548640" y="5532120"/>
             <a:ext cx="11094415" cy="822960"/>
           </a:xfrm>
           <a:prstGeom prst="rect">
@@ -23189,7 +27760,7 @@
                 </a:solidFill>
                 <a:latin typeface="Calibri"/>
               </a:rPr>
-              <a:t>Hints come in chat on a timer</a:t>
+              <a:t>Hints are below the cell</a:t>
             </a:r>
           </a:p>
         </p:txBody>

--- a/deck/cpomdp_symposium_2026.pptx
+++ b/deck/cpomdp_symposium_2026.pptx
@@ -690,19 +690,43 @@
           <a:lstStyle/>
           <a:p>
             <a:r>
-              <a:t>Planned at 0:31. Keyboard shows what the cell printed. The rocket is LQR, and lands 0.13 from the pad.</a:t>
+              <a:t>Planned at 0:31. Kev invites participants to compare their results with the reference route and spread. The rocket is LQR, and lands 0.13 from the pad.</a:t>
             </a:r>
           </a:p>
           <a:p/>
           <a:p>
             <a:r>
-              <a:t>The probe compares the information each of the nine compass moves is expected to give. spread = 0.000000 nats, so no move gives more than any other. Every spread in the chat should read zero, whatever the bonuses changed.</a:t>
+              <a:t>Ask what a spread of zero tells us. Then ask those who tried the bonus exercises what changed and what stayed the same. Give participants time to discuss before explaining the result.</a:t>
             </a:r>
           </a:p>
           <a:p/>
           <a:p>
             <a:r>
-              <a:t>Then poll 1 for 60 s. Kev reads the split.</a:t>
+              <a:t>The probe compares the information each of the nine compass moves is expected to give. spread = 0.000000 nats, so no move gives more than any other. Zero spread does not mean zero information gain. The bonus changes can alter the amount of information gained, while the spread remains zero.</a:t>
+            </a:r>
+          </a:p>
+          <a:p/>
+          <a:p>
+            <a:r>
+              <a:t>Then poll 1 for 60 seconds. Kev reads the split. Use the following slide to introduce how position-dependent sensor noise can make expected information gain differ between moves.</a:t>
+            </a:r>
+          </a:p>
+          <a:p/>
+          <a:p>
+            <a:r>
+              <a:t>After the poll, connect the result to what we call the Koudahl collapse. Koudahl, Kouw and de Vries (2021) show that, for the linear Gaussian models and full expected free energy (EFE) objective they analyse, EFE reduces to the KL-control objective plus a constant determined by observation noise. Minimising EFE therefore supplies no purposeful exploratory (epistemic) drive in that setting.</a:t>
+            </a:r>
+          </a:p>
+          <a:p/>
+          <a:p>
+            <a:r>
+              <a:t>Here, with fixed sensor noise and additive controls, every candidate move has the same expected information gain. The epistemic contribution cannot favour one move over another, which is why spread is zero. Zero spread does not mean zero information gain.</a:t>
+            </a:r>
+          </a:p>
+          <a:p/>
+          <a:p>
+            <a:r>
+              <a:t>Reference: Koudahl, M. T., Kouw, W. M. and de Vries, B. (2021). On Epistemics in Expected Free Energy for Linear Gaussian State Space Models. Entropy. https://doi.org/10.3390/e23121565</a:t>
             </a:r>
           </a:p>
           <a:p/>
@@ -817,25 +841,67 @@
           <a:lstStyle/>
           <a:p>
             <a:r>
-              <a:t>Kev. If you've built a continuous active inference agent and watched it behave like a controller, you didn't do anything wrong.</a:t>
+              <a:t>R describes the noise in the sensor readings. Writing R(x) means that this noise depends on the rocket’s position.</a:t>
             </a:r>
           </a:p>
           <a:p/>
           <a:p>
             <a:r>
-              <a:t>The Kalman filter's uncertainty after a reading depends on the noise and the uncertainty before it, never on the move or the position. With the same noise everywhere, every move leaves the rocket equally uncertain, so the information term is the same for all of them. What's left of expected free energy is LQR. Koudahl, Kouw and de Vries published that result in 2021.</a:t>
+              <a:t>Near the beacon, readings are clearer. By moving towards it, the rocket can obtain a more informative measurement and reduce its uncertainty about where it is. Movement can therefore affect both progress towards the goal and what the rocket learns.</a:t>
             </a:r>
           </a:p>
           <a:p/>
           <a:p>
             <a:r>
-              <a:t>Bonus 2 asked whether unequal noise across the axes would change that. It changes how much each reading tells the rocket, but not the spread between moves, because the noise is still fixed in place. That's the bridge to Task 2.</a:t>
+              <a:t>This expected reduction in uncertainty is called epistemic value. With our sensor model, some moves can offer more information than others.</a:t>
             </a:r>
           </a:p>
           <a:p/>
           <a:p>
             <a:r>
-              <a:t>The rest of the session changes one thing. The noise depends on where the rocket is.</a:t>
+              <a:t>State-dependent sensory precision has a history in active inference. Dan’s contribution establishes conditions under which it makes epistemic value depend on action and rules out an equivalent fixed linear-Gaussian filter.</a:t>
+            </a:r>
+          </a:p>
+          <a:p/>
+          <a:p>
+            <a:r>
+              <a:t>The mean dynamics and observation map remain linear, and the conditional noise distributions remain Gaussian. However, the joint model is no longer fully Gaussian.</a:t>
+            </a:r>
+          </a:p>
+          <a:p/>
+          <a:p>
+            <a:r>
+              <a:t>Tasks 2 and 3 explore this mechanism. Whether it changes the chosen route also depends on the objective and planning horizon.</a:t>
+            </a:r>
+          </a:p>
+          <a:p/>
+          <a:p>
+            <a:r>
+              <a:t>R(x) is one route to action-dependent information gain. Another modelling choice is multiplicative control, where an action selects the dynamics governing how the state evolves. Koudahl, Kouw and de Vries show that this can produce exploration when the epistemic term is optimised on its own. Their full EFE objective still reduces to KL control plus a constant, so these results concern different objective choices.</a:t>
+            </a:r>
+          </a:p>
+          <a:p/>
+          <a:p>
+            <a:r>
+              <a:t>A biological illustration of actions changing dynamics is muscle co-contraction. Activating opposing muscles together can increase joint stiffness with little change in net torque. The limb then responds differently to the same disturbance. In a simplified model, muscle activation changes the stiffness multiplying the displacement, which can be represented using multiplicative control. This illustrates a change in dynamics; it does not by itself demonstrate information-seeking behaviour. We use R(x) in the workshop because the beacon and blackout change the reliability of observations across locations.</a:t>
+            </a:r>
+          </a:p>
+          <a:p/>
+          <a:p>
+            <a:r>
+              <a:t>Reference: Corva, D. (2026). State-Dependent Observation Noise Reintroduces Epistemic Value in Linear-Gaussian Active Inference. Sections 2.3 and 3, Theorem 1. https://arxiv.org/abs/2607.20306</a:t>
+            </a:r>
+          </a:p>
+          <a:p/>
+          <a:p>
+            <a:r>
+              <a:t>Further references: Koudahl, M. T., Kouw, W. M. and de Vries, B. (2021). On Epistemics in Expected Free Energy for Linear Gaussian State Space Models. https://doi.org/10.3390/e23121565</a:t>
+            </a:r>
+          </a:p>
+          <a:p/>
+          <a:p>
+            <a:r>
+              <a:t>Franklin, D. W. et al. (2007). Endpoint Stiffness of the Arm Is Directionally Tuned to Instability in the Environment. https://pmc.ncbi.nlm.nih.gov/articles/PMC6672883/</a:t>
             </a:r>
           </a:p>
         </p:txBody>
@@ -2835,13 +2901,13 @@
           <a:lstStyle/>
           <a:p>
             <a:r>
-              <a:t>Keyboard. Each task has two lines to write, and we've written the rest of the code, so the Python stays out of the way. Some of the bonus exercises ask you to write your own.</a:t>
+              <a:t>Keyboard. Each task has two lines to write, and we have written the rest of the code, so the Python stays out of the way. Some of the bonus exercises ask you to write your own.</a:t>
             </a:r>
           </a:p>
           <a:p/>
           <a:p>
             <a:r>
-              <a:t>Each task has two hints and a reference solution, collapsed below the cell. A hint shows its nudge first, and the line itself is behind Show code. Open them whenever you like, and using them isn't failing.</a:t>
+              <a:t>Each task has two hints and a reference solution, collapsed below the cell. A hint shows its nudge first, and the line itself is behind Show code. Open them whenever you like, and using them is not failing.</a:t>
             </a:r>
           </a:p>
           <a:p/>
@@ -2853,7 +2919,7 @@
           <a:p/>
           <a:p>
             <a:r>
-              <a:t>Each task closes with one number in the chat. It lets us see how the room is doing without anyone writing a sentence. Then there's a one-minute poll.</a:t>
+              <a:t>Each task closes with one number in the chat. It lets us see how the room is doing without anyone writing a sentence. Then there is a one-minute poll.</a:t>
             </a:r>
           </a:p>
         </p:txBody>
@@ -3005,7 +3071,7 @@
           <a:lstStyle/>
           <a:p>
             <a:r>
-              <a:t>Kev. Before we build anything, here's where we're heading. Run cell 2 and you'll see this picture.</a:t>
+              <a:t>Kev. Introduce the preview before beginning the tasks. Run the second code cell, then ask: What makes these rockets take different routes?</a:t>
             </a:r>
           </a:p>
           <a:p/>
@@ -3017,7 +3083,7 @@
           <a:p/>
           <a:p>
             <a:r>
-              <a:t>Don't worry if you can't explain it yet. Neither rocket knows the rock is there, and working out what's going on is what the three tasks are for.</a:t>
+              <a:t>Do not worry if you cannot explain it yet. Neither rocket knows the rock is there, and working out what is going on is what the three tasks are for.</a:t>
             </a:r>
           </a:p>
         </p:txBody>
@@ -3093,19 +3159,19 @@
           <a:p/>
           <a:p>
             <a:r>
-              <a:t>Our first rocket is the classic one. A Kalman filter estimates its position from noisy readings, and a linear quadratic regulator steers it to the pad. Its sensor is equally reliable everywhere. So does every move give the rocket the same amount of information? Hold that question.</a:t>
+              <a:t>Our first rocket is the classic one. A Kalman filter estimates its position from noisy readings, and a linear quadratic regulator steers it to the pad. Its sensor has the same level of noise everywhere. Are all possible moves equally informative? Hold that question.</a:t>
             </a:r>
           </a:p>
           <a:p/>
           <a:p>
             <a:r>
-              <a:t>If you know pymdp, the cards map its letters onto cpomdp's fields. A is the observation likelihood. In cpomdp that's the observation_matrix together with the observation_noise, R, because the noise is part of what a reading says about the state. B is the transition, so dynamics_matrix, with control_matrix for where a move enters. C is the preference, which we meet in Task 2 as Preference. D is the prior.</a:t>
+              <a:t>If you know pymdp, the cards map its letters onto cpomdp's fields. A is the observation likelihood. In cpomdp that is the observation_matrix together with the observation_noise, R, because the noise is part of what a reading says about the state. B is the transition, so dynamics_matrix, with control_matrix for where a move enters. C is the preference, which we meet in Task 2 as Preference. D is the prior.</a:t>
             </a:r>
           </a:p>
           <a:p/>
           <a:p>
             <a:r>
-              <a:t>The 1960 rocket's StateGoal has no pymdp letter. It's a goal over states with a thruster cost, which is what makes it an LQR controller.</a:t>
+              <a:t>The 1960 rocket's StateGoal has no pymdp letter. It is a goal over states with a thruster cost, which is what makes it an LQR controller.</a:t>
             </a:r>
           </a:p>
         </p:txBody>
@@ -7505,7 +7571,7 @@
                 </a:solidFill>
                 <a:latin typeface="Calibri"/>
               </a:rPr>
-              <a:t>The 1960 rocket flies the straight line</a:t>
+              <a:t>Task 1 · Discussion</a:t>
             </a:r>
           </a:p>
         </p:txBody>
@@ -7595,321 +7661,222 @@
       </p:pic>
       <p:sp>
         <p:nvSpPr>
-          <p:cNvPr id="5" name="printed"/>
-          <p:cNvSpPr/>
-          <p:nvPr/>
-        </p:nvSpPr>
-        <p:spPr>
-          <a:xfrm>
-            <a:off x="548640" y="5468112"/>
-            <a:ext cx="7680960" cy="886968"/>
-          </a:xfrm>
-          <a:prstGeom prst="roundRect">
-            <a:avLst>
-              <a:gd name="adj" fmla="val 8000"/>
-            </a:avLst>
-          </a:prstGeom>
-          <a:noFill/>
-          <a:ln w="12700">
-            <a:solidFill>
-              <a:srgbClr val="D3CEBF"/>
-            </a:solidFill>
-          </a:ln>
-          <a:effectLst/>
-        </p:spPr>
-        <p:style>
-          <a:lnRef idx="1">
-            <a:schemeClr val="accent1"/>
-          </a:lnRef>
-          <a:fillRef idx="3">
-            <a:schemeClr val="accent1"/>
-          </a:fillRef>
-          <a:effectRef idx="2">
-            <a:schemeClr val="accent1"/>
-          </a:effectRef>
-          <a:fontRef idx="minor">
-            <a:schemeClr val="lt1"/>
-          </a:fontRef>
-        </p:style>
-        <p:txBody>
-          <a:bodyPr rtlCol="0" anchor="ctr" wrap="square" lIns="164592" rIns="164592" tIns="115214" bIns="115214"/>
-          <a:lstStyle/>
-          <a:p>
-            <a:pPr algn="l">
-              <a:lnSpc>
-                <a:spcPct val="100000"/>
-              </a:lnSpc>
-              <a:spcAft>
-                <a:spcPts val="0"/>
-              </a:spcAft>
-            </a:pPr>
-            <a:r>
-              <a:rPr sz="1100" b="0">
-                <a:solidFill>
-                  <a:srgbClr val="16241F"/>
-                </a:solidFill>
-                <a:latin typeface="Courier New"/>
-              </a:rPr>
-              <a:t>Agent(objective=StateGoal, selector=LQRSelector(controller=LQRController(gain=[[0.0951, 0.0], [0.0, 0.0951]])), backend=KalmanBackend)</a:t>
-            </a:r>
-          </a:p>
-          <a:p>
-            <a:pPr algn="l">
-              <a:lnSpc>
-                <a:spcPct val="100000"/>
-              </a:lnSpc>
-              <a:spcAft>
-                <a:spcPts val="0"/>
-              </a:spcAft>
-            </a:pPr>
-            <a:r>
-              <a:rPr sz="1100" b="0">
-                <a:solidFill>
-                  <a:srgbClr val="16241F"/>
-                </a:solidFill>
-                <a:latin typeface="Courier New"/>
-              </a:rPr>
-              <a:t>after 36 moves it is at (4.87, 0.04), 0.13 from the pad</a:t>
-            </a:r>
-          </a:p>
-          <a:p>
-            <a:pPr algn="l">
-              <a:lnSpc>
-                <a:spcPct val="100000"/>
-              </a:lnSpc>
-            </a:pPr>
-            <a:r>
-              <a:rPr sz="1100" b="0">
-                <a:solidFill>
-                  <a:srgbClr val="16241F"/>
-                </a:solidFill>
-                <a:latin typeface="Courier New"/>
-              </a:rPr>
-              <a:t>epistemic_varies = False   flattens = True   spread = 0.000000 nats</a:t>
-            </a:r>
-          </a:p>
-        </p:txBody>
-      </p:sp>
-      <p:sp>
-        <p:nvSpPr>
-          <p:cNvPr id="6" name="card"/>
-          <p:cNvSpPr/>
+          <p:cNvPr id="9" name="text"/>
+          <p:cNvSpPr txBox="1"/>
           <p:nvPr/>
         </p:nvSpPr>
         <p:spPr>
           <a:xfrm>
             <a:off x="8503920" y="1325880"/>
-            <a:ext cx="3139135" cy="2697480"/>
+            <a:ext cx="3139135" cy="320040"/>
           </a:xfrm>
-          <a:prstGeom prst="roundRect">
-            <a:avLst>
-              <a:gd name="adj" fmla="val 4067"/>
-            </a:avLst>
+          <a:prstGeom prst="rect">
+            <a:avLst/>
           </a:prstGeom>
-          <a:solidFill>
-            <a:srgbClr val="FFFFFF"/>
-          </a:solidFill>
-          <a:ln>
-            <a:noFill/>
-          </a:ln>
-          <a:effectLst/>
+          <a:noFill/>
         </p:spPr>
-        <p:style>
-          <a:lnRef idx="1">
-            <a:schemeClr val="accent1"/>
-          </a:lnRef>
-          <a:fillRef idx="3">
-            <a:schemeClr val="accent1"/>
-          </a:fillRef>
-          <a:effectRef idx="2">
-            <a:schemeClr val="accent1"/>
-          </a:effectRef>
-          <a:fontRef idx="minor">
-            <a:schemeClr val="lt1"/>
-          </a:fontRef>
-        </p:style>
-        <p:txBody>
-          <a:bodyPr rtlCol="0" anchor="ctr" wrap="square" lIns="164592" rIns="164592" tIns="115214" bIns="115214"/>
-          <a:lstStyle/>
-          <a:p>
-            <a:pPr algn="l">
-              <a:lnSpc>
-                <a:spcPct val="100000"/>
-              </a:lnSpc>
-              <a:spcAft>
-                <a:spcPts val="600"/>
-              </a:spcAft>
-            </a:pPr>
-            <a:r>
-              <a:rPr sz="1700" b="0">
+        <p:txBody>
+          <a:bodyPr wrap="square" lIns="0" rIns="0" tIns="0" bIns="0" anchor="t">
+            <a:spAutoFit/>
+          </a:bodyPr>
+          <a:lstStyle/>
+          <a:p>
+            <a:pPr algn="l">
+              <a:lnSpc>
+                <a:spcPct val="100000"/>
+              </a:lnSpc>
+            </a:pPr>
+            <a:r>
+              <a:rPr sz="1500" b="0">
                 <a:solidFill>
                   <a:srgbClr val="5B6F68"/>
                 </a:solidFill>
                 <a:latin typeface="Calibri"/>
               </a:rPr>
-              <a:t>spread</a:t>
-            </a:r>
-          </a:p>
-          <a:p>
-            <a:pPr algn="l">
-              <a:lnSpc>
-                <a:spcPct val="100000"/>
-              </a:lnSpc>
-              <a:spcAft>
-                <a:spcPts val="600"/>
-              </a:spcAft>
-            </a:pPr>
-            <a:r>
-              <a:rPr sz="3600" b="1">
-                <a:solidFill>
-                  <a:srgbClr val="16241F"/>
-                </a:solidFill>
-                <a:latin typeface="Courier New"/>
-              </a:rPr>
-              <a:t>0.000000</a:t>
-            </a:r>
-          </a:p>
-          <a:p>
-            <a:pPr algn="l">
-              <a:lnSpc>
-                <a:spcPct val="100000"/>
-              </a:lnSpc>
-            </a:pPr>
-            <a:r>
-              <a:rPr sz="1700" b="0">
-                <a:solidFill>
-                  <a:srgbClr val="16241F"/>
-                </a:solidFill>
-                <a:latin typeface="Calibri"/>
-              </a:rPr>
-              <a:t>nats between the most and the least informative move</a:t>
-            </a:r>
-          </a:p>
-        </p:txBody>
-      </p:sp>
-      <p:sp>
-        <p:nvSpPr>
-          <p:cNvPr id="7" name="card"/>
-          <p:cNvSpPr/>
+              <a:t>Reference result</a:t>
+            </a:r>
+          </a:p>
+        </p:txBody>
+      </p:sp>
+      <p:sp>
+        <p:nvSpPr>
+          <p:cNvPr id="10" name="text"/>
+          <p:cNvSpPr txBox="1"/>
           <p:nvPr/>
         </p:nvSpPr>
         <p:spPr>
           <a:xfrm>
-            <a:off x="8503920" y="4251960"/>
-            <a:ext cx="3139135" cy="960120"/>
+            <a:off x="8503920" y="1719072"/>
+            <a:ext cx="3139135" cy="457200"/>
           </a:xfrm>
-          <a:prstGeom prst="roundRect">
-            <a:avLst>
-              <a:gd name="adj" fmla="val 8000"/>
-            </a:avLst>
+          <a:prstGeom prst="rect">
+            <a:avLst/>
           </a:prstGeom>
-          <a:solidFill>
-            <a:srgbClr val="FFFFFF"/>
-          </a:solidFill>
-          <a:ln w="12700">
-            <a:solidFill>
-              <a:srgbClr val="E69F00"/>
-            </a:solidFill>
-          </a:ln>
-          <a:effectLst/>
+          <a:noFill/>
         </p:spPr>
-        <p:style>
-          <a:lnRef idx="1">
-            <a:schemeClr val="accent1"/>
-          </a:lnRef>
-          <a:fillRef idx="3">
-            <a:schemeClr val="accent1"/>
-          </a:fillRef>
-          <a:effectRef idx="2">
-            <a:schemeClr val="accent1"/>
-          </a:effectRef>
-          <a:fontRef idx="minor">
-            <a:schemeClr val="lt1"/>
-          </a:fontRef>
-        </p:style>
-        <p:txBody>
-          <a:bodyPr rtlCol="0" anchor="ctr" wrap="square" lIns="164592" rIns="164592" tIns="115214" bIns="115214"/>
-          <a:lstStyle/>
-          <a:p>
-            <a:pPr algn="l">
-              <a:lnSpc>
-                <a:spcPct val="100000"/>
-              </a:lnSpc>
-              <a:spcAft>
-                <a:spcPts val="200"/>
-              </a:spcAft>
-            </a:pPr>
-            <a:r>
-              <a:rPr sz="1700" b="0">
-                <a:solidFill>
-                  <a:srgbClr val="5B6F68"/>
-                </a:solidFill>
-                <a:latin typeface="Calibri"/>
-              </a:rPr>
-              <a:t>Paste in chat</a:t>
-            </a:r>
-          </a:p>
-          <a:p>
-            <a:pPr algn="l">
-              <a:lnSpc>
-                <a:spcPct val="100000"/>
-              </a:lnSpc>
-            </a:pPr>
-            <a:r>
-              <a:rPr sz="1700" b="0">
+        <p:txBody>
+          <a:bodyPr wrap="square" lIns="0" rIns="0" tIns="0" bIns="0" anchor="t">
+            <a:spAutoFit/>
+          </a:bodyPr>
+          <a:lstStyle/>
+          <a:p>
+            <a:pPr algn="l">
+              <a:lnSpc>
+                <a:spcPct val="100000"/>
+              </a:lnSpc>
+            </a:pPr>
+            <a:r>
+              <a:rPr sz="1800" b="1">
                 <a:solidFill>
                   <a:srgbClr val="16241F"/>
                 </a:solidFill>
                 <a:latin typeface="Courier New"/>
               </a:rPr>
-              <a:t>spread</a:t>
-            </a:r>
-          </a:p>
-        </p:txBody>
-      </p:sp>
-      <p:sp>
-        <p:nvSpPr>
-          <p:cNvPr id="8" name="pill"/>
-          <p:cNvSpPr/>
+              <a:t>spread = 0.000000 nats</a:t>
+            </a:r>
+          </a:p>
+        </p:txBody>
+      </p:sp>
+      <p:sp>
+        <p:nvSpPr>
+          <p:cNvPr id="11" name="text"/>
+          <p:cNvSpPr txBox="1"/>
           <p:nvPr/>
         </p:nvSpPr>
         <p:spPr>
           <a:xfrm>
-            <a:off x="8503920" y="5468112"/>
-            <a:ext cx="3139135" cy="502920"/>
+            <a:off x="8503920" y="2286000"/>
+            <a:ext cx="3139135" cy="1051560"/>
           </a:xfrm>
-          <a:prstGeom prst="roundRect">
-            <a:avLst>
-              <a:gd name="adj" fmla="val 8000"/>
-            </a:avLst>
+          <a:prstGeom prst="rect">
+            <a:avLst/>
           </a:prstGeom>
           <a:noFill/>
-          <a:ln w="12700">
-            <a:solidFill>
-              <a:srgbClr val="D3CEBF"/>
-            </a:solidFill>
-          </a:ln>
-          <a:effectLst/>
         </p:spPr>
-        <p:style>
-          <a:lnRef idx="1">
-            <a:schemeClr val="accent1"/>
-          </a:lnRef>
-          <a:fillRef idx="3">
-            <a:schemeClr val="accent1"/>
-          </a:fillRef>
-          <a:effectRef idx="2">
-            <a:schemeClr val="accent1"/>
-          </a:effectRef>
-          <a:fontRef idx="minor">
-            <a:schemeClr val="lt1"/>
-          </a:fontRef>
-        </p:style>
-        <p:txBody>
-          <a:bodyPr rtlCol="0" anchor="ctr" wrap="square" lIns="73152" rIns="73152" tIns="18288" bIns="18288"/>
-          <a:lstStyle/>
-          <a:p>
-            <a:pPr algn="ctr">
+        <p:txBody>
+          <a:bodyPr wrap="square" lIns="0" rIns="0" tIns="0" bIns="0" anchor="t">
+            <a:spAutoFit/>
+          </a:bodyPr>
+          <a:lstStyle/>
+          <a:p>
+            <a:pPr algn="l">
+              <a:lnSpc>
+                <a:spcPct val="100000"/>
+              </a:lnSpc>
+            </a:pPr>
+            <a:r>
+              <a:rPr sz="1700" b="0">
+                <a:solidFill>
+                  <a:srgbClr val="5B6F68"/>
+                </a:solidFill>
+                <a:latin typeface="Calibri"/>
+              </a:rPr>
+              <a:t>The difference between the highest and lowest expected information gain across the possible moves.</a:t>
+            </a:r>
+          </a:p>
+        </p:txBody>
+      </p:sp>
+      <p:sp>
+        <p:nvSpPr>
+          <p:cNvPr id="12" name="text"/>
+          <p:cNvSpPr txBox="1"/>
+          <p:nvPr/>
+        </p:nvSpPr>
+        <p:spPr>
+          <a:xfrm>
+            <a:off x="8503920" y="3566160"/>
+            <a:ext cx="3139135" cy="685800"/>
+          </a:xfrm>
+          <a:prstGeom prst="rect">
+            <a:avLst/>
+          </a:prstGeom>
+          <a:noFill/>
+        </p:spPr>
+        <p:txBody>
+          <a:bodyPr wrap="square" lIns="0" rIns="0" tIns="0" bIns="0" anchor="t">
+            <a:spAutoFit/>
+          </a:bodyPr>
+          <a:lstStyle/>
+          <a:p>
+            <a:pPr algn="l">
+              <a:lnSpc>
+                <a:spcPct val="100000"/>
+              </a:lnSpc>
+            </a:pPr>
+            <a:r>
+              <a:rPr sz="2000" b="1">
+                <a:solidFill>
+                  <a:srgbClr val="16241F"/>
+                </a:solidFill>
+                <a:latin typeface="Calibri"/>
+              </a:rPr>
+              <a:t>What does a spread of zero tell us?</a:t>
+            </a:r>
+          </a:p>
+        </p:txBody>
+      </p:sp>
+      <p:sp>
+        <p:nvSpPr>
+          <p:cNvPr id="13" name="text"/>
+          <p:cNvSpPr txBox="1"/>
+          <p:nvPr/>
+        </p:nvSpPr>
+        <p:spPr>
+          <a:xfrm>
+            <a:off x="8503920" y="4434840"/>
+            <a:ext cx="3139135" cy="1280160"/>
+          </a:xfrm>
+          <a:prstGeom prst="rect">
+            <a:avLst/>
+          </a:prstGeom>
+          <a:noFill/>
+        </p:spPr>
+        <p:txBody>
+          <a:bodyPr wrap="square" lIns="0" rIns="0" tIns="0" bIns="0" anchor="t">
+            <a:spAutoFit/>
+          </a:bodyPr>
+          <a:lstStyle/>
+          <a:p>
+            <a:pPr algn="l">
+              <a:lnSpc>
+                <a:spcPct val="100000"/>
+              </a:lnSpc>
+            </a:pPr>
+            <a:r>
+              <a:rPr sz="1900" b="1">
+                <a:solidFill>
+                  <a:srgbClr val="16241F"/>
+                </a:solidFill>
+                <a:latin typeface="Calibri"/>
+              </a:rPr>
+              <a:t>If you tried the bonus exercises, what changed and what stayed the same?</a:t>
+            </a:r>
+          </a:p>
+        </p:txBody>
+      </p:sp>
+      <p:sp>
+        <p:nvSpPr>
+          <p:cNvPr id="14" name="text"/>
+          <p:cNvSpPr txBox="1"/>
+          <p:nvPr/>
+        </p:nvSpPr>
+        <p:spPr>
+          <a:xfrm>
+            <a:off x="8503920" y="6080760"/>
+            <a:ext cx="3139135" cy="320040"/>
+          </a:xfrm>
+          <a:prstGeom prst="rect">
+            <a:avLst/>
+          </a:prstGeom>
+          <a:noFill/>
+        </p:spPr>
+        <p:txBody>
+          <a:bodyPr wrap="square" lIns="0" rIns="0" tIns="0" bIns="0" anchor="t">
+            <a:spAutoFit/>
+          </a:bodyPr>
+          <a:lstStyle/>
+          <a:p>
+            <a:pPr algn="l">
               <a:lnSpc>
                 <a:spcPct val="100000"/>
               </a:lnSpc>
@@ -7921,7 +7888,7 @@
                 </a:solidFill>
                 <a:latin typeface="Calibri"/>
               </a:rPr>
-              <a:t>Poll 1 · 60 s</a:t>
+              <a:t>Poll 1 · 60 seconds</a:t>
             </a:r>
           </a:p>
         </p:txBody>
@@ -7986,7 +7953,7 @@
                 </a:solidFill>
                 <a:latin typeface="Calibri"/>
               </a:rPr>
-              <a:t>Under a fixed sensor, expected free energy is LQR</a:t>
+              <a:t>Making information gain depend on the action</a:t>
             </a:r>
           </a:p>
         </p:txBody>
@@ -8052,284 +8019,14 @@
       </p:sp>
       <p:sp>
         <p:nvSpPr>
-          <p:cNvPr id="4" name="card"/>
-          <p:cNvSpPr/>
+          <p:cNvPr id="4" name="text"/>
+          <p:cNvSpPr txBox="1"/>
           <p:nvPr/>
         </p:nvSpPr>
         <p:spPr>
           <a:xfrm>
             <a:off x="548640" y="1325880"/>
-            <a:ext cx="5364327" cy="3291840"/>
-          </a:xfrm>
-          <a:prstGeom prst="roundRect">
-            <a:avLst>
-              <a:gd name="adj" fmla="val 3333"/>
-            </a:avLst>
-          </a:prstGeom>
-          <a:solidFill>
-            <a:srgbClr val="FFFFFF"/>
-          </a:solidFill>
-          <a:ln>
-            <a:noFill/>
-          </a:ln>
-          <a:effectLst/>
-        </p:spPr>
-        <p:style>
-          <a:lnRef idx="1">
-            <a:schemeClr val="accent1"/>
-          </a:lnRef>
-          <a:fillRef idx="3">
-            <a:schemeClr val="accent1"/>
-          </a:fillRef>
-          <a:effectRef idx="2">
-            <a:schemeClr val="accent1"/>
-          </a:effectRef>
-          <a:fontRef idx="minor">
-            <a:schemeClr val="lt1"/>
-          </a:fontRef>
-        </p:style>
-        <p:txBody>
-          <a:bodyPr rtlCol="0" anchor="t" wrap="square" lIns="164592" rIns="164592" tIns="115214" bIns="115214"/>
-          <a:lstStyle/>
-          <a:p>
-            <a:pPr algn="l">
-              <a:lnSpc>
-                <a:spcPct val="100000"/>
-              </a:lnSpc>
-              <a:spcAft>
-                <a:spcPts val="1000"/>
-              </a:spcAft>
-            </a:pPr>
-            <a:r>
-              <a:rPr sz="4400" b="1">
-                <a:solidFill>
-                  <a:srgbClr val="16241F"/>
-                </a:solidFill>
-                <a:latin typeface="Courier New"/>
-              </a:rPr>
-              <a:t>R</a:t>
-            </a:r>
-          </a:p>
-          <a:p>
-            <a:pPr algn="l">
-              <a:lnSpc>
-                <a:spcPct val="100000"/>
-              </a:lnSpc>
-              <a:spcAft>
-                <a:spcPts val="1000"/>
-              </a:spcAft>
-            </a:pPr>
-            <a:r>
-              <a:rPr sz="2000" b="0">
-                <a:solidFill>
-                  <a:srgbClr val="5B6F68"/>
-                </a:solidFill>
-                <a:latin typeface="Calibri"/>
-              </a:rPr>
-              <a:t>the 1960 rocket</a:t>
-            </a:r>
-          </a:p>
-          <a:p>
-            <a:pPr algn="l">
-              <a:lnSpc>
-                <a:spcPct val="100000"/>
-              </a:lnSpc>
-              <a:spcAft>
-                <a:spcPts val="1000"/>
-              </a:spcAft>
-            </a:pPr>
-            <a:r>
-              <a:rPr sz="2000" b="0">
-                <a:solidFill>
-                  <a:srgbClr val="16241F"/>
-                </a:solidFill>
-                <a:latin typeface="Calibri"/>
-              </a:rPr>
-              <a:t>The sensor noise is the same everywhere.</a:t>
-            </a:r>
-          </a:p>
-          <a:p>
-            <a:pPr algn="l">
-              <a:lnSpc>
-                <a:spcPct val="100000"/>
-              </a:lnSpc>
-              <a:spcAft>
-                <a:spcPts val="1000"/>
-              </a:spcAft>
-            </a:pPr>
-            <a:r>
-              <a:rPr sz="2000" b="0">
-                <a:solidFill>
-                  <a:srgbClr val="16241F"/>
-                </a:solidFill>
-                <a:latin typeface="Calibri"/>
-              </a:rPr>
-              <a:t>So every move leaves the rocket equally uncertain.</a:t>
-            </a:r>
-          </a:p>
-          <a:p>
-            <a:pPr algn="l">
-              <a:lnSpc>
-                <a:spcPct val="100000"/>
-              </a:lnSpc>
-            </a:pPr>
-            <a:r>
-              <a:rPr sz="2000" b="0">
-                <a:solidFill>
-                  <a:srgbClr val="16241F"/>
-                </a:solidFill>
-                <a:latin typeface="Calibri"/>
-              </a:rPr>
-              <a:t>Expected free energy reduces to LQR.</a:t>
-            </a:r>
-          </a:p>
-        </p:txBody>
-      </p:sp>
-      <p:sp>
-        <p:nvSpPr>
-          <p:cNvPr id="5" name="card"/>
-          <p:cNvSpPr/>
-          <p:nvPr/>
-        </p:nvSpPr>
-        <p:spPr>
-          <a:xfrm>
-            <a:off x="6278727" y="1325880"/>
-            <a:ext cx="5364327" cy="3291840"/>
-          </a:xfrm>
-          <a:prstGeom prst="roundRect">
-            <a:avLst>
-              <a:gd name="adj" fmla="val 3333"/>
-            </a:avLst>
-          </a:prstGeom>
-          <a:solidFill>
-            <a:srgbClr val="FFFFFF"/>
-          </a:solidFill>
-          <a:ln>
-            <a:noFill/>
-          </a:ln>
-          <a:effectLst/>
-        </p:spPr>
-        <p:style>
-          <a:lnRef idx="1">
-            <a:schemeClr val="accent1"/>
-          </a:lnRef>
-          <a:fillRef idx="3">
-            <a:schemeClr val="accent1"/>
-          </a:fillRef>
-          <a:effectRef idx="2">
-            <a:schemeClr val="accent1"/>
-          </a:effectRef>
-          <a:fontRef idx="minor">
-            <a:schemeClr val="lt1"/>
-          </a:fontRef>
-        </p:style>
-        <p:txBody>
-          <a:bodyPr rtlCol="0" anchor="t" wrap="square" lIns="164592" rIns="164592" tIns="115214" bIns="115214"/>
-          <a:lstStyle/>
-          <a:p>
-            <a:pPr algn="l">
-              <a:lnSpc>
-                <a:spcPct val="100000"/>
-              </a:lnSpc>
-              <a:spcAft>
-                <a:spcPts val="1000"/>
-              </a:spcAft>
-            </a:pPr>
-            <a:r>
-              <a:rPr sz="4400" b="1">
-                <a:solidFill>
-                  <a:srgbClr val="8A6000"/>
-                </a:solidFill>
-                <a:latin typeface="Courier New"/>
-              </a:rPr>
-              <a:t>R(x)</a:t>
-            </a:r>
-          </a:p>
-          <a:p>
-            <a:pPr algn="l">
-              <a:lnSpc>
-                <a:spcPct val="100000"/>
-              </a:lnSpc>
-              <a:spcAft>
-                <a:spcPts val="1000"/>
-              </a:spcAft>
-            </a:pPr>
-            <a:r>
-              <a:rPr sz="2000" b="0">
-                <a:solidFill>
-                  <a:srgbClr val="5B6F68"/>
-                </a:solidFill>
-                <a:latin typeface="Calibri"/>
-              </a:rPr>
-              <a:t>a curious rocket</a:t>
-            </a:r>
-          </a:p>
-          <a:p>
-            <a:pPr algn="l">
-              <a:lnSpc>
-                <a:spcPct val="100000"/>
-              </a:lnSpc>
-              <a:spcAft>
-                <a:spcPts val="1000"/>
-              </a:spcAft>
-            </a:pPr>
-            <a:r>
-              <a:rPr sz="2000" b="0">
-                <a:solidFill>
-                  <a:srgbClr val="16241F"/>
-                </a:solidFill>
-                <a:latin typeface="Calibri"/>
-              </a:rPr>
-              <a:t>The sensor noise depends on where the rocket is.</a:t>
-            </a:r>
-          </a:p>
-          <a:p>
-            <a:pPr algn="l">
-              <a:lnSpc>
-                <a:spcPct val="100000"/>
-              </a:lnSpc>
-              <a:spcAft>
-                <a:spcPts val="1000"/>
-              </a:spcAft>
-            </a:pPr>
-            <a:r>
-              <a:rPr sz="2000" b="0">
-                <a:solidFill>
-                  <a:srgbClr val="16241F"/>
-                </a:solidFill>
-                <a:latin typeface="Calibri"/>
-              </a:rPr>
-              <a:t>So where a move lands changes how informative the next reading is.</a:t>
-            </a:r>
-          </a:p>
-          <a:p>
-            <a:pPr algn="l">
-              <a:lnSpc>
-                <a:spcPct val="100000"/>
-              </a:lnSpc>
-            </a:pPr>
-            <a:r>
-              <a:rPr sz="2000" b="0">
-                <a:solidFill>
-                  <a:srgbClr val="16241F"/>
-                </a:solidFill>
-                <a:latin typeface="Calibri"/>
-              </a:rPr>
-              <a:t>Tasks 2 and 3 build it.</a:t>
-            </a:r>
-          </a:p>
-        </p:txBody>
-      </p:sp>
-      <p:sp>
-        <p:nvSpPr>
-          <p:cNvPr id="6" name="text"/>
-          <p:cNvSpPr txBox="1"/>
-          <p:nvPr/>
-        </p:nvSpPr>
-        <p:spPr>
-          <a:xfrm>
-            <a:off x="548640" y="4892040"/>
-            <a:ext cx="11094415" cy="1280160"/>
+            <a:ext cx="11094415" cy="640080"/>
           </a:xfrm>
           <a:prstGeom prst="rect">
             <a:avLst/>
@@ -8346,34 +8043,249 @@
               <a:lnSpc>
                 <a:spcPct val="100000"/>
               </a:lnSpc>
-              <a:spcAft>
-                <a:spcPts val="1000"/>
-              </a:spcAft>
-            </a:pPr>
-            <a:r>
-              <a:rPr sz="2000" b="0">
+            </a:pPr>
+            <a:r>
+              <a:rPr sz="2200" b="0">
                 <a:solidFill>
                   <a:srgbClr val="16241F"/>
                 </a:solidFill>
                 <a:latin typeface="Calibri"/>
               </a:rPr>
-              <a:t>With fixed noise in a linear Gaussian model, the expected information gain is the same for every action, so curiosity can't change what the rocket does.</a:t>
-            </a:r>
-          </a:p>
-          <a:p>
-            <a:pPr algn="l">
-              <a:lnSpc>
-                <a:spcPct val="100000"/>
-              </a:lnSpc>
-            </a:pPr>
-            <a:r>
-              <a:rPr sz="1600" b="0">
+              <a:t>In cpomdp, sensor noise can depend on the rocket’s position: R(x).</a:t>
+            </a:r>
+          </a:p>
+        </p:txBody>
+      </p:sp>
+      <p:sp>
+        <p:nvSpPr>
+          <p:cNvPr id="5" name="text"/>
+          <p:cNvSpPr txBox="1"/>
+          <p:nvPr/>
+        </p:nvSpPr>
+        <p:spPr>
+          <a:xfrm>
+            <a:off x="548640" y="2286000"/>
+            <a:ext cx="11094415" cy="457200"/>
+          </a:xfrm>
+          <a:prstGeom prst="rect">
+            <a:avLst/>
+          </a:prstGeom>
+          <a:noFill/>
+        </p:spPr>
+        <p:txBody>
+          <a:bodyPr wrap="square" lIns="0" rIns="0" tIns="0" bIns="0" anchor="t">
+            <a:spAutoFit/>
+          </a:bodyPr>
+          <a:lstStyle/>
+          <a:p>
+            <a:pPr algn="ctr">
+              <a:lnSpc>
+                <a:spcPct val="100000"/>
+              </a:lnSpc>
+            </a:pPr>
+            <a:r>
+              <a:rPr sz="2400" b="1">
+                <a:solidFill>
+                  <a:srgbClr val="16241F"/>
+                </a:solidFill>
+                <a:latin typeface="Calibri"/>
+              </a:rPr>
+              <a:t>Where the rocket moves</a:t>
+            </a:r>
+          </a:p>
+        </p:txBody>
+      </p:sp>
+      <p:sp>
+        <p:nvSpPr>
+          <p:cNvPr id="6" name="text"/>
+          <p:cNvSpPr txBox="1"/>
+          <p:nvPr/>
+        </p:nvSpPr>
+        <p:spPr>
+          <a:xfrm>
+            <a:off x="548640" y="2834640"/>
+            <a:ext cx="11094415" cy="365760"/>
+          </a:xfrm>
+          <a:prstGeom prst="rect">
+            <a:avLst/>
+          </a:prstGeom>
+          <a:noFill/>
+        </p:spPr>
+        <p:txBody>
+          <a:bodyPr wrap="square" lIns="0" rIns="0" tIns="0" bIns="0" anchor="t">
+            <a:spAutoFit/>
+          </a:bodyPr>
+          <a:lstStyle/>
+          <a:p>
+            <a:pPr algn="ctr">
+              <a:lnSpc>
+                <a:spcPct val="100000"/>
+              </a:lnSpc>
+            </a:pPr>
+            <a:r>
+              <a:rPr sz="2400" b="0">
                 <a:solidFill>
                   <a:srgbClr val="5B6F68"/>
                 </a:solidFill>
                 <a:latin typeface="Calibri"/>
               </a:rPr>
-              <a:t>Koudahl, Kouw &amp; de Vries, 2021</a:t>
+              <a:t>↓</a:t>
+            </a:r>
+          </a:p>
+        </p:txBody>
+      </p:sp>
+      <p:sp>
+        <p:nvSpPr>
+          <p:cNvPr id="7" name="text"/>
+          <p:cNvSpPr txBox="1"/>
+          <p:nvPr/>
+        </p:nvSpPr>
+        <p:spPr>
+          <a:xfrm>
+            <a:off x="548640" y="3383280"/>
+            <a:ext cx="11094415" cy="457200"/>
+          </a:xfrm>
+          <a:prstGeom prst="rect">
+            <a:avLst/>
+          </a:prstGeom>
+          <a:noFill/>
+        </p:spPr>
+        <p:txBody>
+          <a:bodyPr wrap="square" lIns="0" rIns="0" tIns="0" bIns="0" anchor="t">
+            <a:spAutoFit/>
+          </a:bodyPr>
+          <a:lstStyle/>
+          <a:p>
+            <a:pPr algn="ctr">
+              <a:lnSpc>
+                <a:spcPct val="100000"/>
+              </a:lnSpc>
+            </a:pPr>
+            <a:r>
+              <a:rPr sz="2400" b="1">
+                <a:solidFill>
+                  <a:srgbClr val="16241F"/>
+                </a:solidFill>
+                <a:latin typeface="Calibri"/>
+              </a:rPr>
+              <a:t>How reliable its next reading is</a:t>
+            </a:r>
+          </a:p>
+        </p:txBody>
+      </p:sp>
+      <p:sp>
+        <p:nvSpPr>
+          <p:cNvPr id="8" name="text"/>
+          <p:cNvSpPr txBox="1"/>
+          <p:nvPr/>
+        </p:nvSpPr>
+        <p:spPr>
+          <a:xfrm>
+            <a:off x="548640" y="3931920"/>
+            <a:ext cx="11094415" cy="365760"/>
+          </a:xfrm>
+          <a:prstGeom prst="rect">
+            <a:avLst/>
+          </a:prstGeom>
+          <a:noFill/>
+        </p:spPr>
+        <p:txBody>
+          <a:bodyPr wrap="square" lIns="0" rIns="0" tIns="0" bIns="0" anchor="t">
+            <a:spAutoFit/>
+          </a:bodyPr>
+          <a:lstStyle/>
+          <a:p>
+            <a:pPr algn="ctr">
+              <a:lnSpc>
+                <a:spcPct val="100000"/>
+              </a:lnSpc>
+            </a:pPr>
+            <a:r>
+              <a:rPr sz="2400" b="0">
+                <a:solidFill>
+                  <a:srgbClr val="5B6F68"/>
+                </a:solidFill>
+                <a:latin typeface="Calibri"/>
+              </a:rPr>
+              <a:t>↓</a:t>
+            </a:r>
+          </a:p>
+        </p:txBody>
+      </p:sp>
+      <p:sp>
+        <p:nvSpPr>
+          <p:cNvPr id="9" name="text"/>
+          <p:cNvSpPr txBox="1"/>
+          <p:nvPr/>
+        </p:nvSpPr>
+        <p:spPr>
+          <a:xfrm>
+            <a:off x="548640" y="4480560"/>
+            <a:ext cx="11094415" cy="457200"/>
+          </a:xfrm>
+          <a:prstGeom prst="rect">
+            <a:avLst/>
+          </a:prstGeom>
+          <a:noFill/>
+        </p:spPr>
+        <p:txBody>
+          <a:bodyPr wrap="square" lIns="0" rIns="0" tIns="0" bIns="0" anchor="t">
+            <a:spAutoFit/>
+          </a:bodyPr>
+          <a:lstStyle/>
+          <a:p>
+            <a:pPr algn="ctr">
+              <a:lnSpc>
+                <a:spcPct val="100000"/>
+              </a:lnSpc>
+            </a:pPr>
+            <a:r>
+              <a:rPr sz="2400" b="1">
+                <a:solidFill>
+                  <a:srgbClr val="16241F"/>
+                </a:solidFill>
+                <a:latin typeface="Calibri"/>
+              </a:rPr>
+              <a:t>How much it expects to learn</a:t>
+            </a:r>
+          </a:p>
+        </p:txBody>
+      </p:sp>
+      <p:sp>
+        <p:nvSpPr>
+          <p:cNvPr id="10" name="text"/>
+          <p:cNvSpPr txBox="1"/>
+          <p:nvPr/>
+        </p:nvSpPr>
+        <p:spPr>
+          <a:xfrm>
+            <a:off x="548640" y="5806440"/>
+            <a:ext cx="11094415" cy="502920"/>
+          </a:xfrm>
+          <a:prstGeom prst="rect">
+            <a:avLst/>
+          </a:prstGeom>
+          <a:noFill/>
+        </p:spPr>
+        <p:txBody>
+          <a:bodyPr wrap="square" lIns="0" rIns="0" tIns="0" bIns="0" anchor="t">
+            <a:spAutoFit/>
+          </a:bodyPr>
+          <a:lstStyle/>
+          <a:p>
+            <a:pPr algn="l">
+              <a:lnSpc>
+                <a:spcPct val="100000"/>
+              </a:lnSpc>
+            </a:pPr>
+            <a:r>
+              <a:rPr sz="2200" b="1">
+                <a:solidFill>
+                  <a:srgbClr val="8A6000"/>
+                </a:solidFill>
+                <a:latin typeface="Calibri"/>
+              </a:rPr>
+              <a:t>Some moves can now offer more information than others.</a:t>
             </a:r>
           </a:p>
         </p:txBody>
@@ -25148,7 +25060,7 @@
                 </a:solidFill>
                 <a:latin typeface="Calibri"/>
               </a:rPr>
-              <a:t>How we'll work</a:t>
+              <a:t>How we will work</a:t>
             </a:r>
           </a:p>
         </p:txBody>
@@ -25269,7 +25181,7 @@
                 </a:solidFill>
                 <a:latin typeface="Calibri"/>
               </a:rPr>
-              <a:t>Two lines per task</a:t>
+              <a:t>Two lines to complete</a:t>
             </a:r>
           </a:p>
           <a:p>
@@ -25285,7 +25197,7 @@
                 </a:solidFill>
                 <a:latin typeface="Calibri"/>
               </a:rPr>
-              <a:t>Each task has two lines marked </a:t>
+              <a:t>In each task, you will fill in two lines marked </a:t>
             </a:r>
             <a:r>
               <a:rPr sz="1800" b="1">
@@ -25303,7 +25215,7 @@
                 </a:solidFill>
                 <a:latin typeface="Calibri"/>
               </a:rPr>
-              <a:t> for you to write. We've written the rest, so you can focus on the key concepts without worrying about the Python. Some bonus exercises ask you to write your own.</a:t>
+              <a:t>. We have written the rest so you can focus on the ideas. Some bonus exercises give you a chance to write more of your own code.</a:t>
             </a:r>
           </a:p>
         </p:txBody>
@@ -25365,7 +25277,7 @@
                 </a:solidFill>
                 <a:latin typeface="Calibri"/>
               </a:rPr>
-              <a:t>Hints when you need them</a:t>
+              <a:t>Help whenever you need it</a:t>
             </a:r>
           </a:p>
           <a:p>
@@ -25381,7 +25293,7 @@
                 </a:solidFill>
                 <a:latin typeface="Calibri"/>
               </a:rPr>
-              <a:t>Each task has two hints and a reference solution, collapsed below the code cell. Open them whenever you like, and using them is absolutely fine.</a:t>
+              <a:t>You will find two hints and a worked solution below each task’s code cell. Click to open them whenever you like. They are there to help, so use them freely.</a:t>
             </a:r>
           </a:p>
         </p:txBody>
@@ -25459,7 +25371,7 @@
                 </a:solidFill>
                 <a:latin typeface="Calibri"/>
               </a:rPr>
-              <a:t>Run the checkpoint cell at the end of every task, even if everything worked. It restores the setup the next task needs.</a:t>
+              <a:t>At the end of each task, run the checkpoint cell, even if your code worked. This gives everyone the same starting point for the next task.</a:t>
             </a:r>
           </a:p>
         </p:txBody>
@@ -25521,7 +25433,7 @@
                 </a:solidFill>
                 <a:latin typeface="Calibri"/>
               </a:rPr>
-              <a:t>One number in the chat</a:t>
+              <a:t>Share your result</a:t>
             </a:r>
           </a:p>
           <a:p>
@@ -25537,7 +25449,7 @@
                 </a:solidFill>
                 <a:latin typeface="Calibri"/>
               </a:rPr>
-              <a:t>Each task ends with one number to paste in the chat, then a 60-second poll.</a:t>
+              <a:t>Paste the number requested at the end of the task into the chat. We will then take a one-minute poll.</a:t>
             </a:r>
           </a:p>
         </p:txBody>
@@ -25576,7 +25488,7 @@
                 </a:solidFill>
                 <a:latin typeface="Calibri"/>
               </a:rPr>
-              <a:t>The aim is to explore the ideas behind the code, rather than test your programming skills. Questions are welcome any time, in the chat or on the anonymous form.</a:t>
+              <a:t>The focus is on understanding the ideas behind the code. Questions are welcome throughout, in the chat or through the anonymous form.</a:t>
             </a:r>
           </a:p>
         </p:txBody>
@@ -26186,7 +26098,7 @@
                 </a:solidFill>
                 <a:latin typeface="Calibri"/>
               </a:rPr>
-              <a:t>Where we're heading</a:t>
+              <a:t>What we will build</a:t>
             </a:r>
           </a:p>
         </p:txBody>
@@ -26283,7 +26195,7 @@
         <p:spPr>
           <a:xfrm>
             <a:off x="8503920" y="1325880"/>
-            <a:ext cx="3139135" cy="3291840"/>
+            <a:ext cx="3139135" cy="4297680"/>
           </a:xfrm>
           <a:prstGeom prst="rect">
             <a:avLst/>
@@ -26311,7 +26223,7 @@
                 </a:solidFill>
                 <a:latin typeface="Calibri"/>
               </a:rPr>
-              <a:t>By the end of Task 3, we'll have built this picture.</a:t>
+              <a:t>By the end of Task 3, we will have built the models that produce these three rocket paths.</a:t>
             </a:r>
           </a:p>
           <a:p>
@@ -26330,7 +26242,7 @@
                 </a:solidFill>
                 <a:latin typeface="Calibri"/>
               </a:rPr>
-              <a:t>Three rockets, one rock. The dashed line is the 1960 rocket.</a:t>
+              <a:t>The dashed line shows the 1960 rocket. The coloured lines show two versions of the curious rocket.</a:t>
             </a:r>
           </a:p>
           <a:p>
@@ -26346,7 +26258,7 @@
                 </a:solidFill>
                 <a:latin typeface="Calibri"/>
               </a:rPr>
-              <a:t>Cell 2 draws it. </a:t>
+              <a:t>Run the second code cell to see the preview: </a:t>
             </a:r>
             <a:r>
               <a:rPr sz="1900" b="0">
@@ -26560,15 +26472,17 @@
                 </a:solidFill>
                 <a:latin typeface="Calibri"/>
               </a:rPr>
-              <a:t>A Kalman filter estimates where the rocket is from noisy sensor readings, and a linear quadratic regulator (LQR) steers it to the landing pad.</a:t>
-            </a:r>
-          </a:p>
-          <a:p>
-            <a:pPr algn="l">
-              <a:lnSpc>
-                <a:spcPct val="100000"/>
-              </a:lnSpc>
-            </a:pPr>
+              <a:t>A </a:t>
+            </a:r>
+            <a:r>
+              <a:rPr sz="2100" b="1">
+                <a:solidFill>
+                  <a:srgbClr val="16241F"/>
+                </a:solidFill>
+                <a:latin typeface="Calibri"/>
+              </a:rPr>
+              <a:t>Kalman filter</a:t>
+            </a:r>
             <a:r>
               <a:rPr sz="2100" b="0">
                 <a:solidFill>
@@ -26576,7 +26490,60 @@
                 </a:solidFill>
                 <a:latin typeface="Calibri"/>
               </a:rPr>
-              <a:t>The sensor is equally reliable wherever the rocket flies.</a:t>
+              <a:t> estimates the rocket’s position from noisy sensor readings.</a:t>
+            </a:r>
+          </a:p>
+          <a:p>
+            <a:pPr algn="l">
+              <a:lnSpc>
+                <a:spcPct val="100000"/>
+              </a:lnSpc>
+              <a:spcAft>
+                <a:spcPts val="1200"/>
+              </a:spcAft>
+            </a:pPr>
+            <a:r>
+              <a:rPr sz="2100" b="0">
+                <a:solidFill>
+                  <a:srgbClr val="16241F"/>
+                </a:solidFill>
+                <a:latin typeface="Calibri"/>
+              </a:rPr>
+              <a:t>A </a:t>
+            </a:r>
+            <a:r>
+              <a:rPr sz="2100" b="1">
+                <a:solidFill>
+                  <a:srgbClr val="16241F"/>
+                </a:solidFill>
+                <a:latin typeface="Calibri"/>
+              </a:rPr>
+              <a:t>linear quadratic regulator (LQR)</a:t>
+            </a:r>
+            <a:r>
+              <a:rPr sz="2100" b="0">
+                <a:solidFill>
+                  <a:srgbClr val="16241F"/>
+                </a:solidFill>
+                <a:latin typeface="Calibri"/>
+              </a:rPr>
+              <a:t> steers the rocket towards the landing pad.</a:t>
+            </a:r>
+          </a:p>
+          <a:p>
+            <a:pPr algn="l">
+              <a:lnSpc>
+                <a:spcPct val="100000"/>
+              </a:lnSpc>
+            </a:pPr>
+            <a:r>
+              <a:rPr sz="2100" b="0">
+                <a:solidFill>
+                  <a:srgbClr val="16241F"/>
+                </a:solidFill>
+                <a:latin typeface="Calibri"/>
+              </a:rPr>
+              <a:t>The sensor has the same level of noise wherever the rocket flies.</a:t>
             </a:r>
           </a:p>
         </p:txBody>
@@ -26590,7 +26557,7 @@
         <p:spPr>
           <a:xfrm>
             <a:off x="548640" y="2926080"/>
-            <a:ext cx="11094415" cy="868680"/>
+            <a:ext cx="11094415" cy="502920"/>
           </a:xfrm>
           <a:prstGeom prst="rect">
             <a:avLst/>
@@ -26615,7 +26582,46 @@
                 </a:solidFill>
                 <a:latin typeface="Calibri"/>
               </a:rPr>
-              <a:t>Does that make every move equally informative?</a:t>
+              <a:t>Are all possible moves equally informative?</a:t>
+            </a:r>
+          </a:p>
+        </p:txBody>
+      </p:sp>
+      <p:sp>
+        <p:nvSpPr>
+          <p:cNvPr id="10" name="text"/>
+          <p:cNvSpPr txBox="1"/>
+          <p:nvPr/>
+        </p:nvSpPr>
+        <p:spPr>
+          <a:xfrm>
+            <a:off x="548640" y="3566160"/>
+            <a:ext cx="11094415" cy="274320"/>
+          </a:xfrm>
+          <a:prstGeom prst="rect">
+            <a:avLst/>
+          </a:prstGeom>
+          <a:noFill/>
+        </p:spPr>
+        <p:txBody>
+          <a:bodyPr wrap="square" lIns="0" rIns="0" tIns="0" bIns="0" anchor="t">
+            <a:spAutoFit/>
+          </a:bodyPr>
+          <a:lstStyle/>
+          <a:p>
+            <a:pPr algn="l">
+              <a:lnSpc>
+                <a:spcPct val="100000"/>
+              </a:lnSpc>
+            </a:pPr>
+            <a:r>
+              <a:rPr sz="1500" b="0">
+                <a:solidFill>
+                  <a:srgbClr val="5B6F68"/>
+                </a:solidFill>
+                <a:latin typeface="Calibri"/>
+              </a:rPr>
+              <a:t>pymdp notation and the corresponding cpomdp fields</a:t>
             </a:r>
           </a:p>
         </p:txBody>
